--- a/Fase3/03_results/Evaluación AgenteRL_F3– Plataforma plana  .pptx
+++ b/Fase3/03_results/Evaluación AgenteRL_F3– Plataforma plana  .pptx
@@ -110,6 +110,11 @@
       </a:defRPr>
     </a:lvl9pPr>
   </p:defaultTextStyle>
+  <p:extLst>
+    <p:ext uri="{EFAFB233-063F-42B5-8137-9DF3F51BA10A}">
+      <p15:sldGuideLst xmlns:p15="http://schemas.microsoft.com/office/powerpoint/2012/main"/>
+    </p:ext>
+  </p:extLst>
 </p:presentation>
 </file>
 
@@ -262,7 +267,7 @@
           <a:p>
             <a:fld id="{81EB1832-61BC-7C45-8C33-FAB16358293A}" type="datetimeFigureOut">
               <a:rPr lang="es-ES_tradnl" smtClean="0"/>
-              <a:t>29/3/26</a:t>
+              <a:t>6/4/26</a:t>
             </a:fld>
             <a:endParaRPr lang="es-ES_tradnl"/>
           </a:p>
@@ -462,7 +467,7 @@
           <a:p>
             <a:fld id="{81EB1832-61BC-7C45-8C33-FAB16358293A}" type="datetimeFigureOut">
               <a:rPr lang="es-ES_tradnl" smtClean="0"/>
-              <a:t>29/3/26</a:t>
+              <a:t>6/4/26</a:t>
             </a:fld>
             <a:endParaRPr lang="es-ES_tradnl"/>
           </a:p>
@@ -672,7 +677,7 @@
           <a:p>
             <a:fld id="{81EB1832-61BC-7C45-8C33-FAB16358293A}" type="datetimeFigureOut">
               <a:rPr lang="es-ES_tradnl" smtClean="0"/>
-              <a:t>29/3/26</a:t>
+              <a:t>6/4/26</a:t>
             </a:fld>
             <a:endParaRPr lang="es-ES_tradnl"/>
           </a:p>
@@ -1726,7 +1731,7 @@
           <a:p>
             <a:fld id="{81EB1832-61BC-7C45-8C33-FAB16358293A}" type="datetimeFigureOut">
               <a:rPr lang="es-ES_tradnl" smtClean="0"/>
-              <a:t>29/3/26</a:t>
+              <a:t>6/4/26</a:t>
             </a:fld>
             <a:endParaRPr lang="es-ES_tradnl"/>
           </a:p>
@@ -2002,7 +2007,7 @@
           <a:p>
             <a:fld id="{81EB1832-61BC-7C45-8C33-FAB16358293A}" type="datetimeFigureOut">
               <a:rPr lang="es-ES_tradnl" smtClean="0"/>
-              <a:t>29/3/26</a:t>
+              <a:t>6/4/26</a:t>
             </a:fld>
             <a:endParaRPr lang="es-ES_tradnl"/>
           </a:p>
@@ -2270,7 +2275,7 @@
           <a:p>
             <a:fld id="{81EB1832-61BC-7C45-8C33-FAB16358293A}" type="datetimeFigureOut">
               <a:rPr lang="es-ES_tradnl" smtClean="0"/>
-              <a:t>29/3/26</a:t>
+              <a:t>6/4/26</a:t>
             </a:fld>
             <a:endParaRPr lang="es-ES_tradnl"/>
           </a:p>
@@ -2685,7 +2690,7 @@
           <a:p>
             <a:fld id="{81EB1832-61BC-7C45-8C33-FAB16358293A}" type="datetimeFigureOut">
               <a:rPr lang="es-ES_tradnl" smtClean="0"/>
-              <a:t>29/3/26</a:t>
+              <a:t>6/4/26</a:t>
             </a:fld>
             <a:endParaRPr lang="es-ES_tradnl"/>
           </a:p>
@@ -2827,7 +2832,7 @@
           <a:p>
             <a:fld id="{81EB1832-61BC-7C45-8C33-FAB16358293A}" type="datetimeFigureOut">
               <a:rPr lang="es-ES_tradnl" smtClean="0"/>
-              <a:t>29/3/26</a:t>
+              <a:t>6/4/26</a:t>
             </a:fld>
             <a:endParaRPr lang="es-ES_tradnl"/>
           </a:p>
@@ -2940,7 +2945,7 @@
           <a:p>
             <a:fld id="{81EB1832-61BC-7C45-8C33-FAB16358293A}" type="datetimeFigureOut">
               <a:rPr lang="es-ES_tradnl" smtClean="0"/>
-              <a:t>29/3/26</a:t>
+              <a:t>6/4/26</a:t>
             </a:fld>
             <a:endParaRPr lang="es-ES_tradnl"/>
           </a:p>
@@ -3253,7 +3258,7 @@
           <a:p>
             <a:fld id="{81EB1832-61BC-7C45-8C33-FAB16358293A}" type="datetimeFigureOut">
               <a:rPr lang="es-ES_tradnl" smtClean="0"/>
-              <a:t>29/3/26</a:t>
+              <a:t>6/4/26</a:t>
             </a:fld>
             <a:endParaRPr lang="es-ES_tradnl"/>
           </a:p>
@@ -3542,7 +3547,7 @@
           <a:p>
             <a:fld id="{81EB1832-61BC-7C45-8C33-FAB16358293A}" type="datetimeFigureOut">
               <a:rPr lang="es-ES_tradnl" smtClean="0"/>
-              <a:t>29/3/26</a:t>
+              <a:t>6/4/26</a:t>
             </a:fld>
             <a:endParaRPr lang="es-ES_tradnl"/>
           </a:p>
@@ -3785,7 +3790,7 @@
           <a:p>
             <a:fld id="{81EB1832-61BC-7C45-8C33-FAB16358293A}" type="datetimeFigureOut">
               <a:rPr lang="es-ES_tradnl" smtClean="0"/>
-              <a:t>29/3/26</a:t>
+              <a:t>6/4/26</a:t>
             </a:fld>
             <a:endParaRPr lang="es-ES_tradnl"/>
           </a:p>
@@ -4347,38 +4352,6 @@
           </a:p>
         </p:txBody>
       </p:sp>
-      <p:pic>
-        <p:nvPicPr>
-          <p:cNvPr id="8" name="Onlinebild-Platzhalter 7">
-            <a:extLst>
-              <a:ext uri="{FF2B5EF4-FFF2-40B4-BE49-F238E27FC236}">
-                <a16:creationId xmlns:a16="http://schemas.microsoft.com/office/drawing/2014/main" id="{7E9F66A1-B9A7-7DB7-C94D-E20C9C256803}"/>
-              </a:ext>
-            </a:extLst>
-          </p:cNvPr>
-          <p:cNvPicPr>
-            <a:picLocks noGrp="1" noChangeAspect="1"/>
-          </p:cNvPicPr>
-          <p:nvPr>
-            <p:ph type="clipArt" sz="quarter" idx="15"/>
-          </p:nvPr>
-        </p:nvPicPr>
-        <p:blipFill>
-          <a:blip r:embed="rId2"/>
-          <a:stretch>
-            <a:fillRect/>
-          </a:stretch>
-        </p:blipFill>
-        <p:spPr>
-          <a:xfrm>
-            <a:off x="583920" y="2151063"/>
-            <a:ext cx="5239310" cy="4008437"/>
-          </a:xfrm>
-          <a:prstGeom prst="rect">
-            <a:avLst/>
-          </a:prstGeom>
-        </p:spPr>
-      </p:pic>
       <p:sp>
         <p:nvSpPr>
           <p:cNvPr id="4" name="Fußzeilenplatzhalter 2">
@@ -4508,6 +4481,38 @@
           </a:p>
         </p:txBody>
       </p:sp>
+      <p:pic>
+        <p:nvPicPr>
+          <p:cNvPr id="9" name="Onlinebild-Platzhalter 8">
+            <a:extLst>
+              <a:ext uri="{FF2B5EF4-FFF2-40B4-BE49-F238E27FC236}">
+                <a16:creationId xmlns:a16="http://schemas.microsoft.com/office/drawing/2014/main" id="{B7E46192-0EAC-5D6A-8B96-A56FFC22DAA4}"/>
+              </a:ext>
+            </a:extLst>
+          </p:cNvPr>
+          <p:cNvPicPr>
+            <a:picLocks noGrp="1" noChangeAspect="1"/>
+          </p:cNvPicPr>
+          <p:nvPr>
+            <p:ph type="clipArt" sz="quarter" idx="15"/>
+          </p:nvPr>
+        </p:nvPicPr>
+        <p:blipFill>
+          <a:blip r:embed="rId2"/>
+          <a:stretch>
+            <a:fillRect/>
+          </a:stretch>
+        </p:blipFill>
+        <p:spPr>
+          <a:xfrm>
+            <a:off x="520700" y="2231013"/>
+            <a:ext cx="5365750" cy="3848537"/>
+          </a:xfrm>
+          <a:prstGeom prst="rect">
+            <a:avLst/>
+          </a:prstGeom>
+        </p:spPr>
+      </p:pic>
     </p:spTree>
     <p:extLst>
       <p:ext uri="{BB962C8B-B14F-4D97-AF65-F5344CB8AC3E}">
@@ -4598,14 +4603,14 @@
             <p:ph sz="quarter" idx="14"/>
             <p:extLst>
               <p:ext uri="{D42A27DB-BD31-4B8C-83A1-F6EECF244321}">
-                <p14:modId xmlns:p14="http://schemas.microsoft.com/office/powerpoint/2010/main" val="2744893613"/>
+                <p14:modId xmlns:p14="http://schemas.microsoft.com/office/powerpoint/2010/main" val="2640102284"/>
               </p:ext>
             </p:extLst>
           </p:nvPr>
         </p:nvGraphicFramePr>
         <p:xfrm>
           <a:off x="561487" y="4765096"/>
-          <a:ext cx="10532960" cy="1635760"/>
+          <a:ext cx="10532960" cy="1388745"/>
         </p:xfrm>
         <a:graphic>
           <a:graphicData uri="http://schemas.openxmlformats.org/drawingml/2006/table">
@@ -4737,7 +4742,7 @@
                         <a:buNone/>
                       </a:pPr>
                       <a:r>
-                        <a:rPr lang="es-ES_tradnl" sz="1000" noProof="1">
+                        <a:rPr lang="es-ES_tradnl" sz="900" noProof="1">
                           <a:solidFill>
                             <a:schemeClr val="tx1"/>
                           </a:solidFill>
@@ -4747,7 +4752,7 @@
                         </a:rPr>
                         <a:t>Rank</a:t>
                       </a:r>
-                      <a:endParaRPr lang="es-ES_tradnl" sz="1000" noProof="1">
+                      <a:endParaRPr lang="es-ES_tradnl" sz="900" noProof="1">
                         <a:solidFill>
                           <a:schemeClr val="tx1"/>
                         </a:solidFill>
@@ -4789,7 +4794,7 @@
                         <a:buNone/>
                       </a:pPr>
                       <a:r>
-                        <a:rPr lang="es-ES_tradnl" sz="1000" noProof="1">
+                        <a:rPr lang="es-ES_tradnl" sz="900" noProof="1">
                           <a:solidFill>
                             <a:schemeClr val="tx1"/>
                           </a:solidFill>
@@ -4799,7 +4804,7 @@
                         </a:rPr>
                         <a:t>Sweep Val</a:t>
                       </a:r>
-                      <a:endParaRPr lang="es-ES_tradnl" sz="1000" noProof="1">
+                      <a:endParaRPr lang="es-ES_tradnl" sz="900" noProof="1">
                         <a:solidFill>
                           <a:schemeClr val="tx1"/>
                         </a:solidFill>
@@ -4841,7 +4846,7 @@
                         <a:buNone/>
                       </a:pPr>
                       <a:r>
-                        <a:rPr lang="es-ES_tradnl" sz="1000" noProof="1">
+                        <a:rPr lang="es-ES_tradnl" sz="900" noProof="1">
                           <a:solidFill>
                             <a:schemeClr val="tx1"/>
                           </a:solidFill>
@@ -4851,7 +4856,7 @@
                         </a:rPr>
                         <a:t>O1_final</a:t>
                       </a:r>
-                      <a:endParaRPr lang="es-ES_tradnl" sz="1000" noProof="1">
+                      <a:endParaRPr lang="es-ES_tradnl" sz="900" noProof="1">
                         <a:solidFill>
                           <a:schemeClr val="tx1"/>
                         </a:solidFill>
@@ -4896,7 +4901,7 @@
                         <a:buNone/>
                       </a:pPr>
                       <a:r>
-                        <a:rPr lang="es-ES_tradnl" sz="1000" noProof="1">
+                        <a:rPr lang="es-ES_tradnl" sz="900" noProof="1">
                           <a:solidFill>
                             <a:schemeClr val="tx1"/>
                           </a:solidFill>
@@ -4906,7 +4911,7 @@
                         </a:rPr>
                         <a:t>Mp [°]</a:t>
                       </a:r>
-                      <a:endParaRPr lang="es-ES_tradnl" sz="1000" noProof="1">
+                      <a:endParaRPr lang="es-ES_tradnl" sz="900" noProof="1">
                         <a:solidFill>
                           <a:schemeClr val="tx1"/>
                         </a:solidFill>
@@ -4948,7 +4953,7 @@
                         <a:buNone/>
                       </a:pPr>
                       <a:r>
-                        <a:rPr lang="es-ES_tradnl" sz="1000" noProof="1">
+                        <a:rPr lang="es-ES_tradnl" sz="900" noProof="1">
                           <a:solidFill>
                             <a:schemeClr val="tx1"/>
                           </a:solidFill>
@@ -4958,7 +4963,7 @@
                         </a:rPr>
                         <a:t>Mp[%]</a:t>
                       </a:r>
-                      <a:endParaRPr lang="es-ES_tradnl" sz="1000" noProof="1">
+                      <a:endParaRPr lang="es-ES_tradnl" sz="900" noProof="1">
                         <a:solidFill>
                           <a:schemeClr val="tx1"/>
                         </a:solidFill>
@@ -5003,7 +5008,7 @@
                         <a:buNone/>
                       </a:pPr>
                       <a:r>
-                        <a:rPr lang="es-ES_tradnl" sz="1000" noProof="1">
+                        <a:rPr lang="es-ES_tradnl" sz="900" noProof="1">
                           <a:solidFill>
                             <a:schemeClr val="tx1"/>
                           </a:solidFill>
@@ -5013,7 +5018,7 @@
                         </a:rPr>
                         <a:t>T[s]</a:t>
                       </a:r>
-                      <a:endParaRPr lang="es-ES_tradnl" sz="1000" noProof="1">
+                      <a:endParaRPr lang="es-ES_tradnl" sz="900" noProof="1">
                         <a:solidFill>
                           <a:schemeClr val="tx1"/>
                         </a:solidFill>
@@ -5058,7 +5063,7 @@
                         <a:buNone/>
                       </a:pPr>
                       <a:r>
-                        <a:rPr lang="es-ES_tradnl" sz="1000" noProof="1">
+                        <a:rPr lang="es-ES_tradnl" sz="900" noProof="1">
                           <a:solidFill>
                             <a:schemeClr val="tx1"/>
                           </a:solidFill>
@@ -5068,7 +5073,7 @@
                         </a:rPr>
                         <a:t>e_ss_abs[°]</a:t>
                       </a:r>
-                      <a:endParaRPr lang="es-ES_tradnl" sz="1000" noProof="1">
+                      <a:endParaRPr lang="es-ES_tradnl" sz="900" noProof="1">
                         <a:solidFill>
                           <a:schemeClr val="tx1"/>
                         </a:solidFill>
@@ -5110,7 +5115,7 @@
                         <a:buNone/>
                       </a:pPr>
                       <a:r>
-                        <a:rPr lang="es-ES_tradnl" sz="1000" noProof="1">
+                        <a:rPr lang="es-ES_tradnl" sz="900" noProof="1">
                           <a:solidFill>
                             <a:schemeClr val="tx1"/>
                           </a:solidFill>
@@ -5120,7 +5125,7 @@
                         </a:rPr>
                         <a:t>RMSE[°]</a:t>
                       </a:r>
-                      <a:endParaRPr lang="es-ES_tradnl" sz="1000" noProof="1">
+                      <a:endParaRPr lang="es-ES_tradnl" sz="900" noProof="1">
                         <a:solidFill>
                           <a:schemeClr val="tx1"/>
                         </a:solidFill>
@@ -5162,7 +5167,7 @@
                         <a:buNone/>
                       </a:pPr>
                       <a:r>
-                        <a:rPr lang="es-ES_tradnl" sz="1000" noProof="1">
+                        <a:rPr lang="es-ES_tradnl" sz="900" noProof="1">
                           <a:solidFill>
                             <a:schemeClr val="tx1"/>
                           </a:solidFill>
@@ -5172,7 +5177,7 @@
                         </a:rPr>
                         <a:t>ITAE[°s]</a:t>
                       </a:r>
-                      <a:endParaRPr lang="es-ES_tradnl" sz="1000" noProof="1">
+                      <a:endParaRPr lang="es-ES_tradnl" sz="900" noProof="1">
                         <a:solidFill>
                           <a:schemeClr val="tx1"/>
                         </a:solidFill>
@@ -5214,7 +5219,7 @@
                         <a:buNone/>
                       </a:pPr>
                       <a:r>
-                        <a:rPr lang="es-ES_tradnl" sz="1000" noProof="1">
+                        <a:rPr lang="es-ES_tradnl" sz="900" noProof="1">
                           <a:solidFill>
                             <a:schemeClr val="tx1"/>
                           </a:solidFill>
@@ -5224,7 +5229,7 @@
                         </a:rPr>
                         <a:t>Tr[s]</a:t>
                       </a:r>
-                      <a:endParaRPr lang="es-ES_tradnl" sz="1000" noProof="1">
+                      <a:endParaRPr lang="es-ES_tradnl" sz="900" noProof="1">
                         <a:solidFill>
                           <a:schemeClr val="tx1"/>
                         </a:solidFill>
@@ -5266,7 +5271,7 @@
                         <a:buNone/>
                       </a:pPr>
                       <a:r>
-                        <a:rPr lang="es-ES_tradnl" sz="1000" noProof="1">
+                        <a:rPr lang="es-ES_tradnl" sz="900" noProof="1">
                           <a:solidFill>
                             <a:schemeClr val="tx1"/>
                           </a:solidFill>
@@ -5276,7 +5281,7 @@
                         </a:rPr>
                         <a:t>Iosc</a:t>
                       </a:r>
-                      <a:endParaRPr lang="es-ES_tradnl" sz="1000" noProof="1">
+                      <a:endParaRPr lang="es-ES_tradnl" sz="900" noProof="1">
                         <a:solidFill>
                           <a:schemeClr val="tx1"/>
                         </a:solidFill>
@@ -5318,7 +5323,7 @@
                         <a:buNone/>
                       </a:pPr>
                       <a:r>
-                        <a:rPr lang="es-ES_tradnl" sz="1000" noProof="1">
+                        <a:rPr lang="es-ES_tradnl" sz="900" noProof="1">
                           <a:solidFill>
                             <a:schemeClr val="tx1"/>
                           </a:solidFill>
@@ -5328,7 +5333,7 @@
                         </a:rPr>
                         <a:t>U_peak</a:t>
                       </a:r>
-                      <a:endParaRPr lang="es-ES_tradnl" sz="1000" noProof="1">
+                      <a:endParaRPr lang="es-ES_tradnl" sz="900" noProof="1">
                         <a:solidFill>
                           <a:schemeClr val="tx1"/>
                         </a:solidFill>
@@ -5370,7 +5375,7 @@
                         <a:buNone/>
                       </a:pPr>
                       <a:r>
-                        <a:rPr lang="es-ES_tradnl" sz="1000" noProof="1">
+                        <a:rPr lang="es-ES_tradnl" sz="900" noProof="1">
                           <a:solidFill>
                             <a:schemeClr val="tx1"/>
                           </a:solidFill>
@@ -5380,7 +5385,7 @@
                         </a:rPr>
                         <a:t>U_rms</a:t>
                       </a:r>
-                      <a:endParaRPr lang="es-ES_tradnl" sz="1000" noProof="1">
+                      <a:endParaRPr lang="es-ES_tradnl" sz="900" noProof="1">
                         <a:solidFill>
                           <a:schemeClr val="tx1"/>
                         </a:solidFill>
@@ -5422,7 +5427,7 @@
                         <a:buNone/>
                       </a:pPr>
                       <a:r>
-                        <a:rPr lang="es-ES_tradnl" sz="1000" noProof="1">
+                        <a:rPr lang="es-ES_tradnl" sz="900" noProof="1">
                           <a:solidFill>
                             <a:schemeClr val="tx1"/>
                           </a:solidFill>
@@ -5432,7 +5437,7 @@
                         </a:rPr>
                         <a:t>U_energy</a:t>
                       </a:r>
-                      <a:endParaRPr lang="es-ES_tradnl" sz="1000" noProof="1">
+                      <a:endParaRPr lang="es-ES_tradnl" sz="900" noProof="1">
                         <a:solidFill>
                           <a:schemeClr val="tx1"/>
                         </a:solidFill>
@@ -5474,7 +5479,7 @@
                         <a:buNone/>
                       </a:pPr>
                       <a:r>
-                        <a:rPr lang="es-ES_tradnl" sz="1000" noProof="1">
+                        <a:rPr lang="es-ES_tradnl" sz="900" noProof="1">
                           <a:solidFill>
                             <a:schemeClr val="tx1"/>
                           </a:solidFill>
@@ -5484,7 +5489,7 @@
                         </a:rPr>
                         <a:t>U_abs</a:t>
                       </a:r>
-                      <a:endParaRPr lang="es-ES_tradnl" sz="1000" noProof="1">
+                      <a:endParaRPr lang="es-ES_tradnl" sz="900" noProof="1">
                         <a:solidFill>
                           <a:schemeClr val="tx1"/>
                         </a:solidFill>
@@ -5526,7 +5531,7 @@
                         <a:buNone/>
                       </a:pPr>
                       <a:r>
-                        <a:rPr lang="es-ES_tradnl" sz="1000" noProof="1">
+                        <a:rPr lang="es-ES_tradnl" sz="900" noProof="1">
                           <a:solidFill>
                             <a:schemeClr val="tx1"/>
                           </a:solidFill>
@@ -5536,7 +5541,7 @@
                         </a:rPr>
                         <a:t>U_TV</a:t>
                       </a:r>
-                      <a:endParaRPr lang="es-ES_tradnl" sz="1000" noProof="1">
+                      <a:endParaRPr lang="es-ES_tradnl" sz="900" noProof="1">
                         <a:solidFill>
                           <a:schemeClr val="tx1"/>
                         </a:solidFill>
@@ -5585,7 +5590,7 @@
                         <a:buNone/>
                       </a:pPr>
                       <a:r>
-                        <a:rPr lang="es-ES_tradnl" sz="1000" b="0" noProof="1">
+                        <a:rPr lang="es-ES_tradnl" sz="900" b="0" noProof="1">
                           <a:solidFill>
                             <a:schemeClr val="tx1"/>
                           </a:solidFill>
@@ -5595,7 +5600,7 @@
                         </a:rPr>
                         <a:t>1</a:t>
                       </a:r>
-                      <a:endParaRPr lang="es-ES_tradnl" sz="1000" b="0" noProof="1">
+                      <a:endParaRPr lang="es-ES_tradnl" sz="900" b="0" noProof="1">
                         <a:solidFill>
                           <a:schemeClr val="tx1"/>
                         </a:solidFill>
@@ -5628,7 +5633,7 @@
                         <a:buNone/>
                       </a:pPr>
                       <a:r>
-                        <a:rPr lang="es-ES_tradnl" sz="1050" dirty="0">
+                        <a:rPr lang="es-ES_tradnl" sz="900" dirty="0">
                           <a:effectLst/>
                           <a:latin typeface="Times New Roman" panose="02020603050405020304" pitchFamily="18" charset="0"/>
                           <a:ea typeface="Times New Roman" panose="02020603050405020304" pitchFamily="18" charset="0"/>
@@ -5660,7 +5665,7 @@
                         <a:buNone/>
                       </a:pPr>
                       <a:r>
-                        <a:rPr lang="es-ES_tradnl" sz="1050" dirty="0">
+                        <a:rPr lang="es-ES_tradnl" sz="900" dirty="0">
                           <a:effectLst/>
                           <a:latin typeface="Times New Roman" panose="02020603050405020304" pitchFamily="18" charset="0"/>
                           <a:ea typeface="Times New Roman" panose="02020603050405020304" pitchFamily="18" charset="0"/>
@@ -5692,7 +5697,7 @@
                         <a:buNone/>
                       </a:pPr>
                       <a:r>
-                        <a:rPr lang="es-ES_tradnl" sz="1050" dirty="0">
+                        <a:rPr lang="es-ES_tradnl" sz="900" dirty="0">
                           <a:effectLst/>
                           <a:latin typeface="Times New Roman" panose="02020603050405020304" pitchFamily="18" charset="0"/>
                           <a:ea typeface="Times New Roman" panose="02020603050405020304" pitchFamily="18" charset="0"/>
@@ -5724,7 +5729,7 @@
                         <a:buNone/>
                       </a:pPr>
                       <a:r>
-                        <a:rPr lang="es-ES_tradnl" sz="1050" dirty="0">
+                        <a:rPr lang="es-ES_tradnl" sz="900" dirty="0">
                           <a:effectLst/>
                           <a:latin typeface="Times New Roman" panose="02020603050405020304" pitchFamily="18" charset="0"/>
                           <a:ea typeface="Times New Roman" panose="02020603050405020304" pitchFamily="18" charset="0"/>
@@ -5756,7 +5761,7 @@
                         <a:buNone/>
                       </a:pPr>
                       <a:r>
-                        <a:rPr lang="es-ES_tradnl" sz="1050" dirty="0">
+                        <a:rPr lang="es-ES_tradnl" sz="900" dirty="0">
                           <a:effectLst/>
                           <a:latin typeface="Times New Roman" panose="02020603050405020304" pitchFamily="18" charset="0"/>
                           <a:ea typeface="Times New Roman" panose="02020603050405020304" pitchFamily="18" charset="0"/>
@@ -5788,7 +5793,7 @@
                         <a:buNone/>
                       </a:pPr>
                       <a:r>
-                        <a:rPr lang="es-ES_tradnl" sz="1050" dirty="0">
+                        <a:rPr lang="es-ES_tradnl" sz="900" dirty="0">
                           <a:effectLst/>
                           <a:latin typeface="Times New Roman" panose="02020603050405020304" pitchFamily="18" charset="0"/>
                           <a:ea typeface="Times New Roman" panose="02020603050405020304" pitchFamily="18" charset="0"/>
@@ -5820,7 +5825,7 @@
                         <a:buNone/>
                       </a:pPr>
                       <a:r>
-                        <a:rPr lang="es-ES_tradnl" sz="1050" dirty="0">
+                        <a:rPr lang="es-ES_tradnl" sz="900" dirty="0">
                           <a:effectLst/>
                           <a:latin typeface="Times New Roman" panose="02020603050405020304" pitchFamily="18" charset="0"/>
                           <a:ea typeface="Times New Roman" panose="02020603050405020304" pitchFamily="18" charset="0"/>
@@ -5852,7 +5857,7 @@
                         <a:buNone/>
                       </a:pPr>
                       <a:r>
-                        <a:rPr lang="es-ES_tradnl" sz="1050" dirty="0">
+                        <a:rPr lang="es-ES_tradnl" sz="900" dirty="0">
                           <a:effectLst/>
                           <a:latin typeface="Times New Roman" panose="02020603050405020304" pitchFamily="18" charset="0"/>
                           <a:ea typeface="Times New Roman" panose="02020603050405020304" pitchFamily="18" charset="0"/>
@@ -5884,7 +5889,7 @@
                         <a:buNone/>
                       </a:pPr>
                       <a:r>
-                        <a:rPr lang="es-ES_tradnl" sz="1050" dirty="0">
+                        <a:rPr lang="es-ES_tradnl" sz="900" dirty="0">
                           <a:effectLst/>
                           <a:latin typeface="Times New Roman" panose="02020603050405020304" pitchFamily="18" charset="0"/>
                           <a:ea typeface="Times New Roman" panose="02020603050405020304" pitchFamily="18" charset="0"/>
@@ -5916,7 +5921,7 @@
                         <a:buNone/>
                       </a:pPr>
                       <a:r>
-                        <a:rPr lang="es-ES_tradnl" sz="1050" dirty="0">
+                        <a:rPr lang="es-ES_tradnl" sz="900" dirty="0">
                           <a:effectLst/>
                           <a:latin typeface="Times New Roman" panose="02020603050405020304" pitchFamily="18" charset="0"/>
                           <a:ea typeface="Times New Roman" panose="02020603050405020304" pitchFamily="18" charset="0"/>
@@ -5948,17 +5953,23 @@
                         <a:buNone/>
                       </a:pPr>
                       <a:r>
-                        <a:rPr lang="es-ES_tradnl" sz="1050" dirty="0">
+                        <a:rPr lang="es-ES" sz="900">
                           <a:effectLst/>
                           <a:latin typeface="Times New Roman" panose="02020603050405020304" pitchFamily="18" charset="0"/>
                           <a:ea typeface="Times New Roman" panose="02020603050405020304" pitchFamily="18" charset="0"/>
                           <a:cs typeface="Times New Roman" panose="02020603050405020304" pitchFamily="18" charset="0"/>
                         </a:rPr>
-                        <a:t>10.00</a:t>
-                      </a:r>
-                    </a:p>
-                  </a:txBody>
-                  <a:tcPr marL="68580" marR="68580" marT="0" marB="0" anchor="ctr">
+                        <a:t>6.00</a:t>
+                      </a:r>
+                      <a:endParaRPr lang="de-DE" sz="900">
+                        <a:effectLst/>
+                        <a:latin typeface="Times New Roman" panose="02020603050405020304" pitchFamily="18" charset="0"/>
+                        <a:ea typeface="Times New Roman" panose="02020603050405020304" pitchFamily="18" charset="0"/>
+                        <a:cs typeface="Times New Roman" panose="02020603050405020304" pitchFamily="18" charset="0"/>
+                      </a:endParaRPr>
+                    </a:p>
+                  </a:txBody>
+                  <a:tcPr marL="68580" marR="68580" marT="0" marB="0">
                     <a:lnT w="12700" cap="flat" cmpd="sng" algn="ctr">
                       <a:solidFill>
                         <a:schemeClr val="tx1"/>
@@ -5980,17 +5991,23 @@
                         <a:buNone/>
                       </a:pPr>
                       <a:r>
-                        <a:rPr lang="es-ES_tradnl" sz="1050" dirty="0">
+                        <a:rPr lang="es-ES" sz="900">
                           <a:effectLst/>
                           <a:latin typeface="Times New Roman" panose="02020603050405020304" pitchFamily="18" charset="0"/>
                           <a:ea typeface="Times New Roman" panose="02020603050405020304" pitchFamily="18" charset="0"/>
                           <a:cs typeface="Times New Roman" panose="02020603050405020304" pitchFamily="18" charset="0"/>
                         </a:rPr>
-                        <a:t>3.13</a:t>
-                      </a:r>
-                    </a:p>
-                  </a:txBody>
-                  <a:tcPr marL="68580" marR="68580" marT="0" marB="0" anchor="ctr">
+                        <a:t>2.01</a:t>
+                      </a:r>
+                      <a:endParaRPr lang="de-DE" sz="900">
+                        <a:effectLst/>
+                        <a:latin typeface="Times New Roman" panose="02020603050405020304" pitchFamily="18" charset="0"/>
+                        <a:ea typeface="Times New Roman" panose="02020603050405020304" pitchFamily="18" charset="0"/>
+                        <a:cs typeface="Times New Roman" panose="02020603050405020304" pitchFamily="18" charset="0"/>
+                      </a:endParaRPr>
+                    </a:p>
+                  </a:txBody>
+                  <a:tcPr marL="68580" marR="68580" marT="0" marB="0">
                     <a:lnT w="12700" cap="flat" cmpd="sng" algn="ctr">
                       <a:solidFill>
                         <a:schemeClr val="tx1"/>
@@ -6012,17 +6029,23 @@
                         <a:buNone/>
                       </a:pPr>
                       <a:r>
-                        <a:rPr lang="es-ES_tradnl" sz="1050" dirty="0">
+                        <a:rPr lang="es-ES" sz="900">
                           <a:effectLst/>
                           <a:latin typeface="Times New Roman" panose="02020603050405020304" pitchFamily="18" charset="0"/>
                           <a:ea typeface="Times New Roman" panose="02020603050405020304" pitchFamily="18" charset="0"/>
                           <a:cs typeface="Times New Roman" panose="02020603050405020304" pitchFamily="18" charset="0"/>
                         </a:rPr>
-                        <a:t>51.53</a:t>
-                      </a:r>
-                    </a:p>
-                  </a:txBody>
-                  <a:tcPr marL="68580" marR="68580" marT="0" marB="0" anchor="ctr">
+                        <a:t>21.27</a:t>
+                      </a:r>
+                      <a:endParaRPr lang="de-DE" sz="900">
+                        <a:effectLst/>
+                        <a:latin typeface="Times New Roman" panose="02020603050405020304" pitchFamily="18" charset="0"/>
+                        <a:ea typeface="Times New Roman" panose="02020603050405020304" pitchFamily="18" charset="0"/>
+                        <a:cs typeface="Times New Roman" panose="02020603050405020304" pitchFamily="18" charset="0"/>
+                      </a:endParaRPr>
+                    </a:p>
+                  </a:txBody>
+                  <a:tcPr marL="68580" marR="68580" marT="0" marB="0">
                     <a:lnT w="12700" cap="flat" cmpd="sng" algn="ctr">
                       <a:solidFill>
                         <a:schemeClr val="tx1"/>
@@ -6044,17 +6067,23 @@
                         <a:buNone/>
                       </a:pPr>
                       <a:r>
-                        <a:rPr lang="es-ES_tradnl" sz="1050" dirty="0">
+                        <a:rPr lang="es-ES" sz="900">
                           <a:effectLst/>
                           <a:latin typeface="Times New Roman" panose="02020603050405020304" pitchFamily="18" charset="0"/>
                           <a:ea typeface="Times New Roman" panose="02020603050405020304" pitchFamily="18" charset="0"/>
                           <a:cs typeface="Times New Roman" panose="02020603050405020304" pitchFamily="18" charset="0"/>
                         </a:rPr>
-                        <a:t>6.16</a:t>
-                      </a:r>
-                    </a:p>
-                  </a:txBody>
-                  <a:tcPr marL="68580" marR="68580" marT="0" marB="0" anchor="ctr">
+                        <a:t>4.30</a:t>
+                      </a:r>
+                      <a:endParaRPr lang="de-DE" sz="900">
+                        <a:effectLst/>
+                        <a:latin typeface="Times New Roman" panose="02020603050405020304" pitchFamily="18" charset="0"/>
+                        <a:ea typeface="Times New Roman" panose="02020603050405020304" pitchFamily="18" charset="0"/>
+                        <a:cs typeface="Times New Roman" panose="02020603050405020304" pitchFamily="18" charset="0"/>
+                      </a:endParaRPr>
+                    </a:p>
+                  </a:txBody>
+                  <a:tcPr marL="68580" marR="68580" marT="0" marB="0">
                     <a:lnT w="12700" cap="flat" cmpd="sng" algn="ctr">
                       <a:solidFill>
                         <a:schemeClr val="tx1"/>
@@ -6076,17 +6105,23 @@
                         <a:buNone/>
                       </a:pPr>
                       <a:r>
-                        <a:rPr lang="es-ES_tradnl" sz="1050" dirty="0">
+                        <a:rPr lang="es-ES" sz="900">
                           <a:effectLst/>
                           <a:latin typeface="Times New Roman" panose="02020603050405020304" pitchFamily="18" charset="0"/>
                           <a:ea typeface="Times New Roman" panose="02020603050405020304" pitchFamily="18" charset="0"/>
                           <a:cs typeface="Times New Roman" panose="02020603050405020304" pitchFamily="18" charset="0"/>
                         </a:rPr>
-                        <a:t>35.23</a:t>
-                      </a:r>
-                    </a:p>
-                  </a:txBody>
-                  <a:tcPr marL="68580" marR="68580" marT="0" marB="0" anchor="ctr">
+                        <a:t>42.63</a:t>
+                      </a:r>
+                      <a:endParaRPr lang="de-DE" sz="900">
+                        <a:effectLst/>
+                        <a:latin typeface="Times New Roman" panose="02020603050405020304" pitchFamily="18" charset="0"/>
+                        <a:ea typeface="Times New Roman" panose="02020603050405020304" pitchFamily="18" charset="0"/>
+                        <a:cs typeface="Times New Roman" panose="02020603050405020304" pitchFamily="18" charset="0"/>
+                      </a:endParaRPr>
+                    </a:p>
+                  </a:txBody>
+                  <a:tcPr marL="68580" marR="68580" marT="0" marB="0">
                     <a:lnT w="12700" cap="flat" cmpd="sng" algn="ctr">
                       <a:solidFill>
                         <a:schemeClr val="tx1"/>
@@ -6115,7 +6150,7 @@
                         <a:buNone/>
                       </a:pPr>
                       <a:r>
-                        <a:rPr lang="es-ES_tradnl" sz="1000" b="0" noProof="1">
+                        <a:rPr lang="es-ES_tradnl" sz="900" b="0" noProof="1">
                           <a:solidFill>
                             <a:schemeClr val="tx1"/>
                           </a:solidFill>
@@ -6141,7 +6176,7 @@
                         <a:buNone/>
                       </a:pPr>
                       <a:r>
-                        <a:rPr lang="es-ES_tradnl" sz="1050" dirty="0">
+                        <a:rPr lang="es-ES_tradnl" sz="900" dirty="0">
                           <a:effectLst/>
                           <a:latin typeface="Times New Roman" panose="02020603050405020304" pitchFamily="18" charset="0"/>
                           <a:ea typeface="Times New Roman" panose="02020603050405020304" pitchFamily="18" charset="0"/>
@@ -6164,7 +6199,7 @@
                         <a:buNone/>
                       </a:pPr>
                       <a:r>
-                        <a:rPr lang="es-ES_tradnl" sz="1050" dirty="0">
+                        <a:rPr lang="es-ES_tradnl" sz="900" dirty="0">
                           <a:effectLst/>
                           <a:latin typeface="Times New Roman" panose="02020603050405020304" pitchFamily="18" charset="0"/>
                           <a:ea typeface="Times New Roman" panose="02020603050405020304" pitchFamily="18" charset="0"/>
@@ -6187,7 +6222,7 @@
                         <a:buNone/>
                       </a:pPr>
                       <a:r>
-                        <a:rPr lang="es-ES_tradnl" sz="1050" dirty="0">
+                        <a:rPr lang="es-ES_tradnl" sz="900" dirty="0">
                           <a:effectLst/>
                           <a:latin typeface="Times New Roman" panose="02020603050405020304" pitchFamily="18" charset="0"/>
                           <a:ea typeface="Times New Roman" panose="02020603050405020304" pitchFamily="18" charset="0"/>
@@ -6210,7 +6245,7 @@
                         <a:buNone/>
                       </a:pPr>
                       <a:r>
-                        <a:rPr lang="es-ES_tradnl" sz="1050" dirty="0">
+                        <a:rPr lang="es-ES_tradnl" sz="900" dirty="0">
                           <a:effectLst/>
                           <a:latin typeface="Times New Roman" panose="02020603050405020304" pitchFamily="18" charset="0"/>
                           <a:ea typeface="Times New Roman" panose="02020603050405020304" pitchFamily="18" charset="0"/>
@@ -6233,7 +6268,7 @@
                         <a:buNone/>
                       </a:pPr>
                       <a:r>
-                        <a:rPr lang="es-ES_tradnl" sz="1050" dirty="0">
+                        <a:rPr lang="es-ES_tradnl" sz="900" dirty="0">
                           <a:effectLst/>
                           <a:latin typeface="Times New Roman" panose="02020603050405020304" pitchFamily="18" charset="0"/>
                           <a:ea typeface="Times New Roman" panose="02020603050405020304" pitchFamily="18" charset="0"/>
@@ -6256,7 +6291,7 @@
                         <a:buNone/>
                       </a:pPr>
                       <a:r>
-                        <a:rPr lang="es-ES_tradnl" sz="1050" dirty="0">
+                        <a:rPr lang="es-ES_tradnl" sz="900" dirty="0">
                           <a:effectLst/>
                           <a:latin typeface="Times New Roman" panose="02020603050405020304" pitchFamily="18" charset="0"/>
                           <a:ea typeface="Times New Roman" panose="02020603050405020304" pitchFamily="18" charset="0"/>
@@ -6279,7 +6314,7 @@
                         <a:buNone/>
                       </a:pPr>
                       <a:r>
-                        <a:rPr lang="es-ES_tradnl" sz="1050" dirty="0">
+                        <a:rPr lang="es-ES_tradnl" sz="900" dirty="0">
                           <a:effectLst/>
                           <a:latin typeface="Times New Roman" panose="02020603050405020304" pitchFamily="18" charset="0"/>
                           <a:ea typeface="Times New Roman" panose="02020603050405020304" pitchFamily="18" charset="0"/>
@@ -6302,7 +6337,7 @@
                         <a:buNone/>
                       </a:pPr>
                       <a:r>
-                        <a:rPr lang="es-ES_tradnl" sz="1050" dirty="0">
+                        <a:rPr lang="es-ES_tradnl" sz="900" dirty="0">
                           <a:effectLst/>
                           <a:latin typeface="Times New Roman" panose="02020603050405020304" pitchFamily="18" charset="0"/>
                           <a:ea typeface="Times New Roman" panose="02020603050405020304" pitchFamily="18" charset="0"/>
@@ -6325,7 +6360,7 @@
                         <a:buNone/>
                       </a:pPr>
                       <a:r>
-                        <a:rPr lang="es-ES_tradnl" sz="1050" dirty="0">
+                        <a:rPr lang="es-ES_tradnl" sz="900" dirty="0">
                           <a:effectLst/>
                           <a:latin typeface="Times New Roman" panose="02020603050405020304" pitchFamily="18" charset="0"/>
                           <a:ea typeface="Times New Roman" panose="02020603050405020304" pitchFamily="18" charset="0"/>
@@ -6348,7 +6383,7 @@
                         <a:buNone/>
                       </a:pPr>
                       <a:r>
-                        <a:rPr lang="es-ES_tradnl" sz="1050" dirty="0">
+                        <a:rPr lang="es-ES_tradnl" sz="900" dirty="0">
                           <a:effectLst/>
                           <a:latin typeface="Times New Roman" panose="02020603050405020304" pitchFamily="18" charset="0"/>
                           <a:ea typeface="Times New Roman" panose="02020603050405020304" pitchFamily="18" charset="0"/>
@@ -6371,99 +6406,123 @@
                         <a:buNone/>
                       </a:pPr>
                       <a:r>
-                        <a:rPr lang="es-ES_tradnl" sz="1050" dirty="0">
+                        <a:rPr lang="es-ES" sz="900">
                           <a:effectLst/>
                           <a:latin typeface="Times New Roman" panose="02020603050405020304" pitchFamily="18" charset="0"/>
                           <a:ea typeface="Times New Roman" panose="02020603050405020304" pitchFamily="18" charset="0"/>
                           <a:cs typeface="Times New Roman" panose="02020603050405020304" pitchFamily="18" charset="0"/>
                         </a:rPr>
-                        <a:t>2.50</a:t>
-                      </a:r>
-                    </a:p>
-                  </a:txBody>
-                  <a:tcPr marL="68580" marR="68580" marT="0" marB="0" anchor="ctr">
-                    <a:noFill/>
-                  </a:tcPr>
-                </a:tc>
-                <a:tc>
-                  <a:txBody>
-                    <a:bodyPr/>
-                    <a:lstStyle/>
-                    <a:p>
-                      <a:pPr algn="ctr">
-                        <a:buNone/>
-                      </a:pPr>
-                      <a:r>
-                        <a:rPr lang="es-ES_tradnl" sz="1050" dirty="0">
+                        <a:t>1.68</a:t>
+                      </a:r>
+                      <a:endParaRPr lang="de-DE" sz="900">
+                        <a:effectLst/>
+                        <a:latin typeface="Times New Roman" panose="02020603050405020304" pitchFamily="18" charset="0"/>
+                        <a:ea typeface="Times New Roman" panose="02020603050405020304" pitchFamily="18" charset="0"/>
+                        <a:cs typeface="Times New Roman" panose="02020603050405020304" pitchFamily="18" charset="0"/>
+                      </a:endParaRPr>
+                    </a:p>
+                  </a:txBody>
+                  <a:tcPr marL="68580" marR="68580" marT="0" marB="0">
+                    <a:noFill/>
+                  </a:tcPr>
+                </a:tc>
+                <a:tc>
+                  <a:txBody>
+                    <a:bodyPr/>
+                    <a:lstStyle/>
+                    <a:p>
+                      <a:pPr algn="ctr">
+                        <a:buNone/>
+                      </a:pPr>
+                      <a:r>
+                        <a:rPr lang="es-ES" sz="900">
                           <a:effectLst/>
                           <a:latin typeface="Times New Roman" panose="02020603050405020304" pitchFamily="18" charset="0"/>
                           <a:ea typeface="Times New Roman" panose="02020603050405020304" pitchFamily="18" charset="0"/>
                           <a:cs typeface="Times New Roman" panose="02020603050405020304" pitchFamily="18" charset="0"/>
                         </a:rPr>
-                        <a:t>29.28</a:t>
-                      </a:r>
-                    </a:p>
-                  </a:txBody>
-                  <a:tcPr marL="68580" marR="68580" marT="0" marB="0" anchor="ctr">
-                    <a:noFill/>
-                  </a:tcPr>
-                </a:tc>
-                <a:tc>
-                  <a:txBody>
-                    <a:bodyPr/>
-                    <a:lstStyle/>
-                    <a:p>
-                      <a:pPr algn="ctr">
-                        <a:buNone/>
-                      </a:pPr>
-                      <a:r>
-                        <a:rPr lang="es-ES_tradnl" sz="1050" dirty="0">
+                        <a:t>14.16</a:t>
+                      </a:r>
+                      <a:endParaRPr lang="de-DE" sz="900">
+                        <a:effectLst/>
+                        <a:latin typeface="Times New Roman" panose="02020603050405020304" pitchFamily="18" charset="0"/>
+                        <a:ea typeface="Times New Roman" panose="02020603050405020304" pitchFamily="18" charset="0"/>
+                        <a:cs typeface="Times New Roman" panose="02020603050405020304" pitchFamily="18" charset="0"/>
+                      </a:endParaRPr>
+                    </a:p>
+                  </a:txBody>
+                  <a:tcPr marL="68580" marR="68580" marT="0" marB="0">
+                    <a:noFill/>
+                  </a:tcPr>
+                </a:tc>
+                <a:tc>
+                  <a:txBody>
+                    <a:bodyPr/>
+                    <a:lstStyle/>
+                    <a:p>
+                      <a:pPr algn="ctr">
+                        <a:buNone/>
+                      </a:pPr>
+                      <a:r>
+                        <a:rPr lang="es-ES" sz="900">
                           <a:effectLst/>
                           <a:latin typeface="Times New Roman" panose="02020603050405020304" pitchFamily="18" charset="0"/>
                           <a:ea typeface="Times New Roman" panose="02020603050405020304" pitchFamily="18" charset="0"/>
                           <a:cs typeface="Times New Roman" panose="02020603050405020304" pitchFamily="18" charset="0"/>
                         </a:rPr>
-                        <a:t>3.69</a:t>
-                      </a:r>
-                    </a:p>
-                  </a:txBody>
-                  <a:tcPr marL="68580" marR="68580" marT="0" marB="0" anchor="ctr">
-                    <a:noFill/>
-                  </a:tcPr>
-                </a:tc>
-                <a:tc>
-                  <a:txBody>
-                    <a:bodyPr/>
-                    <a:lstStyle/>
-                    <a:p>
-                      <a:pPr algn="ctr">
-                        <a:buNone/>
-                      </a:pPr>
-                      <a:r>
-                        <a:rPr lang="es-ES_tradnl" sz="1050" dirty="0">
+                        <a:t>3.05</a:t>
+                      </a:r>
+                      <a:endParaRPr lang="de-DE" sz="900">
+                        <a:effectLst/>
+                        <a:latin typeface="Times New Roman" panose="02020603050405020304" pitchFamily="18" charset="0"/>
+                        <a:ea typeface="Times New Roman" panose="02020603050405020304" pitchFamily="18" charset="0"/>
+                        <a:cs typeface="Times New Roman" panose="02020603050405020304" pitchFamily="18" charset="0"/>
+                      </a:endParaRPr>
+                    </a:p>
+                  </a:txBody>
+                  <a:tcPr marL="68580" marR="68580" marT="0" marB="0">
+                    <a:noFill/>
+                  </a:tcPr>
+                </a:tc>
+                <a:tc>
+                  <a:txBody>
+                    <a:bodyPr/>
+                    <a:lstStyle/>
+                    <a:p>
+                      <a:pPr algn="ctr">
+                        <a:buNone/>
+                      </a:pPr>
+                      <a:r>
+                        <a:rPr lang="es-ES" sz="900">
                           <a:effectLst/>
                           <a:latin typeface="Times New Roman" panose="02020603050405020304" pitchFamily="18" charset="0"/>
                           <a:ea typeface="Times New Roman" panose="02020603050405020304" pitchFamily="18" charset="0"/>
                           <a:cs typeface="Times New Roman" panose="02020603050405020304" pitchFamily="18" charset="0"/>
                         </a:rPr>
-                        <a:t>49.66</a:t>
-                      </a:r>
-                    </a:p>
-                  </a:txBody>
-                  <a:tcPr marL="68580" marR="68580" marT="0" marB="0" anchor="ctr">
-                    <a:noFill/>
-                  </a:tcPr>
-                </a:tc>
-                <a:tc>
-                  <a:txBody>
-                    <a:bodyPr/>
-                    <a:lstStyle/>
-                    <a:p>
-                      <a:pPr algn="ctr">
-                        <a:buNone/>
-                      </a:pPr>
-                      <a:r>
-                        <a:rPr lang="es-ES_tradnl" sz="1050" dirty="0">
+                        <a:t>25.71</a:t>
+                      </a:r>
+                      <a:endParaRPr lang="de-DE" sz="900">
+                        <a:effectLst/>
+                        <a:latin typeface="Times New Roman" panose="02020603050405020304" pitchFamily="18" charset="0"/>
+                        <a:ea typeface="Times New Roman" panose="02020603050405020304" pitchFamily="18" charset="0"/>
+                        <a:cs typeface="Times New Roman" panose="02020603050405020304" pitchFamily="18" charset="0"/>
+                      </a:endParaRPr>
+                    </a:p>
+                  </a:txBody>
+                  <a:tcPr marL="68580" marR="68580" marT="0" marB="0">
+                    <a:noFill/>
+                  </a:tcPr>
+                </a:tc>
+                <a:tc>
+                  <a:txBody>
+                    <a:bodyPr/>
+                    <a:lstStyle/>
+                    <a:p>
+                      <a:pPr algn="ctr">
+                        <a:buNone/>
+                      </a:pPr>
+                      <a:r>
+                        <a:rPr lang="es-ES" sz="900">
                           <a:effectLst/>
                           <a:latin typeface="Times New Roman" panose="02020603050405020304" pitchFamily="18" charset="0"/>
                           <a:ea typeface="Times New Roman" panose="02020603050405020304" pitchFamily="18" charset="0"/>
@@ -6471,9 +6530,15 @@
                         </a:rPr>
                         <a:t>NaN</a:t>
                       </a:r>
-                    </a:p>
-                  </a:txBody>
-                  <a:tcPr marL="68580" marR="68580" marT="0" marB="0" anchor="ctr">
+                      <a:endParaRPr lang="de-DE" sz="900">
+                        <a:effectLst/>
+                        <a:latin typeface="Times New Roman" panose="02020603050405020304" pitchFamily="18" charset="0"/>
+                        <a:ea typeface="Times New Roman" panose="02020603050405020304" pitchFamily="18" charset="0"/>
+                        <a:cs typeface="Times New Roman" panose="02020603050405020304" pitchFamily="18" charset="0"/>
+                      </a:endParaRPr>
+                    </a:p>
+                  </a:txBody>
+                  <a:tcPr marL="68580" marR="68580" marT="0" marB="0">
                     <a:noFill/>
                   </a:tcPr>
                 </a:tc>
@@ -6493,7 +6558,7 @@
                         <a:buNone/>
                       </a:pPr>
                       <a:r>
-                        <a:rPr lang="es-ES_tradnl" sz="1000" b="0" noProof="1">
+                        <a:rPr lang="es-ES_tradnl" sz="900" b="0" noProof="1">
                           <a:solidFill>
                             <a:schemeClr val="tx1"/>
                           </a:solidFill>
@@ -6519,7 +6584,7 @@
                         <a:buNone/>
                       </a:pPr>
                       <a:r>
-                        <a:rPr lang="es-ES_tradnl" sz="1050" dirty="0">
+                        <a:rPr lang="es-ES_tradnl" sz="900" dirty="0">
                           <a:effectLst/>
                           <a:latin typeface="Times New Roman" panose="02020603050405020304" pitchFamily="18" charset="0"/>
                           <a:ea typeface="Times New Roman" panose="02020603050405020304" pitchFamily="18" charset="0"/>
@@ -6542,7 +6607,7 @@
                         <a:buNone/>
                       </a:pPr>
                       <a:r>
-                        <a:rPr lang="es-ES_tradnl" sz="1050" dirty="0">
+                        <a:rPr lang="es-ES_tradnl" sz="900" dirty="0">
                           <a:effectLst/>
                           <a:latin typeface="Times New Roman" panose="02020603050405020304" pitchFamily="18" charset="0"/>
                           <a:ea typeface="Times New Roman" panose="02020603050405020304" pitchFamily="18" charset="0"/>
@@ -6565,7 +6630,7 @@
                         <a:buNone/>
                       </a:pPr>
                       <a:r>
-                        <a:rPr lang="es-ES_tradnl" sz="1050" dirty="0">
+                        <a:rPr lang="es-ES_tradnl" sz="900" dirty="0">
                           <a:effectLst/>
                           <a:latin typeface="Times New Roman" panose="02020603050405020304" pitchFamily="18" charset="0"/>
                           <a:ea typeface="Times New Roman" panose="02020603050405020304" pitchFamily="18" charset="0"/>
@@ -6588,7 +6653,7 @@
                         <a:buNone/>
                       </a:pPr>
                       <a:r>
-                        <a:rPr lang="es-ES_tradnl" sz="1050" dirty="0">
+                        <a:rPr lang="es-ES_tradnl" sz="900" dirty="0">
                           <a:effectLst/>
                           <a:latin typeface="Times New Roman" panose="02020603050405020304" pitchFamily="18" charset="0"/>
                           <a:ea typeface="Times New Roman" panose="02020603050405020304" pitchFamily="18" charset="0"/>
@@ -6611,7 +6676,7 @@
                         <a:buNone/>
                       </a:pPr>
                       <a:r>
-                        <a:rPr lang="es-ES_tradnl" sz="1050" dirty="0">
+                        <a:rPr lang="es-ES_tradnl" sz="900" dirty="0">
                           <a:effectLst/>
                           <a:latin typeface="Times New Roman" panose="02020603050405020304" pitchFamily="18" charset="0"/>
                           <a:ea typeface="Times New Roman" panose="02020603050405020304" pitchFamily="18" charset="0"/>
@@ -6634,7 +6699,7 @@
                         <a:buNone/>
                       </a:pPr>
                       <a:r>
-                        <a:rPr lang="es-ES_tradnl" sz="1050" dirty="0">
+                        <a:rPr lang="es-ES_tradnl" sz="900" dirty="0">
                           <a:effectLst/>
                           <a:latin typeface="Times New Roman" panose="02020603050405020304" pitchFamily="18" charset="0"/>
                           <a:ea typeface="Times New Roman" panose="02020603050405020304" pitchFamily="18" charset="0"/>
@@ -6657,7 +6722,7 @@
                         <a:buNone/>
                       </a:pPr>
                       <a:r>
-                        <a:rPr lang="es-ES_tradnl" sz="1050" dirty="0">
+                        <a:rPr lang="es-ES_tradnl" sz="900" dirty="0">
                           <a:effectLst/>
                           <a:latin typeface="Times New Roman" panose="02020603050405020304" pitchFamily="18" charset="0"/>
                           <a:ea typeface="Times New Roman" panose="02020603050405020304" pitchFamily="18" charset="0"/>
@@ -6680,7 +6745,7 @@
                         <a:buNone/>
                       </a:pPr>
                       <a:r>
-                        <a:rPr lang="es-ES_tradnl" sz="1050" dirty="0">
+                        <a:rPr lang="es-ES_tradnl" sz="900" dirty="0">
                           <a:effectLst/>
                           <a:latin typeface="Times New Roman" panose="02020603050405020304" pitchFamily="18" charset="0"/>
                           <a:ea typeface="Times New Roman" panose="02020603050405020304" pitchFamily="18" charset="0"/>
@@ -6703,7 +6768,7 @@
                         <a:buNone/>
                       </a:pPr>
                       <a:r>
-                        <a:rPr lang="es-ES_tradnl" sz="1050" dirty="0">
+                        <a:rPr lang="es-ES_tradnl" sz="900" dirty="0">
                           <a:effectLst/>
                           <a:latin typeface="Times New Roman" panose="02020603050405020304" pitchFamily="18" charset="0"/>
                           <a:ea typeface="Times New Roman" panose="02020603050405020304" pitchFamily="18" charset="0"/>
@@ -6726,7 +6791,7 @@
                         <a:buNone/>
                       </a:pPr>
                       <a:r>
-                        <a:rPr lang="es-ES_tradnl" sz="1050" dirty="0">
+                        <a:rPr lang="es-ES_tradnl" sz="900" dirty="0">
                           <a:effectLst/>
                           <a:latin typeface="Times New Roman" panose="02020603050405020304" pitchFamily="18" charset="0"/>
                           <a:ea typeface="Times New Roman" panose="02020603050405020304" pitchFamily="18" charset="0"/>
@@ -6749,99 +6814,123 @@
                         <a:buNone/>
                       </a:pPr>
                       <a:r>
-                        <a:rPr lang="es-ES_tradnl" sz="1050" dirty="0">
+                        <a:rPr lang="es-ES" sz="900">
                           <a:effectLst/>
                           <a:latin typeface="Times New Roman" panose="02020603050405020304" pitchFamily="18" charset="0"/>
                           <a:ea typeface="Times New Roman" panose="02020603050405020304" pitchFamily="18" charset="0"/>
                           <a:cs typeface="Times New Roman" panose="02020603050405020304" pitchFamily="18" charset="0"/>
                         </a:rPr>
-                        <a:t>4.36</a:t>
-                      </a:r>
-                    </a:p>
-                  </a:txBody>
-                  <a:tcPr marL="68580" marR="68580" marT="0" marB="0" anchor="ctr">
-                    <a:noFill/>
-                  </a:tcPr>
-                </a:tc>
-                <a:tc>
-                  <a:txBody>
-                    <a:bodyPr/>
-                    <a:lstStyle/>
-                    <a:p>
-                      <a:pPr algn="ctr">
-                        <a:buNone/>
-                      </a:pPr>
-                      <a:r>
-                        <a:rPr lang="es-ES_tradnl" sz="1050" dirty="0">
+                        <a:t>2.71</a:t>
+                      </a:r>
+                      <a:endParaRPr lang="de-DE" sz="900">
+                        <a:effectLst/>
+                        <a:latin typeface="Times New Roman" panose="02020603050405020304" pitchFamily="18" charset="0"/>
+                        <a:ea typeface="Times New Roman" panose="02020603050405020304" pitchFamily="18" charset="0"/>
+                        <a:cs typeface="Times New Roman" panose="02020603050405020304" pitchFamily="18" charset="0"/>
+                      </a:endParaRPr>
+                    </a:p>
+                  </a:txBody>
+                  <a:tcPr marL="68580" marR="68580" marT="0" marB="0">
+                    <a:noFill/>
+                  </a:tcPr>
+                </a:tc>
+                <a:tc>
+                  <a:txBody>
+                    <a:bodyPr/>
+                    <a:lstStyle/>
+                    <a:p>
+                      <a:pPr algn="ctr">
+                        <a:buNone/>
+                      </a:pPr>
+                      <a:r>
+                        <a:rPr lang="es-ES" sz="900">
                           <a:effectLst/>
                           <a:latin typeface="Times New Roman" panose="02020603050405020304" pitchFamily="18" charset="0"/>
                           <a:ea typeface="Times New Roman" panose="02020603050405020304" pitchFamily="18" charset="0"/>
                           <a:cs typeface="Times New Roman" panose="02020603050405020304" pitchFamily="18" charset="0"/>
                         </a:rPr>
-                        <a:t>104.75</a:t>
-                      </a:r>
-                    </a:p>
-                  </a:txBody>
-                  <a:tcPr marL="68580" marR="68580" marT="0" marB="0" anchor="ctr">
-                    <a:noFill/>
-                  </a:tcPr>
-                </a:tc>
-                <a:tc>
-                  <a:txBody>
-                    <a:bodyPr/>
-                    <a:lstStyle/>
-                    <a:p>
-                      <a:pPr algn="ctr">
-                        <a:buNone/>
-                      </a:pPr>
-                      <a:r>
-                        <a:rPr lang="es-ES_tradnl" sz="1050" dirty="0">
+                        <a:t>41.76</a:t>
+                      </a:r>
+                      <a:endParaRPr lang="de-DE" sz="900">
+                        <a:effectLst/>
+                        <a:latin typeface="Times New Roman" panose="02020603050405020304" pitchFamily="18" charset="0"/>
+                        <a:ea typeface="Times New Roman" panose="02020603050405020304" pitchFamily="18" charset="0"/>
+                        <a:cs typeface="Times New Roman" panose="02020603050405020304" pitchFamily="18" charset="0"/>
+                      </a:endParaRPr>
+                    </a:p>
+                  </a:txBody>
+                  <a:tcPr marL="68580" marR="68580" marT="0" marB="0">
+                    <a:noFill/>
+                  </a:tcPr>
+                </a:tc>
+                <a:tc>
+                  <a:txBody>
+                    <a:bodyPr/>
+                    <a:lstStyle/>
+                    <a:p>
+                      <a:pPr algn="ctr">
+                        <a:buNone/>
+                      </a:pPr>
+                      <a:r>
+                        <a:rPr lang="es-ES" sz="900">
                           <a:effectLst/>
                           <a:latin typeface="Times New Roman" panose="02020603050405020304" pitchFamily="18" charset="0"/>
                           <a:ea typeface="Times New Roman" panose="02020603050405020304" pitchFamily="18" charset="0"/>
                           <a:cs typeface="Times New Roman" panose="02020603050405020304" pitchFamily="18" charset="0"/>
                         </a:rPr>
-                        <a:t>11.26</a:t>
-                      </a:r>
-                    </a:p>
-                  </a:txBody>
-                  <a:tcPr marL="68580" marR="68580" marT="0" marB="0" anchor="ctr">
-                    <a:noFill/>
-                  </a:tcPr>
-                </a:tc>
-                <a:tc>
-                  <a:txBody>
-                    <a:bodyPr/>
-                    <a:lstStyle/>
-                    <a:p>
-                      <a:pPr algn="ctr">
-                        <a:buNone/>
-                      </a:pPr>
-                      <a:r>
-                        <a:rPr lang="es-ES_tradnl" sz="1050" dirty="0">
+                        <a:t>7.60</a:t>
+                      </a:r>
+                      <a:endParaRPr lang="de-DE" sz="900">
+                        <a:effectLst/>
+                        <a:latin typeface="Times New Roman" panose="02020603050405020304" pitchFamily="18" charset="0"/>
+                        <a:ea typeface="Times New Roman" panose="02020603050405020304" pitchFamily="18" charset="0"/>
+                        <a:cs typeface="Times New Roman" panose="02020603050405020304" pitchFamily="18" charset="0"/>
+                      </a:endParaRPr>
+                    </a:p>
+                  </a:txBody>
+                  <a:tcPr marL="68580" marR="68580" marT="0" marB="0">
+                    <a:noFill/>
+                  </a:tcPr>
+                </a:tc>
+                <a:tc>
+                  <a:txBody>
+                    <a:bodyPr/>
+                    <a:lstStyle/>
+                    <a:p>
+                      <a:pPr algn="ctr">
+                        <a:buNone/>
+                      </a:pPr>
+                      <a:r>
+                        <a:rPr lang="es-ES" sz="900">
                           <a:effectLst/>
                           <a:latin typeface="Times New Roman" panose="02020603050405020304" pitchFamily="18" charset="0"/>
                           <a:ea typeface="Times New Roman" panose="02020603050405020304" pitchFamily="18" charset="0"/>
                           <a:cs typeface="Times New Roman" panose="02020603050405020304" pitchFamily="18" charset="0"/>
                         </a:rPr>
-                        <a:t>50.17</a:t>
-                      </a:r>
-                    </a:p>
-                  </a:txBody>
-                  <a:tcPr marL="68580" marR="68580" marT="0" marB="0" anchor="ctr">
-                    <a:noFill/>
-                  </a:tcPr>
-                </a:tc>
-                <a:tc>
-                  <a:txBody>
-                    <a:bodyPr/>
-                    <a:lstStyle/>
-                    <a:p>
-                      <a:pPr algn="ctr">
-                        <a:buNone/>
-                      </a:pPr>
-                      <a:r>
-                        <a:rPr lang="es-ES_tradnl" sz="1050" dirty="0">
+                        <a:t>25.96</a:t>
+                      </a:r>
+                      <a:endParaRPr lang="de-DE" sz="900">
+                        <a:effectLst/>
+                        <a:latin typeface="Times New Roman" panose="02020603050405020304" pitchFamily="18" charset="0"/>
+                        <a:ea typeface="Times New Roman" panose="02020603050405020304" pitchFamily="18" charset="0"/>
+                        <a:cs typeface="Times New Roman" panose="02020603050405020304" pitchFamily="18" charset="0"/>
+                      </a:endParaRPr>
+                    </a:p>
+                  </a:txBody>
+                  <a:tcPr marL="68580" marR="68580" marT="0" marB="0">
+                    <a:noFill/>
+                  </a:tcPr>
+                </a:tc>
+                <a:tc>
+                  <a:txBody>
+                    <a:bodyPr/>
+                    <a:lstStyle/>
+                    <a:p>
+                      <a:pPr algn="ctr">
+                        <a:buNone/>
+                      </a:pPr>
+                      <a:r>
+                        <a:rPr lang="es-ES" sz="900" dirty="0">
                           <a:effectLst/>
                           <a:latin typeface="Times New Roman" panose="02020603050405020304" pitchFamily="18" charset="0"/>
                           <a:ea typeface="Times New Roman" panose="02020603050405020304" pitchFamily="18" charset="0"/>
@@ -6849,9 +6938,15 @@
                         </a:rPr>
                         <a:t>NaN</a:t>
                       </a:r>
-                    </a:p>
-                  </a:txBody>
-                  <a:tcPr marL="68580" marR="68580" marT="0" marB="0" anchor="ctr">
+                      <a:endParaRPr lang="de-DE" sz="900" dirty="0">
+                        <a:effectLst/>
+                        <a:latin typeface="Times New Roman" panose="02020603050405020304" pitchFamily="18" charset="0"/>
+                        <a:ea typeface="Times New Roman" panose="02020603050405020304" pitchFamily="18" charset="0"/>
+                        <a:cs typeface="Times New Roman" panose="02020603050405020304" pitchFamily="18" charset="0"/>
+                      </a:endParaRPr>
+                    </a:p>
+                  </a:txBody>
+                  <a:tcPr marL="68580" marR="68580" marT="0" marB="0">
                     <a:noFill/>
                   </a:tcPr>
                 </a:tc>
@@ -6870,7 +6965,7 @@
                       <a:pPr algn="ctr">
                         <a:buNone/>
                       </a:pPr>
-                      <a:endParaRPr lang="es-ES_tradnl" sz="1000" b="0" noProof="1">
+                      <a:endParaRPr lang="es-ES_tradnl" sz="900" b="0" noProof="1">
                         <a:solidFill>
                           <a:schemeClr val="tx1"/>
                         </a:solidFill>
@@ -6893,287 +6988,287 @@
                       <a:pPr algn="ctr">
                         <a:buNone/>
                       </a:pPr>
-                      <a:endParaRPr lang="es-ES_tradnl" sz="1000" dirty="0">
-                        <a:effectLst/>
-                        <a:latin typeface="Times New Roman" panose="02020603050405020304" pitchFamily="18" charset="0"/>
-                        <a:ea typeface="Times New Roman" panose="02020603050405020304" pitchFamily="18" charset="0"/>
-                        <a:cs typeface="Times New Roman" panose="02020603050405020304" pitchFamily="18" charset="0"/>
-                      </a:endParaRPr>
-                    </a:p>
-                  </a:txBody>
-                  <a:tcPr marL="68580" marR="68580" marT="0" marB="0" anchor="ctr">
-                    <a:noFill/>
-                  </a:tcPr>
-                </a:tc>
-                <a:tc>
-                  <a:txBody>
-                    <a:bodyPr/>
-                    <a:lstStyle/>
-                    <a:p>
-                      <a:pPr algn="ctr">
-                        <a:buNone/>
-                      </a:pPr>
-                      <a:endParaRPr lang="es-ES_tradnl" sz="1000" dirty="0">
-                        <a:effectLst/>
-                        <a:latin typeface="Times New Roman" panose="02020603050405020304" pitchFamily="18" charset="0"/>
-                        <a:ea typeface="Times New Roman" panose="02020603050405020304" pitchFamily="18" charset="0"/>
-                        <a:cs typeface="Times New Roman" panose="02020603050405020304" pitchFamily="18" charset="0"/>
-                      </a:endParaRPr>
-                    </a:p>
-                  </a:txBody>
-                  <a:tcPr marL="68580" marR="68580" marT="0" marB="0" anchor="ctr">
-                    <a:noFill/>
-                  </a:tcPr>
-                </a:tc>
-                <a:tc>
-                  <a:txBody>
-                    <a:bodyPr/>
-                    <a:lstStyle/>
-                    <a:p>
-                      <a:pPr algn="ctr">
-                        <a:buNone/>
-                      </a:pPr>
-                      <a:endParaRPr lang="es-ES_tradnl" sz="1000" dirty="0">
-                        <a:effectLst/>
-                        <a:latin typeface="Times New Roman" panose="02020603050405020304" pitchFamily="18" charset="0"/>
-                        <a:ea typeface="Times New Roman" panose="02020603050405020304" pitchFamily="18" charset="0"/>
-                        <a:cs typeface="Times New Roman" panose="02020603050405020304" pitchFamily="18" charset="0"/>
-                      </a:endParaRPr>
-                    </a:p>
-                  </a:txBody>
-                  <a:tcPr marL="68580" marR="68580" marT="0" marB="0" anchor="ctr">
-                    <a:noFill/>
-                  </a:tcPr>
-                </a:tc>
-                <a:tc>
-                  <a:txBody>
-                    <a:bodyPr/>
-                    <a:lstStyle/>
-                    <a:p>
-                      <a:pPr algn="ctr">
-                        <a:buNone/>
-                      </a:pPr>
-                      <a:endParaRPr lang="es-ES_tradnl" sz="1000" dirty="0">
-                        <a:effectLst/>
-                        <a:latin typeface="Times New Roman" panose="02020603050405020304" pitchFamily="18" charset="0"/>
-                        <a:ea typeface="Times New Roman" panose="02020603050405020304" pitchFamily="18" charset="0"/>
-                        <a:cs typeface="Times New Roman" panose="02020603050405020304" pitchFamily="18" charset="0"/>
-                      </a:endParaRPr>
-                    </a:p>
-                  </a:txBody>
-                  <a:tcPr marL="68580" marR="68580" marT="0" marB="0" anchor="ctr">
-                    <a:noFill/>
-                  </a:tcPr>
-                </a:tc>
-                <a:tc>
-                  <a:txBody>
-                    <a:bodyPr/>
-                    <a:lstStyle/>
-                    <a:p>
-                      <a:pPr algn="ctr">
-                        <a:buNone/>
-                      </a:pPr>
-                      <a:endParaRPr lang="es-ES_tradnl" sz="1000" dirty="0">
-                        <a:effectLst/>
-                        <a:latin typeface="Times New Roman" panose="02020603050405020304" pitchFamily="18" charset="0"/>
-                        <a:ea typeface="Times New Roman" panose="02020603050405020304" pitchFamily="18" charset="0"/>
-                        <a:cs typeface="Times New Roman" panose="02020603050405020304" pitchFamily="18" charset="0"/>
-                      </a:endParaRPr>
-                    </a:p>
-                  </a:txBody>
-                  <a:tcPr marL="68580" marR="68580" marT="0" marB="0" anchor="ctr">
-                    <a:noFill/>
-                  </a:tcPr>
-                </a:tc>
-                <a:tc>
-                  <a:txBody>
-                    <a:bodyPr/>
-                    <a:lstStyle/>
-                    <a:p>
-                      <a:pPr algn="ctr">
-                        <a:buNone/>
-                      </a:pPr>
-                      <a:endParaRPr lang="es-ES_tradnl" sz="1000" dirty="0">
-                        <a:effectLst/>
-                        <a:latin typeface="Times New Roman" panose="02020603050405020304" pitchFamily="18" charset="0"/>
-                        <a:ea typeface="Times New Roman" panose="02020603050405020304" pitchFamily="18" charset="0"/>
-                        <a:cs typeface="Times New Roman" panose="02020603050405020304" pitchFamily="18" charset="0"/>
-                      </a:endParaRPr>
-                    </a:p>
-                  </a:txBody>
-                  <a:tcPr marL="68580" marR="68580" marT="0" marB="0" anchor="ctr">
-                    <a:noFill/>
-                  </a:tcPr>
-                </a:tc>
-                <a:tc>
-                  <a:txBody>
-                    <a:bodyPr/>
-                    <a:lstStyle/>
-                    <a:p>
-                      <a:pPr algn="ctr">
-                        <a:buNone/>
-                      </a:pPr>
-                      <a:endParaRPr lang="es-ES_tradnl" sz="1000" dirty="0">
-                        <a:effectLst/>
-                        <a:latin typeface="Times New Roman" panose="02020603050405020304" pitchFamily="18" charset="0"/>
-                        <a:ea typeface="Times New Roman" panose="02020603050405020304" pitchFamily="18" charset="0"/>
-                        <a:cs typeface="Times New Roman" panose="02020603050405020304" pitchFamily="18" charset="0"/>
-                      </a:endParaRPr>
-                    </a:p>
-                  </a:txBody>
-                  <a:tcPr marL="68580" marR="68580" marT="0" marB="0" anchor="ctr">
-                    <a:noFill/>
-                  </a:tcPr>
-                </a:tc>
-                <a:tc>
-                  <a:txBody>
-                    <a:bodyPr/>
-                    <a:lstStyle/>
-                    <a:p>
-                      <a:pPr algn="ctr">
-                        <a:buNone/>
-                      </a:pPr>
-                      <a:endParaRPr lang="es-ES_tradnl" sz="1000" dirty="0">
-                        <a:effectLst/>
-                        <a:latin typeface="Times New Roman" panose="02020603050405020304" pitchFamily="18" charset="0"/>
-                        <a:ea typeface="Times New Roman" panose="02020603050405020304" pitchFamily="18" charset="0"/>
-                        <a:cs typeface="Times New Roman" panose="02020603050405020304" pitchFamily="18" charset="0"/>
-                      </a:endParaRPr>
-                    </a:p>
-                  </a:txBody>
-                  <a:tcPr marL="68580" marR="68580" marT="0" marB="0" anchor="ctr">
-                    <a:noFill/>
-                  </a:tcPr>
-                </a:tc>
-                <a:tc>
-                  <a:txBody>
-                    <a:bodyPr/>
-                    <a:lstStyle/>
-                    <a:p>
-                      <a:pPr algn="ctr">
-                        <a:buNone/>
-                      </a:pPr>
-                      <a:endParaRPr lang="es-ES_tradnl" sz="1000" dirty="0">
-                        <a:effectLst/>
-                        <a:latin typeface="Times New Roman" panose="02020603050405020304" pitchFamily="18" charset="0"/>
-                        <a:ea typeface="Times New Roman" panose="02020603050405020304" pitchFamily="18" charset="0"/>
-                        <a:cs typeface="Times New Roman" panose="02020603050405020304" pitchFamily="18" charset="0"/>
-                      </a:endParaRPr>
-                    </a:p>
-                  </a:txBody>
-                  <a:tcPr marL="68580" marR="68580" marT="0" marB="0" anchor="ctr">
-                    <a:noFill/>
-                  </a:tcPr>
-                </a:tc>
-                <a:tc>
-                  <a:txBody>
-                    <a:bodyPr/>
-                    <a:lstStyle/>
-                    <a:p>
-                      <a:pPr algn="ctr">
-                        <a:buNone/>
-                      </a:pPr>
-                      <a:endParaRPr lang="es-ES_tradnl" sz="1000" dirty="0">
-                        <a:effectLst/>
-                        <a:latin typeface="Times New Roman" panose="02020603050405020304" pitchFamily="18" charset="0"/>
-                        <a:ea typeface="Times New Roman" panose="02020603050405020304" pitchFamily="18" charset="0"/>
-                        <a:cs typeface="Times New Roman" panose="02020603050405020304" pitchFamily="18" charset="0"/>
-                      </a:endParaRPr>
-                    </a:p>
-                  </a:txBody>
-                  <a:tcPr marL="68580" marR="68580" marT="0" marB="0" anchor="ctr">
-                    <a:noFill/>
-                  </a:tcPr>
-                </a:tc>
-                <a:tc>
-                  <a:txBody>
-                    <a:bodyPr/>
-                    <a:lstStyle/>
-                    <a:p>
-                      <a:pPr algn="ctr">
-                        <a:buNone/>
-                      </a:pPr>
-                      <a:endParaRPr lang="es-ES_tradnl" sz="1000" dirty="0">
-                        <a:effectLst/>
-                        <a:latin typeface="Times New Roman" panose="02020603050405020304" pitchFamily="18" charset="0"/>
-                        <a:ea typeface="Times New Roman" panose="02020603050405020304" pitchFamily="18" charset="0"/>
-                        <a:cs typeface="Times New Roman" panose="02020603050405020304" pitchFamily="18" charset="0"/>
-                      </a:endParaRPr>
-                    </a:p>
-                  </a:txBody>
-                  <a:tcPr marL="68580" marR="68580" marT="0" marB="0" anchor="ctr">
-                    <a:noFill/>
-                  </a:tcPr>
-                </a:tc>
-                <a:tc>
-                  <a:txBody>
-                    <a:bodyPr/>
-                    <a:lstStyle/>
-                    <a:p>
-                      <a:pPr algn="ctr">
-                        <a:buNone/>
-                      </a:pPr>
-                      <a:endParaRPr lang="es-ES_tradnl" sz="1000" dirty="0">
-                        <a:effectLst/>
-                        <a:latin typeface="Times New Roman" panose="02020603050405020304" pitchFamily="18" charset="0"/>
-                        <a:ea typeface="Times New Roman" panose="02020603050405020304" pitchFamily="18" charset="0"/>
-                        <a:cs typeface="Times New Roman" panose="02020603050405020304" pitchFamily="18" charset="0"/>
-                      </a:endParaRPr>
-                    </a:p>
-                  </a:txBody>
-                  <a:tcPr marL="68580" marR="68580" marT="0" marB="0" anchor="ctr">
-                    <a:noFill/>
-                  </a:tcPr>
-                </a:tc>
-                <a:tc>
-                  <a:txBody>
-                    <a:bodyPr/>
-                    <a:lstStyle/>
-                    <a:p>
-                      <a:pPr algn="ctr">
-                        <a:buNone/>
-                      </a:pPr>
-                      <a:endParaRPr lang="es-ES_tradnl" sz="1000" dirty="0">
-                        <a:effectLst/>
-                        <a:latin typeface="Times New Roman" panose="02020603050405020304" pitchFamily="18" charset="0"/>
-                        <a:ea typeface="Times New Roman" panose="02020603050405020304" pitchFamily="18" charset="0"/>
-                        <a:cs typeface="Times New Roman" panose="02020603050405020304" pitchFamily="18" charset="0"/>
-                      </a:endParaRPr>
-                    </a:p>
-                  </a:txBody>
-                  <a:tcPr marL="68580" marR="68580" marT="0" marB="0" anchor="ctr">
-                    <a:noFill/>
-                  </a:tcPr>
-                </a:tc>
-                <a:tc>
-                  <a:txBody>
-                    <a:bodyPr/>
-                    <a:lstStyle/>
-                    <a:p>
-                      <a:pPr algn="ctr">
-                        <a:buNone/>
-                      </a:pPr>
-                      <a:endParaRPr lang="es-ES_tradnl" sz="1000" dirty="0">
-                        <a:effectLst/>
-                        <a:latin typeface="Times New Roman" panose="02020603050405020304" pitchFamily="18" charset="0"/>
-                        <a:ea typeface="Times New Roman" panose="02020603050405020304" pitchFamily="18" charset="0"/>
-                        <a:cs typeface="Times New Roman" panose="02020603050405020304" pitchFamily="18" charset="0"/>
-                      </a:endParaRPr>
-                    </a:p>
-                  </a:txBody>
-                  <a:tcPr marL="68580" marR="68580" marT="0" marB="0" anchor="ctr">
-                    <a:noFill/>
-                  </a:tcPr>
-                </a:tc>
-                <a:tc>
-                  <a:txBody>
-                    <a:bodyPr/>
-                    <a:lstStyle/>
-                    <a:p>
-                      <a:pPr algn="ctr">
-                        <a:buNone/>
-                      </a:pPr>
-                      <a:endParaRPr lang="es-ES_tradnl" sz="1000" dirty="0">
+                      <a:endParaRPr lang="es-ES_tradnl" sz="900" dirty="0">
+                        <a:effectLst/>
+                        <a:latin typeface="Times New Roman" panose="02020603050405020304" pitchFamily="18" charset="0"/>
+                        <a:ea typeface="Times New Roman" panose="02020603050405020304" pitchFamily="18" charset="0"/>
+                        <a:cs typeface="Times New Roman" panose="02020603050405020304" pitchFamily="18" charset="0"/>
+                      </a:endParaRPr>
+                    </a:p>
+                  </a:txBody>
+                  <a:tcPr marL="68580" marR="68580" marT="0" marB="0" anchor="ctr">
+                    <a:noFill/>
+                  </a:tcPr>
+                </a:tc>
+                <a:tc>
+                  <a:txBody>
+                    <a:bodyPr/>
+                    <a:lstStyle/>
+                    <a:p>
+                      <a:pPr algn="ctr">
+                        <a:buNone/>
+                      </a:pPr>
+                      <a:endParaRPr lang="es-ES_tradnl" sz="900" dirty="0">
+                        <a:effectLst/>
+                        <a:latin typeface="Times New Roman" panose="02020603050405020304" pitchFamily="18" charset="0"/>
+                        <a:ea typeface="Times New Roman" panose="02020603050405020304" pitchFamily="18" charset="0"/>
+                        <a:cs typeface="Times New Roman" panose="02020603050405020304" pitchFamily="18" charset="0"/>
+                      </a:endParaRPr>
+                    </a:p>
+                  </a:txBody>
+                  <a:tcPr marL="68580" marR="68580" marT="0" marB="0" anchor="ctr">
+                    <a:noFill/>
+                  </a:tcPr>
+                </a:tc>
+                <a:tc>
+                  <a:txBody>
+                    <a:bodyPr/>
+                    <a:lstStyle/>
+                    <a:p>
+                      <a:pPr algn="ctr">
+                        <a:buNone/>
+                      </a:pPr>
+                      <a:endParaRPr lang="es-ES_tradnl" sz="900" dirty="0">
+                        <a:effectLst/>
+                        <a:latin typeface="Times New Roman" panose="02020603050405020304" pitchFamily="18" charset="0"/>
+                        <a:ea typeface="Times New Roman" panose="02020603050405020304" pitchFamily="18" charset="0"/>
+                        <a:cs typeface="Times New Roman" panose="02020603050405020304" pitchFamily="18" charset="0"/>
+                      </a:endParaRPr>
+                    </a:p>
+                  </a:txBody>
+                  <a:tcPr marL="68580" marR="68580" marT="0" marB="0" anchor="ctr">
+                    <a:noFill/>
+                  </a:tcPr>
+                </a:tc>
+                <a:tc>
+                  <a:txBody>
+                    <a:bodyPr/>
+                    <a:lstStyle/>
+                    <a:p>
+                      <a:pPr algn="ctr">
+                        <a:buNone/>
+                      </a:pPr>
+                      <a:endParaRPr lang="es-ES_tradnl" sz="900" dirty="0">
+                        <a:effectLst/>
+                        <a:latin typeface="Times New Roman" panose="02020603050405020304" pitchFamily="18" charset="0"/>
+                        <a:ea typeface="Times New Roman" panose="02020603050405020304" pitchFamily="18" charset="0"/>
+                        <a:cs typeface="Times New Roman" panose="02020603050405020304" pitchFamily="18" charset="0"/>
+                      </a:endParaRPr>
+                    </a:p>
+                  </a:txBody>
+                  <a:tcPr marL="68580" marR="68580" marT="0" marB="0" anchor="ctr">
+                    <a:noFill/>
+                  </a:tcPr>
+                </a:tc>
+                <a:tc>
+                  <a:txBody>
+                    <a:bodyPr/>
+                    <a:lstStyle/>
+                    <a:p>
+                      <a:pPr algn="ctr">
+                        <a:buNone/>
+                      </a:pPr>
+                      <a:endParaRPr lang="es-ES_tradnl" sz="900" dirty="0">
+                        <a:effectLst/>
+                        <a:latin typeface="Times New Roman" panose="02020603050405020304" pitchFamily="18" charset="0"/>
+                        <a:ea typeface="Times New Roman" panose="02020603050405020304" pitchFamily="18" charset="0"/>
+                        <a:cs typeface="Times New Roman" panose="02020603050405020304" pitchFamily="18" charset="0"/>
+                      </a:endParaRPr>
+                    </a:p>
+                  </a:txBody>
+                  <a:tcPr marL="68580" marR="68580" marT="0" marB="0" anchor="ctr">
+                    <a:noFill/>
+                  </a:tcPr>
+                </a:tc>
+                <a:tc>
+                  <a:txBody>
+                    <a:bodyPr/>
+                    <a:lstStyle/>
+                    <a:p>
+                      <a:pPr algn="ctr">
+                        <a:buNone/>
+                      </a:pPr>
+                      <a:endParaRPr lang="es-ES_tradnl" sz="900" dirty="0">
+                        <a:effectLst/>
+                        <a:latin typeface="Times New Roman" panose="02020603050405020304" pitchFamily="18" charset="0"/>
+                        <a:ea typeface="Times New Roman" panose="02020603050405020304" pitchFamily="18" charset="0"/>
+                        <a:cs typeface="Times New Roman" panose="02020603050405020304" pitchFamily="18" charset="0"/>
+                      </a:endParaRPr>
+                    </a:p>
+                  </a:txBody>
+                  <a:tcPr marL="68580" marR="68580" marT="0" marB="0" anchor="ctr">
+                    <a:noFill/>
+                  </a:tcPr>
+                </a:tc>
+                <a:tc>
+                  <a:txBody>
+                    <a:bodyPr/>
+                    <a:lstStyle/>
+                    <a:p>
+                      <a:pPr algn="ctr">
+                        <a:buNone/>
+                      </a:pPr>
+                      <a:endParaRPr lang="es-ES_tradnl" sz="900" dirty="0">
+                        <a:effectLst/>
+                        <a:latin typeface="Times New Roman" panose="02020603050405020304" pitchFamily="18" charset="0"/>
+                        <a:ea typeface="Times New Roman" panose="02020603050405020304" pitchFamily="18" charset="0"/>
+                        <a:cs typeface="Times New Roman" panose="02020603050405020304" pitchFamily="18" charset="0"/>
+                      </a:endParaRPr>
+                    </a:p>
+                  </a:txBody>
+                  <a:tcPr marL="68580" marR="68580" marT="0" marB="0" anchor="ctr">
+                    <a:noFill/>
+                  </a:tcPr>
+                </a:tc>
+                <a:tc>
+                  <a:txBody>
+                    <a:bodyPr/>
+                    <a:lstStyle/>
+                    <a:p>
+                      <a:pPr algn="ctr">
+                        <a:buNone/>
+                      </a:pPr>
+                      <a:endParaRPr lang="es-ES_tradnl" sz="900" dirty="0">
+                        <a:effectLst/>
+                        <a:latin typeface="Times New Roman" panose="02020603050405020304" pitchFamily="18" charset="0"/>
+                        <a:ea typeface="Times New Roman" panose="02020603050405020304" pitchFamily="18" charset="0"/>
+                        <a:cs typeface="Times New Roman" panose="02020603050405020304" pitchFamily="18" charset="0"/>
+                      </a:endParaRPr>
+                    </a:p>
+                  </a:txBody>
+                  <a:tcPr marL="68580" marR="68580" marT="0" marB="0" anchor="ctr">
+                    <a:noFill/>
+                  </a:tcPr>
+                </a:tc>
+                <a:tc>
+                  <a:txBody>
+                    <a:bodyPr/>
+                    <a:lstStyle/>
+                    <a:p>
+                      <a:pPr algn="ctr">
+                        <a:buNone/>
+                      </a:pPr>
+                      <a:endParaRPr lang="es-ES_tradnl" sz="900" dirty="0">
+                        <a:effectLst/>
+                        <a:latin typeface="Times New Roman" panose="02020603050405020304" pitchFamily="18" charset="0"/>
+                        <a:ea typeface="Times New Roman" panose="02020603050405020304" pitchFamily="18" charset="0"/>
+                        <a:cs typeface="Times New Roman" panose="02020603050405020304" pitchFamily="18" charset="0"/>
+                      </a:endParaRPr>
+                    </a:p>
+                  </a:txBody>
+                  <a:tcPr marL="68580" marR="68580" marT="0" marB="0" anchor="ctr">
+                    <a:noFill/>
+                  </a:tcPr>
+                </a:tc>
+                <a:tc>
+                  <a:txBody>
+                    <a:bodyPr/>
+                    <a:lstStyle/>
+                    <a:p>
+                      <a:pPr algn="ctr">
+                        <a:buNone/>
+                      </a:pPr>
+                      <a:endParaRPr lang="es-ES_tradnl" sz="900" dirty="0">
+                        <a:effectLst/>
+                        <a:latin typeface="Times New Roman" panose="02020603050405020304" pitchFamily="18" charset="0"/>
+                        <a:ea typeface="Times New Roman" panose="02020603050405020304" pitchFamily="18" charset="0"/>
+                        <a:cs typeface="Times New Roman" panose="02020603050405020304" pitchFamily="18" charset="0"/>
+                      </a:endParaRPr>
+                    </a:p>
+                  </a:txBody>
+                  <a:tcPr marL="68580" marR="68580" marT="0" marB="0" anchor="ctr">
+                    <a:noFill/>
+                  </a:tcPr>
+                </a:tc>
+                <a:tc>
+                  <a:txBody>
+                    <a:bodyPr/>
+                    <a:lstStyle/>
+                    <a:p>
+                      <a:pPr algn="ctr">
+                        <a:buNone/>
+                      </a:pPr>
+                      <a:endParaRPr lang="es-ES_tradnl" sz="900" dirty="0">
+                        <a:effectLst/>
+                        <a:latin typeface="Times New Roman" panose="02020603050405020304" pitchFamily="18" charset="0"/>
+                        <a:ea typeface="Times New Roman" panose="02020603050405020304" pitchFamily="18" charset="0"/>
+                        <a:cs typeface="Times New Roman" panose="02020603050405020304" pitchFamily="18" charset="0"/>
+                      </a:endParaRPr>
+                    </a:p>
+                  </a:txBody>
+                  <a:tcPr marL="68580" marR="68580" marT="0" marB="0" anchor="ctr">
+                    <a:noFill/>
+                  </a:tcPr>
+                </a:tc>
+                <a:tc>
+                  <a:txBody>
+                    <a:bodyPr/>
+                    <a:lstStyle/>
+                    <a:p>
+                      <a:pPr algn="ctr">
+                        <a:buNone/>
+                      </a:pPr>
+                      <a:endParaRPr lang="es-ES_tradnl" sz="900" dirty="0">
+                        <a:effectLst/>
+                        <a:latin typeface="Times New Roman" panose="02020603050405020304" pitchFamily="18" charset="0"/>
+                        <a:ea typeface="Times New Roman" panose="02020603050405020304" pitchFamily="18" charset="0"/>
+                        <a:cs typeface="Times New Roman" panose="02020603050405020304" pitchFamily="18" charset="0"/>
+                      </a:endParaRPr>
+                    </a:p>
+                  </a:txBody>
+                  <a:tcPr marL="68580" marR="68580" marT="0" marB="0" anchor="ctr">
+                    <a:noFill/>
+                  </a:tcPr>
+                </a:tc>
+                <a:tc>
+                  <a:txBody>
+                    <a:bodyPr/>
+                    <a:lstStyle/>
+                    <a:p>
+                      <a:pPr algn="ctr">
+                        <a:buNone/>
+                      </a:pPr>
+                      <a:endParaRPr lang="es-ES_tradnl" sz="900" dirty="0">
+                        <a:effectLst/>
+                        <a:latin typeface="Times New Roman" panose="02020603050405020304" pitchFamily="18" charset="0"/>
+                        <a:ea typeface="Times New Roman" panose="02020603050405020304" pitchFamily="18" charset="0"/>
+                        <a:cs typeface="Times New Roman" panose="02020603050405020304" pitchFamily="18" charset="0"/>
+                      </a:endParaRPr>
+                    </a:p>
+                  </a:txBody>
+                  <a:tcPr marL="68580" marR="68580" marT="0" marB="0" anchor="ctr">
+                    <a:noFill/>
+                  </a:tcPr>
+                </a:tc>
+                <a:tc>
+                  <a:txBody>
+                    <a:bodyPr/>
+                    <a:lstStyle/>
+                    <a:p>
+                      <a:pPr algn="ctr">
+                        <a:buNone/>
+                      </a:pPr>
+                      <a:endParaRPr lang="es-ES_tradnl" sz="900" dirty="0">
+                        <a:effectLst/>
+                        <a:latin typeface="Times New Roman" panose="02020603050405020304" pitchFamily="18" charset="0"/>
+                        <a:ea typeface="Times New Roman" panose="02020603050405020304" pitchFamily="18" charset="0"/>
+                        <a:cs typeface="Times New Roman" panose="02020603050405020304" pitchFamily="18" charset="0"/>
+                      </a:endParaRPr>
+                    </a:p>
+                  </a:txBody>
+                  <a:tcPr marL="68580" marR="68580" marT="0" marB="0" anchor="ctr">
+                    <a:noFill/>
+                  </a:tcPr>
+                </a:tc>
+                <a:tc>
+                  <a:txBody>
+                    <a:bodyPr/>
+                    <a:lstStyle/>
+                    <a:p>
+                      <a:pPr algn="ctr">
+                        <a:buNone/>
+                      </a:pPr>
+                      <a:endParaRPr lang="es-ES_tradnl" sz="900" dirty="0">
                         <a:effectLst/>
                         <a:latin typeface="Times New Roman" panose="02020603050405020304" pitchFamily="18" charset="0"/>
                         <a:ea typeface="Times New Roman" panose="02020603050405020304" pitchFamily="18" charset="0"/>
@@ -7200,7 +7295,7 @@
                       <a:pPr algn="ctr">
                         <a:buNone/>
                       </a:pPr>
-                      <a:endParaRPr lang="es-ES_tradnl" sz="1000" b="0" noProof="1">
+                      <a:endParaRPr lang="es-ES_tradnl" sz="900" b="0" noProof="1">
                         <a:solidFill>
                           <a:schemeClr val="tx1"/>
                         </a:solidFill>
@@ -7232,7 +7327,7 @@
                       <a:pPr algn="ctr">
                         <a:buNone/>
                       </a:pPr>
-                      <a:endParaRPr lang="es-ES_tradnl" sz="1000" dirty="0">
+                      <a:endParaRPr lang="es-ES_tradnl" sz="900" dirty="0">
                         <a:effectLst/>
                         <a:latin typeface="Times New Roman" panose="02020603050405020304" pitchFamily="18" charset="0"/>
                         <a:ea typeface="Times New Roman" panose="02020603050405020304" pitchFamily="18" charset="0"/>
@@ -7261,7 +7356,7 @@
                       <a:pPr algn="ctr">
                         <a:buNone/>
                       </a:pPr>
-                      <a:endParaRPr lang="es-ES_tradnl" sz="1000" dirty="0">
+                      <a:endParaRPr lang="es-ES_tradnl" sz="900" dirty="0">
                         <a:effectLst/>
                         <a:latin typeface="Times New Roman" panose="02020603050405020304" pitchFamily="18" charset="0"/>
                         <a:ea typeface="Times New Roman" panose="02020603050405020304" pitchFamily="18" charset="0"/>
@@ -7290,7 +7385,7 @@
                       <a:pPr algn="ctr">
                         <a:buNone/>
                       </a:pPr>
-                      <a:endParaRPr lang="es-ES_tradnl" sz="1000" dirty="0">
+                      <a:endParaRPr lang="es-ES_tradnl" sz="900" dirty="0">
                         <a:effectLst/>
                         <a:latin typeface="Times New Roman" panose="02020603050405020304" pitchFamily="18" charset="0"/>
                         <a:ea typeface="Times New Roman" panose="02020603050405020304" pitchFamily="18" charset="0"/>
@@ -7319,7 +7414,7 @@
                       <a:pPr algn="ctr">
                         <a:buNone/>
                       </a:pPr>
-                      <a:endParaRPr lang="es-ES_tradnl" sz="1000" dirty="0">
+                      <a:endParaRPr lang="es-ES_tradnl" sz="900" dirty="0">
                         <a:effectLst/>
                         <a:latin typeface="Times New Roman" panose="02020603050405020304" pitchFamily="18" charset="0"/>
                         <a:ea typeface="Times New Roman" panose="02020603050405020304" pitchFamily="18" charset="0"/>
@@ -7348,7 +7443,7 @@
                       <a:pPr algn="ctr">
                         <a:buNone/>
                       </a:pPr>
-                      <a:endParaRPr lang="es-ES_tradnl" sz="1000" dirty="0">
+                      <a:endParaRPr lang="es-ES_tradnl" sz="900" dirty="0">
                         <a:effectLst/>
                         <a:latin typeface="Times New Roman" panose="02020603050405020304" pitchFamily="18" charset="0"/>
                         <a:ea typeface="Times New Roman" panose="02020603050405020304" pitchFamily="18" charset="0"/>
@@ -7377,7 +7472,7 @@
                       <a:pPr algn="ctr">
                         <a:buNone/>
                       </a:pPr>
-                      <a:endParaRPr lang="es-ES_tradnl" sz="1000" dirty="0">
+                      <a:endParaRPr lang="es-ES_tradnl" sz="900" dirty="0">
                         <a:effectLst/>
                         <a:latin typeface="Times New Roman" panose="02020603050405020304" pitchFamily="18" charset="0"/>
                         <a:ea typeface="Times New Roman" panose="02020603050405020304" pitchFamily="18" charset="0"/>
@@ -7406,7 +7501,7 @@
                       <a:pPr algn="ctr">
                         <a:buNone/>
                       </a:pPr>
-                      <a:endParaRPr lang="es-ES_tradnl" sz="1000" dirty="0">
+                      <a:endParaRPr lang="es-ES_tradnl" sz="900" dirty="0">
                         <a:effectLst/>
                         <a:latin typeface="Times New Roman" panose="02020603050405020304" pitchFamily="18" charset="0"/>
                         <a:ea typeface="Times New Roman" panose="02020603050405020304" pitchFamily="18" charset="0"/>
@@ -7435,7 +7530,7 @@
                       <a:pPr algn="ctr">
                         <a:buNone/>
                       </a:pPr>
-                      <a:endParaRPr lang="es-ES_tradnl" sz="1000" dirty="0">
+                      <a:endParaRPr lang="es-ES_tradnl" sz="900" dirty="0">
                         <a:effectLst/>
                         <a:latin typeface="Times New Roman" panose="02020603050405020304" pitchFamily="18" charset="0"/>
                         <a:ea typeface="Times New Roman" panose="02020603050405020304" pitchFamily="18" charset="0"/>
@@ -7464,7 +7559,7 @@
                       <a:pPr algn="ctr">
                         <a:buNone/>
                       </a:pPr>
-                      <a:endParaRPr lang="es-ES_tradnl" sz="1000" dirty="0">
+                      <a:endParaRPr lang="es-ES_tradnl" sz="900" dirty="0">
                         <a:effectLst/>
                         <a:latin typeface="Times New Roman" panose="02020603050405020304" pitchFamily="18" charset="0"/>
                         <a:ea typeface="Times New Roman" panose="02020603050405020304" pitchFamily="18" charset="0"/>
@@ -7493,7 +7588,7 @@
                       <a:pPr algn="ctr">
                         <a:buNone/>
                       </a:pPr>
-                      <a:endParaRPr lang="es-ES_tradnl" sz="1000" dirty="0">
+                      <a:endParaRPr lang="es-ES_tradnl" sz="900" dirty="0">
                         <a:effectLst/>
                         <a:latin typeface="Times New Roman" panose="02020603050405020304" pitchFamily="18" charset="0"/>
                         <a:ea typeface="Times New Roman" panose="02020603050405020304" pitchFamily="18" charset="0"/>
@@ -7522,7 +7617,7 @@
                       <a:pPr algn="ctr">
                         <a:buNone/>
                       </a:pPr>
-                      <a:endParaRPr lang="es-ES_tradnl" sz="1000" dirty="0">
+                      <a:endParaRPr lang="es-ES_tradnl" sz="900" dirty="0">
                         <a:effectLst/>
                         <a:latin typeface="Times New Roman" panose="02020603050405020304" pitchFamily="18" charset="0"/>
                         <a:ea typeface="Times New Roman" panose="02020603050405020304" pitchFamily="18" charset="0"/>
@@ -7551,7 +7646,7 @@
                       <a:pPr algn="ctr">
                         <a:buNone/>
                       </a:pPr>
-                      <a:endParaRPr lang="es-ES_tradnl" sz="1000" dirty="0">
+                      <a:endParaRPr lang="es-ES_tradnl" sz="900" dirty="0">
                         <a:effectLst/>
                         <a:latin typeface="Times New Roman" panose="02020603050405020304" pitchFamily="18" charset="0"/>
                         <a:ea typeface="Times New Roman" panose="02020603050405020304" pitchFamily="18" charset="0"/>
@@ -7580,7 +7675,7 @@
                       <a:pPr algn="ctr">
                         <a:buNone/>
                       </a:pPr>
-                      <a:endParaRPr lang="es-ES_tradnl" sz="1000" dirty="0">
+                      <a:endParaRPr lang="es-ES_tradnl" sz="900" dirty="0">
                         <a:effectLst/>
                         <a:latin typeface="Times New Roman" panose="02020603050405020304" pitchFamily="18" charset="0"/>
                         <a:ea typeface="Times New Roman" panose="02020603050405020304" pitchFamily="18" charset="0"/>
@@ -7609,7 +7704,7 @@
                       <a:pPr algn="ctr">
                         <a:buNone/>
                       </a:pPr>
-                      <a:endParaRPr lang="es-ES_tradnl" sz="1000" dirty="0">
+                      <a:endParaRPr lang="es-ES_tradnl" sz="900" dirty="0">
                         <a:effectLst/>
                         <a:latin typeface="Times New Roman" panose="02020603050405020304" pitchFamily="18" charset="0"/>
                         <a:ea typeface="Times New Roman" panose="02020603050405020304" pitchFamily="18" charset="0"/>
@@ -7638,7 +7733,7 @@
                       <a:pPr algn="ctr">
                         <a:buNone/>
                       </a:pPr>
-                      <a:endParaRPr lang="es-ES_tradnl" sz="1000" dirty="0">
+                      <a:endParaRPr lang="es-ES_tradnl" sz="900" dirty="0">
                         <a:effectLst/>
                         <a:latin typeface="Times New Roman" panose="02020603050405020304" pitchFamily="18" charset="0"/>
                         <a:ea typeface="Times New Roman" panose="02020603050405020304" pitchFamily="18" charset="0"/>
@@ -8041,38 +8136,6 @@
           </a:p>
         </p:txBody>
       </p:sp>
-      <p:pic>
-        <p:nvPicPr>
-          <p:cNvPr id="6" name="Onlinebild-Platzhalter 5">
-            <a:extLst>
-              <a:ext uri="{FF2B5EF4-FFF2-40B4-BE49-F238E27FC236}">
-                <a16:creationId xmlns:a16="http://schemas.microsoft.com/office/drawing/2014/main" id="{F221D238-8479-D4A7-F21D-AF23A5E92C0B}"/>
-              </a:ext>
-            </a:extLst>
-          </p:cNvPr>
-          <p:cNvPicPr>
-            <a:picLocks noGrp="1" noChangeAspect="1"/>
-          </p:cNvPicPr>
-          <p:nvPr>
-            <p:ph type="clipArt" sz="quarter" idx="15"/>
-          </p:nvPr>
-        </p:nvPicPr>
-        <p:blipFill>
-          <a:blip r:embed="rId2"/>
-          <a:stretch>
-            <a:fillRect/>
-          </a:stretch>
-        </p:blipFill>
-        <p:spPr>
-          <a:xfrm>
-            <a:off x="583920" y="2151063"/>
-            <a:ext cx="5239310" cy="4008437"/>
-          </a:xfrm>
-          <a:prstGeom prst="rect">
-            <a:avLst/>
-          </a:prstGeom>
-        </p:spPr>
-      </p:pic>
       <p:sp>
         <p:nvSpPr>
           <p:cNvPr id="2" name="Fußzeilenplatzhalter 2">
@@ -8202,6 +8265,38 @@
           </a:p>
         </p:txBody>
       </p:sp>
+      <p:pic>
+        <p:nvPicPr>
+          <p:cNvPr id="7" name="Onlinebild-Platzhalter 6">
+            <a:extLst>
+              <a:ext uri="{FF2B5EF4-FFF2-40B4-BE49-F238E27FC236}">
+                <a16:creationId xmlns:a16="http://schemas.microsoft.com/office/drawing/2014/main" id="{D441AAF6-B23A-0D7F-231B-37268A9B983C}"/>
+              </a:ext>
+            </a:extLst>
+          </p:cNvPr>
+          <p:cNvPicPr>
+            <a:picLocks noGrp="1" noChangeAspect="1"/>
+          </p:cNvPicPr>
+          <p:nvPr>
+            <p:ph type="clipArt" sz="quarter" idx="15"/>
+          </p:nvPr>
+        </p:nvPicPr>
+        <p:blipFill>
+          <a:blip r:embed="rId2"/>
+          <a:stretch>
+            <a:fillRect/>
+          </a:stretch>
+        </p:blipFill>
+        <p:spPr>
+          <a:xfrm>
+            <a:off x="520700" y="2231013"/>
+            <a:ext cx="5365750" cy="3848537"/>
+          </a:xfrm>
+          <a:prstGeom prst="rect">
+            <a:avLst/>
+          </a:prstGeom>
+        </p:spPr>
+      </p:pic>
     </p:spTree>
     <p:extLst>
       <p:ext uri="{BB962C8B-B14F-4D97-AF65-F5344CB8AC3E}">
@@ -8292,14 +8387,14 @@
             <p:ph sz="quarter" idx="14"/>
             <p:extLst>
               <p:ext uri="{D42A27DB-BD31-4B8C-83A1-F6EECF244321}">
-                <p14:modId xmlns:p14="http://schemas.microsoft.com/office/powerpoint/2010/main" val="310042368"/>
+                <p14:modId xmlns:p14="http://schemas.microsoft.com/office/powerpoint/2010/main" val="564828949"/>
               </p:ext>
             </p:extLst>
           </p:nvPr>
         </p:nvGraphicFramePr>
         <p:xfrm>
           <a:off x="561487" y="4583113"/>
-          <a:ext cx="10532960" cy="1681480"/>
+          <a:ext cx="10532960" cy="1210945"/>
         </p:xfrm>
         <a:graphic>
           <a:graphicData uri="http://schemas.openxmlformats.org/drawingml/2006/table">
@@ -8431,7 +8526,7 @@
                         <a:buNone/>
                       </a:pPr>
                       <a:r>
-                        <a:rPr lang="es-ES_tradnl" sz="1000" noProof="1">
+                        <a:rPr lang="es-ES_tradnl" sz="900" noProof="1">
                           <a:solidFill>
                             <a:schemeClr val="tx1"/>
                           </a:solidFill>
@@ -8441,7 +8536,7 @@
                         </a:rPr>
                         <a:t>Rank</a:t>
                       </a:r>
-                      <a:endParaRPr lang="es-ES_tradnl" sz="1000" noProof="1">
+                      <a:endParaRPr lang="es-ES_tradnl" sz="900" noProof="1">
                         <a:solidFill>
                           <a:schemeClr val="tx1"/>
                         </a:solidFill>
@@ -8483,7 +8578,7 @@
                         <a:buNone/>
                       </a:pPr>
                       <a:r>
-                        <a:rPr lang="es-ES_tradnl" sz="1000" noProof="1">
+                        <a:rPr lang="es-ES_tradnl" sz="900" noProof="1">
                           <a:solidFill>
                             <a:schemeClr val="tx1"/>
                           </a:solidFill>
@@ -8493,7 +8588,7 @@
                         </a:rPr>
                         <a:t>Sweep Val</a:t>
                       </a:r>
-                      <a:endParaRPr lang="es-ES_tradnl" sz="1000" noProof="1">
+                      <a:endParaRPr lang="es-ES_tradnl" sz="900" noProof="1">
                         <a:solidFill>
                           <a:schemeClr val="tx1"/>
                         </a:solidFill>
@@ -8535,7 +8630,7 @@
                         <a:buNone/>
                       </a:pPr>
                       <a:r>
-                        <a:rPr lang="es-ES_tradnl" sz="1000" noProof="1">
+                        <a:rPr lang="es-ES_tradnl" sz="900" noProof="1">
                           <a:solidFill>
                             <a:schemeClr val="tx1"/>
                           </a:solidFill>
@@ -8545,7 +8640,7 @@
                         </a:rPr>
                         <a:t>O1_final</a:t>
                       </a:r>
-                      <a:endParaRPr lang="es-ES_tradnl" sz="1000" noProof="1">
+                      <a:endParaRPr lang="es-ES_tradnl" sz="900" noProof="1">
                         <a:solidFill>
                           <a:schemeClr val="tx1"/>
                         </a:solidFill>
@@ -8590,7 +8685,7 @@
                         <a:buNone/>
                       </a:pPr>
                       <a:r>
-                        <a:rPr lang="es-ES_tradnl" sz="1000" noProof="1">
+                        <a:rPr lang="es-ES_tradnl" sz="900" noProof="1">
                           <a:solidFill>
                             <a:schemeClr val="tx1"/>
                           </a:solidFill>
@@ -8600,7 +8695,7 @@
                         </a:rPr>
                         <a:t>Mp [°]</a:t>
                       </a:r>
-                      <a:endParaRPr lang="es-ES_tradnl" sz="1000" noProof="1">
+                      <a:endParaRPr lang="es-ES_tradnl" sz="900" noProof="1">
                         <a:solidFill>
                           <a:schemeClr val="tx1"/>
                         </a:solidFill>
@@ -8642,7 +8737,7 @@
                         <a:buNone/>
                       </a:pPr>
                       <a:r>
-                        <a:rPr lang="es-ES_tradnl" sz="1000" noProof="1">
+                        <a:rPr lang="es-ES_tradnl" sz="900" noProof="1">
                           <a:solidFill>
                             <a:schemeClr val="tx1"/>
                           </a:solidFill>
@@ -8652,7 +8747,7 @@
                         </a:rPr>
                         <a:t>Mp[%]</a:t>
                       </a:r>
-                      <a:endParaRPr lang="es-ES_tradnl" sz="1000" noProof="1">
+                      <a:endParaRPr lang="es-ES_tradnl" sz="900" noProof="1">
                         <a:solidFill>
                           <a:schemeClr val="tx1"/>
                         </a:solidFill>
@@ -8697,7 +8792,7 @@
                         <a:buNone/>
                       </a:pPr>
                       <a:r>
-                        <a:rPr lang="es-ES_tradnl" sz="1000" noProof="1">
+                        <a:rPr lang="es-ES_tradnl" sz="900" noProof="1">
                           <a:solidFill>
                             <a:schemeClr val="tx1"/>
                           </a:solidFill>
@@ -8707,7 +8802,7 @@
                         </a:rPr>
                         <a:t>T[s]</a:t>
                       </a:r>
-                      <a:endParaRPr lang="es-ES_tradnl" sz="1000" noProof="1">
+                      <a:endParaRPr lang="es-ES_tradnl" sz="900" noProof="1">
                         <a:solidFill>
                           <a:schemeClr val="tx1"/>
                         </a:solidFill>
@@ -8752,7 +8847,7 @@
                         <a:buNone/>
                       </a:pPr>
                       <a:r>
-                        <a:rPr lang="es-ES_tradnl" sz="1000" noProof="1">
+                        <a:rPr lang="es-ES_tradnl" sz="900" noProof="1">
                           <a:solidFill>
                             <a:schemeClr val="tx1"/>
                           </a:solidFill>
@@ -8762,7 +8857,7 @@
                         </a:rPr>
                         <a:t>e_ss_abs[°]</a:t>
                       </a:r>
-                      <a:endParaRPr lang="es-ES_tradnl" sz="1000" noProof="1">
+                      <a:endParaRPr lang="es-ES_tradnl" sz="900" noProof="1">
                         <a:solidFill>
                           <a:schemeClr val="tx1"/>
                         </a:solidFill>
@@ -8804,7 +8899,7 @@
                         <a:buNone/>
                       </a:pPr>
                       <a:r>
-                        <a:rPr lang="es-ES_tradnl" sz="1000" noProof="1">
+                        <a:rPr lang="es-ES_tradnl" sz="900" noProof="1">
                           <a:solidFill>
                             <a:schemeClr val="tx1"/>
                           </a:solidFill>
@@ -8814,7 +8909,7 @@
                         </a:rPr>
                         <a:t>RMSE[°]</a:t>
                       </a:r>
-                      <a:endParaRPr lang="es-ES_tradnl" sz="1000" noProof="1">
+                      <a:endParaRPr lang="es-ES_tradnl" sz="900" noProof="1">
                         <a:solidFill>
                           <a:schemeClr val="tx1"/>
                         </a:solidFill>
@@ -8856,7 +8951,7 @@
                         <a:buNone/>
                       </a:pPr>
                       <a:r>
-                        <a:rPr lang="es-ES_tradnl" sz="1000" noProof="1">
+                        <a:rPr lang="es-ES_tradnl" sz="900" noProof="1">
                           <a:solidFill>
                             <a:schemeClr val="tx1"/>
                           </a:solidFill>
@@ -8866,7 +8961,7 @@
                         </a:rPr>
                         <a:t>ITAE[°s]</a:t>
                       </a:r>
-                      <a:endParaRPr lang="es-ES_tradnl" sz="1000" noProof="1">
+                      <a:endParaRPr lang="es-ES_tradnl" sz="900" noProof="1">
                         <a:solidFill>
                           <a:schemeClr val="tx1"/>
                         </a:solidFill>
@@ -8908,7 +9003,7 @@
                         <a:buNone/>
                       </a:pPr>
                       <a:r>
-                        <a:rPr lang="es-ES_tradnl" sz="1000" noProof="1">
+                        <a:rPr lang="es-ES_tradnl" sz="900" noProof="1">
                           <a:solidFill>
                             <a:schemeClr val="tx1"/>
                           </a:solidFill>
@@ -8918,7 +9013,7 @@
                         </a:rPr>
                         <a:t>Tr[s]</a:t>
                       </a:r>
-                      <a:endParaRPr lang="es-ES_tradnl" sz="1000" noProof="1">
+                      <a:endParaRPr lang="es-ES_tradnl" sz="900" noProof="1">
                         <a:solidFill>
                           <a:schemeClr val="tx1"/>
                         </a:solidFill>
@@ -8960,7 +9055,7 @@
                         <a:buNone/>
                       </a:pPr>
                       <a:r>
-                        <a:rPr lang="es-ES_tradnl" sz="1000" noProof="1">
+                        <a:rPr lang="es-ES_tradnl" sz="900" noProof="1">
                           <a:solidFill>
                             <a:schemeClr val="tx1"/>
                           </a:solidFill>
@@ -8970,7 +9065,7 @@
                         </a:rPr>
                         <a:t>Iosc</a:t>
                       </a:r>
-                      <a:endParaRPr lang="es-ES_tradnl" sz="1000" noProof="1">
+                      <a:endParaRPr lang="es-ES_tradnl" sz="900" noProof="1">
                         <a:solidFill>
                           <a:schemeClr val="tx1"/>
                         </a:solidFill>
@@ -9012,7 +9107,7 @@
                         <a:buNone/>
                       </a:pPr>
                       <a:r>
-                        <a:rPr lang="es-ES_tradnl" sz="1000" noProof="1">
+                        <a:rPr lang="es-ES_tradnl" sz="900" noProof="1">
                           <a:solidFill>
                             <a:schemeClr val="tx1"/>
                           </a:solidFill>
@@ -9022,7 +9117,7 @@
                         </a:rPr>
                         <a:t>U_peak</a:t>
                       </a:r>
-                      <a:endParaRPr lang="es-ES_tradnl" sz="1000" noProof="1">
+                      <a:endParaRPr lang="es-ES_tradnl" sz="900" noProof="1">
                         <a:solidFill>
                           <a:schemeClr val="tx1"/>
                         </a:solidFill>
@@ -9064,7 +9159,7 @@
                         <a:buNone/>
                       </a:pPr>
                       <a:r>
-                        <a:rPr lang="es-ES_tradnl" sz="1000" noProof="1">
+                        <a:rPr lang="es-ES_tradnl" sz="900" noProof="1">
                           <a:solidFill>
                             <a:schemeClr val="tx1"/>
                           </a:solidFill>
@@ -9074,7 +9169,7 @@
                         </a:rPr>
                         <a:t>U_rms</a:t>
                       </a:r>
-                      <a:endParaRPr lang="es-ES_tradnl" sz="1000" noProof="1">
+                      <a:endParaRPr lang="es-ES_tradnl" sz="900" noProof="1">
                         <a:solidFill>
                           <a:schemeClr val="tx1"/>
                         </a:solidFill>
@@ -9116,7 +9211,7 @@
                         <a:buNone/>
                       </a:pPr>
                       <a:r>
-                        <a:rPr lang="es-ES_tradnl" sz="1000" noProof="1">
+                        <a:rPr lang="es-ES_tradnl" sz="900" noProof="1">
                           <a:solidFill>
                             <a:schemeClr val="tx1"/>
                           </a:solidFill>
@@ -9126,7 +9221,7 @@
                         </a:rPr>
                         <a:t>U_energy</a:t>
                       </a:r>
-                      <a:endParaRPr lang="es-ES_tradnl" sz="1000" noProof="1">
+                      <a:endParaRPr lang="es-ES_tradnl" sz="900" noProof="1">
                         <a:solidFill>
                           <a:schemeClr val="tx1"/>
                         </a:solidFill>
@@ -9168,7 +9263,7 @@
                         <a:buNone/>
                       </a:pPr>
                       <a:r>
-                        <a:rPr lang="es-ES_tradnl" sz="1000" noProof="1">
+                        <a:rPr lang="es-ES_tradnl" sz="900" noProof="1">
                           <a:solidFill>
                             <a:schemeClr val="tx1"/>
                           </a:solidFill>
@@ -9178,7 +9273,7 @@
                         </a:rPr>
                         <a:t>U_abs</a:t>
                       </a:r>
-                      <a:endParaRPr lang="es-ES_tradnl" sz="1000" noProof="1">
+                      <a:endParaRPr lang="es-ES_tradnl" sz="900" noProof="1">
                         <a:solidFill>
                           <a:schemeClr val="tx1"/>
                         </a:solidFill>
@@ -9220,7 +9315,7 @@
                         <a:buNone/>
                       </a:pPr>
                       <a:r>
-                        <a:rPr lang="es-ES_tradnl" sz="1000" noProof="1">
+                        <a:rPr lang="es-ES_tradnl" sz="900" noProof="1">
                           <a:solidFill>
                             <a:schemeClr val="tx1"/>
                           </a:solidFill>
@@ -9230,7 +9325,7 @@
                         </a:rPr>
                         <a:t>U_TV</a:t>
                       </a:r>
-                      <a:endParaRPr lang="es-ES_tradnl" sz="1000" noProof="1">
+                      <a:endParaRPr lang="es-ES_tradnl" sz="900" noProof="1">
                         <a:solidFill>
                           <a:schemeClr val="tx1"/>
                         </a:solidFill>
@@ -9279,7 +9374,7 @@
                         <a:buNone/>
                       </a:pPr>
                       <a:r>
-                        <a:rPr lang="es-ES_tradnl" sz="1000" b="0" noProof="1">
+                        <a:rPr lang="es-ES_tradnl" sz="900" b="0" noProof="1">
                           <a:solidFill>
                             <a:schemeClr val="tx1"/>
                           </a:solidFill>
@@ -9289,7 +9384,7 @@
                         </a:rPr>
                         <a:t>1</a:t>
                       </a:r>
-                      <a:endParaRPr lang="es-ES_tradnl" sz="1000" b="0" noProof="1">
+                      <a:endParaRPr lang="es-ES_tradnl" sz="900" b="0" noProof="1">
                         <a:solidFill>
                           <a:schemeClr val="tx1"/>
                         </a:solidFill>
@@ -9322,7 +9417,7 @@
                         <a:buNone/>
                       </a:pPr>
                       <a:r>
-                        <a:rPr lang="es-ES_tradnl" sz="1100" dirty="0">
+                        <a:rPr lang="es-ES_tradnl" sz="900" dirty="0">
                           <a:effectLst/>
                           <a:latin typeface="Times New Roman" panose="02020603050405020304" pitchFamily="18" charset="0"/>
                           <a:ea typeface="Times New Roman" panose="02020603050405020304" pitchFamily="18" charset="0"/>
@@ -9354,7 +9449,7 @@
                         <a:buNone/>
                       </a:pPr>
                       <a:r>
-                        <a:rPr lang="es-ES_tradnl" sz="1100" dirty="0">
+                        <a:rPr lang="es-ES_tradnl" sz="900" dirty="0">
                           <a:effectLst/>
                           <a:latin typeface="Times New Roman" panose="02020603050405020304" pitchFamily="18" charset="0"/>
                           <a:ea typeface="Times New Roman" panose="02020603050405020304" pitchFamily="18" charset="0"/>
@@ -9386,7 +9481,7 @@
                         <a:buNone/>
                       </a:pPr>
                       <a:r>
-                        <a:rPr lang="es-ES_tradnl" sz="1100" dirty="0">
+                        <a:rPr lang="es-ES_tradnl" sz="900" dirty="0">
                           <a:effectLst/>
                           <a:latin typeface="Times New Roman" panose="02020603050405020304" pitchFamily="18" charset="0"/>
                           <a:ea typeface="Times New Roman" panose="02020603050405020304" pitchFamily="18" charset="0"/>
@@ -9418,7 +9513,7 @@
                         <a:buNone/>
                       </a:pPr>
                       <a:r>
-                        <a:rPr lang="es-ES_tradnl" sz="1100" dirty="0">
+                        <a:rPr lang="es-ES_tradnl" sz="900" dirty="0">
                           <a:effectLst/>
                           <a:latin typeface="Times New Roman" panose="02020603050405020304" pitchFamily="18" charset="0"/>
                           <a:ea typeface="Times New Roman" panose="02020603050405020304" pitchFamily="18" charset="0"/>
@@ -9450,7 +9545,7 @@
                         <a:buNone/>
                       </a:pPr>
                       <a:r>
-                        <a:rPr lang="es-ES_tradnl" sz="1100" dirty="0">
+                        <a:rPr lang="es-ES_tradnl" sz="900" dirty="0">
                           <a:effectLst/>
                           <a:latin typeface="Times New Roman" panose="02020603050405020304" pitchFamily="18" charset="0"/>
                           <a:ea typeface="Times New Roman" panose="02020603050405020304" pitchFamily="18" charset="0"/>
@@ -9482,7 +9577,7 @@
                         <a:buNone/>
                       </a:pPr>
                       <a:r>
-                        <a:rPr lang="es-ES_tradnl" sz="1100" dirty="0">
+                        <a:rPr lang="es-ES_tradnl" sz="900" dirty="0">
                           <a:effectLst/>
                           <a:latin typeface="Times New Roman" panose="02020603050405020304" pitchFamily="18" charset="0"/>
                           <a:ea typeface="Times New Roman" panose="02020603050405020304" pitchFamily="18" charset="0"/>
@@ -9514,7 +9609,7 @@
                         <a:buNone/>
                       </a:pPr>
                       <a:r>
-                        <a:rPr lang="es-ES_tradnl" sz="1100" dirty="0">
+                        <a:rPr lang="es-ES_tradnl" sz="900" dirty="0">
                           <a:effectLst/>
                           <a:latin typeface="Times New Roman" panose="02020603050405020304" pitchFamily="18" charset="0"/>
                           <a:ea typeface="Times New Roman" panose="02020603050405020304" pitchFamily="18" charset="0"/>
@@ -9546,7 +9641,7 @@
                         <a:buNone/>
                       </a:pPr>
                       <a:r>
-                        <a:rPr lang="es-ES_tradnl" sz="1100" dirty="0">
+                        <a:rPr lang="es-ES_tradnl" sz="900" dirty="0">
                           <a:effectLst/>
                           <a:latin typeface="Times New Roman" panose="02020603050405020304" pitchFamily="18" charset="0"/>
                           <a:ea typeface="Times New Roman" panose="02020603050405020304" pitchFamily="18" charset="0"/>
@@ -9578,7 +9673,7 @@
                         <a:buNone/>
                       </a:pPr>
                       <a:r>
-                        <a:rPr lang="es-ES_tradnl" sz="1100" dirty="0">
+                        <a:rPr lang="es-ES_tradnl" sz="900" dirty="0">
                           <a:effectLst/>
                           <a:latin typeface="Times New Roman" panose="02020603050405020304" pitchFamily="18" charset="0"/>
                           <a:ea typeface="Times New Roman" panose="02020603050405020304" pitchFamily="18" charset="0"/>
@@ -9610,7 +9705,7 @@
                         <a:buNone/>
                       </a:pPr>
                       <a:r>
-                        <a:rPr lang="es-ES_tradnl" sz="1100" dirty="0">
+                        <a:rPr lang="es-ES_tradnl" sz="900" dirty="0">
                           <a:effectLst/>
                           <a:latin typeface="Times New Roman" panose="02020603050405020304" pitchFamily="18" charset="0"/>
                           <a:ea typeface="Times New Roman" panose="02020603050405020304" pitchFamily="18" charset="0"/>
@@ -9642,17 +9737,23 @@
                         <a:buNone/>
                       </a:pPr>
                       <a:r>
-                        <a:rPr lang="es-ES_tradnl" sz="1100" dirty="0">
+                        <a:rPr lang="es-ES" sz="900">
                           <a:effectLst/>
                           <a:latin typeface="Times New Roman" panose="02020603050405020304" pitchFamily="18" charset="0"/>
                           <a:ea typeface="Times New Roman" panose="02020603050405020304" pitchFamily="18" charset="0"/>
                           <a:cs typeface="Times New Roman" panose="02020603050405020304" pitchFamily="18" charset="0"/>
                         </a:rPr>
-                        <a:t>2.50</a:t>
-                      </a:r>
-                    </a:p>
-                  </a:txBody>
-                  <a:tcPr marL="68580" marR="68580" marT="0" marB="0" anchor="ctr">
+                        <a:t>1.68</a:t>
+                      </a:r>
+                      <a:endParaRPr lang="de-DE" sz="900">
+                        <a:effectLst/>
+                        <a:latin typeface="Times New Roman" panose="02020603050405020304" pitchFamily="18" charset="0"/>
+                        <a:ea typeface="Times New Roman" panose="02020603050405020304" pitchFamily="18" charset="0"/>
+                        <a:cs typeface="Times New Roman" panose="02020603050405020304" pitchFamily="18" charset="0"/>
+                      </a:endParaRPr>
+                    </a:p>
+                  </a:txBody>
+                  <a:tcPr marL="68580" marR="68580" marT="0" marB="0">
                     <a:lnT w="12700" cap="flat" cmpd="sng" algn="ctr">
                       <a:solidFill>
                         <a:schemeClr val="tx1"/>
@@ -9674,17 +9775,23 @@
                         <a:buNone/>
                       </a:pPr>
                       <a:r>
-                        <a:rPr lang="es-ES_tradnl" sz="1100" dirty="0">
+                        <a:rPr lang="es-ES" sz="900">
                           <a:effectLst/>
                           <a:latin typeface="Times New Roman" panose="02020603050405020304" pitchFamily="18" charset="0"/>
                           <a:ea typeface="Times New Roman" panose="02020603050405020304" pitchFamily="18" charset="0"/>
                           <a:cs typeface="Times New Roman" panose="02020603050405020304" pitchFamily="18" charset="0"/>
                         </a:rPr>
-                        <a:t>29.28</a:t>
-                      </a:r>
-                    </a:p>
-                  </a:txBody>
-                  <a:tcPr marL="68580" marR="68580" marT="0" marB="0" anchor="ctr">
+                        <a:t>14.16</a:t>
+                      </a:r>
+                      <a:endParaRPr lang="de-DE" sz="900">
+                        <a:effectLst/>
+                        <a:latin typeface="Times New Roman" panose="02020603050405020304" pitchFamily="18" charset="0"/>
+                        <a:ea typeface="Times New Roman" panose="02020603050405020304" pitchFamily="18" charset="0"/>
+                        <a:cs typeface="Times New Roman" panose="02020603050405020304" pitchFamily="18" charset="0"/>
+                      </a:endParaRPr>
+                    </a:p>
+                  </a:txBody>
+                  <a:tcPr marL="68580" marR="68580" marT="0" marB="0">
                     <a:lnT w="12700" cap="flat" cmpd="sng" algn="ctr">
                       <a:solidFill>
                         <a:schemeClr val="tx1"/>
@@ -9706,17 +9813,23 @@
                         <a:buNone/>
                       </a:pPr>
                       <a:r>
-                        <a:rPr lang="es-ES_tradnl" sz="1100" dirty="0">
+                        <a:rPr lang="es-ES" sz="900">
                           <a:effectLst/>
                           <a:latin typeface="Times New Roman" panose="02020603050405020304" pitchFamily="18" charset="0"/>
                           <a:ea typeface="Times New Roman" panose="02020603050405020304" pitchFamily="18" charset="0"/>
                           <a:cs typeface="Times New Roman" panose="02020603050405020304" pitchFamily="18" charset="0"/>
                         </a:rPr>
-                        <a:t>3.69</a:t>
-                      </a:r>
-                    </a:p>
-                  </a:txBody>
-                  <a:tcPr marL="68580" marR="68580" marT="0" marB="0" anchor="ctr">
+                        <a:t>3.05</a:t>
+                      </a:r>
+                      <a:endParaRPr lang="de-DE" sz="900">
+                        <a:effectLst/>
+                        <a:latin typeface="Times New Roman" panose="02020603050405020304" pitchFamily="18" charset="0"/>
+                        <a:ea typeface="Times New Roman" panose="02020603050405020304" pitchFamily="18" charset="0"/>
+                        <a:cs typeface="Times New Roman" panose="02020603050405020304" pitchFamily="18" charset="0"/>
+                      </a:endParaRPr>
+                    </a:p>
+                  </a:txBody>
+                  <a:tcPr marL="68580" marR="68580" marT="0" marB="0">
                     <a:lnT w="12700" cap="flat" cmpd="sng" algn="ctr">
                       <a:solidFill>
                         <a:schemeClr val="tx1"/>
@@ -9738,17 +9851,23 @@
                         <a:buNone/>
                       </a:pPr>
                       <a:r>
-                        <a:rPr lang="es-ES_tradnl" sz="1100" dirty="0">
+                        <a:rPr lang="es-ES" sz="900">
                           <a:effectLst/>
                           <a:latin typeface="Times New Roman" panose="02020603050405020304" pitchFamily="18" charset="0"/>
                           <a:ea typeface="Times New Roman" panose="02020603050405020304" pitchFamily="18" charset="0"/>
                           <a:cs typeface="Times New Roman" panose="02020603050405020304" pitchFamily="18" charset="0"/>
                         </a:rPr>
-                        <a:t>49.66</a:t>
-                      </a:r>
-                    </a:p>
-                  </a:txBody>
-                  <a:tcPr marL="68580" marR="68580" marT="0" marB="0" anchor="ctr">
+                        <a:t>25.71</a:t>
+                      </a:r>
+                      <a:endParaRPr lang="de-DE" sz="900">
+                        <a:effectLst/>
+                        <a:latin typeface="Times New Roman" panose="02020603050405020304" pitchFamily="18" charset="0"/>
+                        <a:ea typeface="Times New Roman" panose="02020603050405020304" pitchFamily="18" charset="0"/>
+                        <a:cs typeface="Times New Roman" panose="02020603050405020304" pitchFamily="18" charset="0"/>
+                      </a:endParaRPr>
+                    </a:p>
+                  </a:txBody>
+                  <a:tcPr marL="68580" marR="68580" marT="0" marB="0">
                     <a:lnT w="12700" cap="flat" cmpd="sng" algn="ctr">
                       <a:solidFill>
                         <a:schemeClr val="tx1"/>
@@ -9770,7 +9889,7 @@
                         <a:buNone/>
                       </a:pPr>
                       <a:r>
-                        <a:rPr lang="es-ES_tradnl" sz="1100" dirty="0">
+                        <a:rPr lang="es-ES" sz="900">
                           <a:effectLst/>
                           <a:latin typeface="Times New Roman" panose="02020603050405020304" pitchFamily="18" charset="0"/>
                           <a:ea typeface="Times New Roman" panose="02020603050405020304" pitchFamily="18" charset="0"/>
@@ -9778,9 +9897,15 @@
                         </a:rPr>
                         <a:t>NaN</a:t>
                       </a:r>
-                    </a:p>
-                  </a:txBody>
-                  <a:tcPr marL="68580" marR="68580" marT="0" marB="0" anchor="ctr">
+                      <a:endParaRPr lang="de-DE" sz="900">
+                        <a:effectLst/>
+                        <a:latin typeface="Times New Roman" panose="02020603050405020304" pitchFamily="18" charset="0"/>
+                        <a:ea typeface="Times New Roman" panose="02020603050405020304" pitchFamily="18" charset="0"/>
+                        <a:cs typeface="Times New Roman" panose="02020603050405020304" pitchFamily="18" charset="0"/>
+                      </a:endParaRPr>
+                    </a:p>
+                  </a:txBody>
+                  <a:tcPr marL="68580" marR="68580" marT="0" marB="0">
                     <a:lnT w="12700" cap="flat" cmpd="sng" algn="ctr">
                       <a:solidFill>
                         <a:schemeClr val="tx1"/>
@@ -9809,7 +9934,7 @@
                         <a:buNone/>
                       </a:pPr>
                       <a:r>
-                        <a:rPr lang="es-ES_tradnl" sz="1000" b="0" noProof="1">
+                        <a:rPr lang="es-ES_tradnl" sz="900" b="0" noProof="1">
                           <a:solidFill>
                             <a:schemeClr val="tx1"/>
                           </a:solidFill>
@@ -9835,7 +9960,7 @@
                         <a:buNone/>
                       </a:pPr>
                       <a:r>
-                        <a:rPr lang="es-ES_tradnl" sz="1100" dirty="0">
+                        <a:rPr lang="es-ES_tradnl" sz="900" dirty="0">
                           <a:effectLst/>
                           <a:latin typeface="Times New Roman" panose="02020603050405020304" pitchFamily="18" charset="0"/>
                           <a:ea typeface="Times New Roman" panose="02020603050405020304" pitchFamily="18" charset="0"/>
@@ -9858,7 +9983,7 @@
                         <a:buNone/>
                       </a:pPr>
                       <a:r>
-                        <a:rPr lang="es-ES_tradnl" sz="1100" dirty="0">
+                        <a:rPr lang="es-ES_tradnl" sz="900" dirty="0">
                           <a:effectLst/>
                           <a:latin typeface="Times New Roman" panose="02020603050405020304" pitchFamily="18" charset="0"/>
                           <a:ea typeface="Times New Roman" panose="02020603050405020304" pitchFamily="18" charset="0"/>
@@ -9881,7 +10006,7 @@
                         <a:buNone/>
                       </a:pPr>
                       <a:r>
-                        <a:rPr lang="es-ES_tradnl" sz="1100" dirty="0">
+                        <a:rPr lang="es-ES_tradnl" sz="900" dirty="0">
                           <a:effectLst/>
                           <a:latin typeface="Times New Roman" panose="02020603050405020304" pitchFamily="18" charset="0"/>
                           <a:ea typeface="Times New Roman" panose="02020603050405020304" pitchFamily="18" charset="0"/>
@@ -9904,7 +10029,7 @@
                         <a:buNone/>
                       </a:pPr>
                       <a:r>
-                        <a:rPr lang="es-ES_tradnl" sz="1100" dirty="0">
+                        <a:rPr lang="es-ES_tradnl" sz="900" dirty="0">
                           <a:effectLst/>
                           <a:latin typeface="Times New Roman" panose="02020603050405020304" pitchFamily="18" charset="0"/>
                           <a:ea typeface="Times New Roman" panose="02020603050405020304" pitchFamily="18" charset="0"/>
@@ -9927,7 +10052,7 @@
                         <a:buNone/>
                       </a:pPr>
                       <a:r>
-                        <a:rPr lang="es-ES_tradnl" sz="1100" dirty="0">
+                        <a:rPr lang="es-ES_tradnl" sz="900" dirty="0">
                           <a:effectLst/>
                           <a:latin typeface="Times New Roman" panose="02020603050405020304" pitchFamily="18" charset="0"/>
                           <a:ea typeface="Times New Roman" panose="02020603050405020304" pitchFamily="18" charset="0"/>
@@ -9950,7 +10075,7 @@
                         <a:buNone/>
                       </a:pPr>
                       <a:r>
-                        <a:rPr lang="es-ES_tradnl" sz="1100" dirty="0">
+                        <a:rPr lang="es-ES_tradnl" sz="900" dirty="0">
                           <a:effectLst/>
                           <a:latin typeface="Times New Roman" panose="02020603050405020304" pitchFamily="18" charset="0"/>
                           <a:ea typeface="Times New Roman" panose="02020603050405020304" pitchFamily="18" charset="0"/>
@@ -9973,7 +10098,7 @@
                         <a:buNone/>
                       </a:pPr>
                       <a:r>
-                        <a:rPr lang="es-ES_tradnl" sz="1100" dirty="0">
+                        <a:rPr lang="es-ES_tradnl" sz="900" dirty="0">
                           <a:effectLst/>
                           <a:latin typeface="Times New Roman" panose="02020603050405020304" pitchFamily="18" charset="0"/>
                           <a:ea typeface="Times New Roman" panose="02020603050405020304" pitchFamily="18" charset="0"/>
@@ -9996,7 +10121,7 @@
                         <a:buNone/>
                       </a:pPr>
                       <a:r>
-                        <a:rPr lang="es-ES_tradnl" sz="1100" dirty="0">
+                        <a:rPr lang="es-ES_tradnl" sz="900" dirty="0">
                           <a:effectLst/>
                           <a:latin typeface="Times New Roman" panose="02020603050405020304" pitchFamily="18" charset="0"/>
                           <a:ea typeface="Times New Roman" panose="02020603050405020304" pitchFamily="18" charset="0"/>
@@ -10019,7 +10144,7 @@
                         <a:buNone/>
                       </a:pPr>
                       <a:r>
-                        <a:rPr lang="es-ES_tradnl" sz="1100" dirty="0">
+                        <a:rPr lang="es-ES_tradnl" sz="900" dirty="0">
                           <a:effectLst/>
                           <a:latin typeface="Times New Roman" panose="02020603050405020304" pitchFamily="18" charset="0"/>
                           <a:ea typeface="Times New Roman" panose="02020603050405020304" pitchFamily="18" charset="0"/>
@@ -10042,7 +10167,7 @@
                         <a:buNone/>
                       </a:pPr>
                       <a:r>
-                        <a:rPr lang="es-ES_tradnl" sz="1100" dirty="0">
+                        <a:rPr lang="es-ES_tradnl" sz="900" dirty="0">
                           <a:effectLst/>
                           <a:latin typeface="Times New Roman" panose="02020603050405020304" pitchFamily="18" charset="0"/>
                           <a:ea typeface="Times New Roman" panose="02020603050405020304" pitchFamily="18" charset="0"/>
@@ -10065,99 +10190,123 @@
                         <a:buNone/>
                       </a:pPr>
                       <a:r>
-                        <a:rPr lang="es-ES_tradnl" sz="1100" dirty="0">
+                        <a:rPr lang="es-ES" sz="900">
                           <a:effectLst/>
                           <a:latin typeface="Times New Roman" panose="02020603050405020304" pitchFamily="18" charset="0"/>
                           <a:ea typeface="Times New Roman" panose="02020603050405020304" pitchFamily="18" charset="0"/>
                           <a:cs typeface="Times New Roman" panose="02020603050405020304" pitchFamily="18" charset="0"/>
                         </a:rPr>
-                        <a:t>2.62</a:t>
-                      </a:r>
-                    </a:p>
-                  </a:txBody>
-                  <a:tcPr marL="68580" marR="68580" marT="0" marB="0" anchor="ctr">
-                    <a:noFill/>
-                  </a:tcPr>
-                </a:tc>
-                <a:tc>
-                  <a:txBody>
-                    <a:bodyPr/>
-                    <a:lstStyle/>
-                    <a:p>
-                      <a:pPr algn="ctr">
-                        <a:buNone/>
-                      </a:pPr>
-                      <a:r>
-                        <a:rPr lang="es-ES_tradnl" sz="1100" dirty="0">
+                        <a:t>1.71</a:t>
+                      </a:r>
+                      <a:endParaRPr lang="de-DE" sz="900">
+                        <a:effectLst/>
+                        <a:latin typeface="Times New Roman" panose="02020603050405020304" pitchFamily="18" charset="0"/>
+                        <a:ea typeface="Times New Roman" panose="02020603050405020304" pitchFamily="18" charset="0"/>
+                        <a:cs typeface="Times New Roman" panose="02020603050405020304" pitchFamily="18" charset="0"/>
+                      </a:endParaRPr>
+                    </a:p>
+                  </a:txBody>
+                  <a:tcPr marL="68580" marR="68580" marT="0" marB="0">
+                    <a:noFill/>
+                  </a:tcPr>
+                </a:tc>
+                <a:tc>
+                  <a:txBody>
+                    <a:bodyPr/>
+                    <a:lstStyle/>
+                    <a:p>
+                      <a:pPr algn="ctr">
+                        <a:buNone/>
+                      </a:pPr>
+                      <a:r>
+                        <a:rPr lang="es-ES" sz="900">
                           <a:effectLst/>
                           <a:latin typeface="Times New Roman" panose="02020603050405020304" pitchFamily="18" charset="0"/>
                           <a:ea typeface="Times New Roman" panose="02020603050405020304" pitchFamily="18" charset="0"/>
                           <a:cs typeface="Times New Roman" panose="02020603050405020304" pitchFamily="18" charset="0"/>
                         </a:rPr>
-                        <a:t>32.88</a:t>
-                      </a:r>
-                    </a:p>
-                  </a:txBody>
-                  <a:tcPr marL="68580" marR="68580" marT="0" marB="0" anchor="ctr">
-                    <a:noFill/>
-                  </a:tcPr>
-                </a:tc>
-                <a:tc>
-                  <a:txBody>
-                    <a:bodyPr/>
-                    <a:lstStyle/>
-                    <a:p>
-                      <a:pPr algn="ctr">
-                        <a:buNone/>
-                      </a:pPr>
-                      <a:r>
-                        <a:rPr lang="es-ES_tradnl" sz="1100" dirty="0">
+                        <a:t>14.74</a:t>
+                      </a:r>
+                      <a:endParaRPr lang="de-DE" sz="900">
+                        <a:effectLst/>
+                        <a:latin typeface="Times New Roman" panose="02020603050405020304" pitchFamily="18" charset="0"/>
+                        <a:ea typeface="Times New Roman" panose="02020603050405020304" pitchFamily="18" charset="0"/>
+                        <a:cs typeface="Times New Roman" panose="02020603050405020304" pitchFamily="18" charset="0"/>
+                      </a:endParaRPr>
+                    </a:p>
+                  </a:txBody>
+                  <a:tcPr marL="68580" marR="68580" marT="0" marB="0">
+                    <a:noFill/>
+                  </a:tcPr>
+                </a:tc>
+                <a:tc>
+                  <a:txBody>
+                    <a:bodyPr/>
+                    <a:lstStyle/>
+                    <a:p>
+                      <a:pPr algn="ctr">
+                        <a:buNone/>
+                      </a:pPr>
+                      <a:r>
+                        <a:rPr lang="es-ES" sz="900">
                           <a:effectLst/>
                           <a:latin typeface="Times New Roman" panose="02020603050405020304" pitchFamily="18" charset="0"/>
                           <a:ea typeface="Times New Roman" panose="02020603050405020304" pitchFamily="18" charset="0"/>
                           <a:cs typeface="Times New Roman" panose="02020603050405020304" pitchFamily="18" charset="0"/>
                         </a:rPr>
-                        <a:t>4.17</a:t>
-                      </a:r>
-                    </a:p>
-                  </a:txBody>
-                  <a:tcPr marL="68580" marR="68580" marT="0" marB="0" anchor="ctr">
-                    <a:noFill/>
-                  </a:tcPr>
-                </a:tc>
-                <a:tc>
-                  <a:txBody>
-                    <a:bodyPr/>
-                    <a:lstStyle/>
-                    <a:p>
-                      <a:pPr algn="ctr">
-                        <a:buNone/>
-                      </a:pPr>
-                      <a:r>
-                        <a:rPr lang="es-ES_tradnl" sz="1100" dirty="0">
+                        <a:t>2.96</a:t>
+                      </a:r>
+                      <a:endParaRPr lang="de-DE" sz="900">
+                        <a:effectLst/>
+                        <a:latin typeface="Times New Roman" panose="02020603050405020304" pitchFamily="18" charset="0"/>
+                        <a:ea typeface="Times New Roman" panose="02020603050405020304" pitchFamily="18" charset="0"/>
+                        <a:cs typeface="Times New Roman" panose="02020603050405020304" pitchFamily="18" charset="0"/>
+                      </a:endParaRPr>
+                    </a:p>
+                  </a:txBody>
+                  <a:tcPr marL="68580" marR="68580" marT="0" marB="0">
+                    <a:noFill/>
+                  </a:tcPr>
+                </a:tc>
+                <a:tc>
+                  <a:txBody>
+                    <a:bodyPr/>
+                    <a:lstStyle/>
+                    <a:p>
+                      <a:pPr algn="ctr">
+                        <a:buNone/>
+                      </a:pPr>
+                      <a:r>
+                        <a:rPr lang="es-ES" sz="900">
                           <a:effectLst/>
                           <a:latin typeface="Times New Roman" panose="02020603050405020304" pitchFamily="18" charset="0"/>
                           <a:ea typeface="Times New Roman" panose="02020603050405020304" pitchFamily="18" charset="0"/>
                           <a:cs typeface="Times New Roman" panose="02020603050405020304" pitchFamily="18" charset="0"/>
                         </a:rPr>
-                        <a:t>56.27</a:t>
-                      </a:r>
-                    </a:p>
-                  </a:txBody>
-                  <a:tcPr marL="68580" marR="68580" marT="0" marB="0" anchor="ctr">
-                    <a:noFill/>
-                  </a:tcPr>
-                </a:tc>
-                <a:tc>
-                  <a:txBody>
-                    <a:bodyPr/>
-                    <a:lstStyle/>
-                    <a:p>
-                      <a:pPr algn="ctr">
-                        <a:buNone/>
-                      </a:pPr>
-                      <a:r>
-                        <a:rPr lang="es-ES_tradnl" sz="1100" dirty="0">
+                        <a:t>30.61</a:t>
+                      </a:r>
+                      <a:endParaRPr lang="de-DE" sz="900">
+                        <a:effectLst/>
+                        <a:latin typeface="Times New Roman" panose="02020603050405020304" pitchFamily="18" charset="0"/>
+                        <a:ea typeface="Times New Roman" panose="02020603050405020304" pitchFamily="18" charset="0"/>
+                        <a:cs typeface="Times New Roman" panose="02020603050405020304" pitchFamily="18" charset="0"/>
+                      </a:endParaRPr>
+                    </a:p>
+                  </a:txBody>
+                  <a:tcPr marL="68580" marR="68580" marT="0" marB="0">
+                    <a:noFill/>
+                  </a:tcPr>
+                </a:tc>
+                <a:tc>
+                  <a:txBody>
+                    <a:bodyPr/>
+                    <a:lstStyle/>
+                    <a:p>
+                      <a:pPr algn="ctr">
+                        <a:buNone/>
+                      </a:pPr>
+                      <a:r>
+                        <a:rPr lang="es-ES" sz="900">
                           <a:effectLst/>
                           <a:latin typeface="Times New Roman" panose="02020603050405020304" pitchFamily="18" charset="0"/>
                           <a:ea typeface="Times New Roman" panose="02020603050405020304" pitchFamily="18" charset="0"/>
@@ -10165,9 +10314,15 @@
                         </a:rPr>
                         <a:t>NaN</a:t>
                       </a:r>
-                    </a:p>
-                  </a:txBody>
-                  <a:tcPr marL="68580" marR="68580" marT="0" marB="0" anchor="ctr">
+                      <a:endParaRPr lang="de-DE" sz="900">
+                        <a:effectLst/>
+                        <a:latin typeface="Times New Roman" panose="02020603050405020304" pitchFamily="18" charset="0"/>
+                        <a:ea typeface="Times New Roman" panose="02020603050405020304" pitchFamily="18" charset="0"/>
+                        <a:cs typeface="Times New Roman" panose="02020603050405020304" pitchFamily="18" charset="0"/>
+                      </a:endParaRPr>
+                    </a:p>
+                  </a:txBody>
+                  <a:tcPr marL="68580" marR="68580" marT="0" marB="0">
                     <a:noFill/>
                   </a:tcPr>
                 </a:tc>
@@ -10187,7 +10342,7 @@
                         <a:buNone/>
                       </a:pPr>
                       <a:r>
-                        <a:rPr lang="es-ES_tradnl" sz="1000" b="0" noProof="1">
+                        <a:rPr lang="es-ES_tradnl" sz="900" b="0" noProof="1">
                           <a:solidFill>
                             <a:schemeClr val="tx1"/>
                           </a:solidFill>
@@ -10213,7 +10368,7 @@
                         <a:buNone/>
                       </a:pPr>
                       <a:r>
-                        <a:rPr lang="es-ES_tradnl" sz="1100" dirty="0">
+                        <a:rPr lang="es-ES_tradnl" sz="900" dirty="0">
                           <a:effectLst/>
                           <a:latin typeface="Times New Roman" panose="02020603050405020304" pitchFamily="18" charset="0"/>
                           <a:ea typeface="Times New Roman" panose="02020603050405020304" pitchFamily="18" charset="0"/>
@@ -10236,7 +10391,7 @@
                         <a:buNone/>
                       </a:pPr>
                       <a:r>
-                        <a:rPr lang="es-ES_tradnl" sz="1100" dirty="0">
+                        <a:rPr lang="es-ES_tradnl" sz="900" dirty="0">
                           <a:effectLst/>
                           <a:latin typeface="Times New Roman" panose="02020603050405020304" pitchFamily="18" charset="0"/>
                           <a:ea typeface="Times New Roman" panose="02020603050405020304" pitchFamily="18" charset="0"/>
@@ -10259,7 +10414,7 @@
                         <a:buNone/>
                       </a:pPr>
                       <a:r>
-                        <a:rPr lang="es-ES_tradnl" sz="1100" dirty="0">
+                        <a:rPr lang="es-ES_tradnl" sz="900" dirty="0">
                           <a:effectLst/>
                           <a:latin typeface="Times New Roman" panose="02020603050405020304" pitchFamily="18" charset="0"/>
                           <a:ea typeface="Times New Roman" panose="02020603050405020304" pitchFamily="18" charset="0"/>
@@ -10282,7 +10437,7 @@
                         <a:buNone/>
                       </a:pPr>
                       <a:r>
-                        <a:rPr lang="es-ES_tradnl" sz="1100" dirty="0">
+                        <a:rPr lang="es-ES_tradnl" sz="900" dirty="0">
                           <a:effectLst/>
                           <a:latin typeface="Times New Roman" panose="02020603050405020304" pitchFamily="18" charset="0"/>
                           <a:ea typeface="Times New Roman" panose="02020603050405020304" pitchFamily="18" charset="0"/>
@@ -10305,7 +10460,7 @@
                         <a:buNone/>
                       </a:pPr>
                       <a:r>
-                        <a:rPr lang="es-ES_tradnl" sz="1100" dirty="0">
+                        <a:rPr lang="es-ES_tradnl" sz="900" dirty="0">
                           <a:effectLst/>
                           <a:latin typeface="Times New Roman" panose="02020603050405020304" pitchFamily="18" charset="0"/>
                           <a:ea typeface="Times New Roman" panose="02020603050405020304" pitchFamily="18" charset="0"/>
@@ -10328,7 +10483,7 @@
                         <a:buNone/>
                       </a:pPr>
                       <a:r>
-                        <a:rPr lang="es-ES_tradnl" sz="1100" dirty="0">
+                        <a:rPr lang="es-ES_tradnl" sz="900" dirty="0">
                           <a:effectLst/>
                           <a:latin typeface="Times New Roman" panose="02020603050405020304" pitchFamily="18" charset="0"/>
                           <a:ea typeface="Times New Roman" panose="02020603050405020304" pitchFamily="18" charset="0"/>
@@ -10351,7 +10506,7 @@
                         <a:buNone/>
                       </a:pPr>
                       <a:r>
-                        <a:rPr lang="es-ES_tradnl" sz="1100" dirty="0">
+                        <a:rPr lang="es-ES_tradnl" sz="900" dirty="0">
                           <a:effectLst/>
                           <a:latin typeface="Times New Roman" panose="02020603050405020304" pitchFamily="18" charset="0"/>
                           <a:ea typeface="Times New Roman" panose="02020603050405020304" pitchFamily="18" charset="0"/>
@@ -10374,7 +10529,7 @@
                         <a:buNone/>
                       </a:pPr>
                       <a:r>
-                        <a:rPr lang="es-ES_tradnl" sz="1100" dirty="0">
+                        <a:rPr lang="es-ES_tradnl" sz="900" dirty="0">
                           <a:effectLst/>
                           <a:latin typeface="Times New Roman" panose="02020603050405020304" pitchFamily="18" charset="0"/>
                           <a:ea typeface="Times New Roman" panose="02020603050405020304" pitchFamily="18" charset="0"/>
@@ -10397,7 +10552,7 @@
                         <a:buNone/>
                       </a:pPr>
                       <a:r>
-                        <a:rPr lang="es-ES_tradnl" sz="1100" dirty="0">
+                        <a:rPr lang="es-ES_tradnl" sz="900" dirty="0">
                           <a:effectLst/>
                           <a:latin typeface="Times New Roman" panose="02020603050405020304" pitchFamily="18" charset="0"/>
                           <a:ea typeface="Times New Roman" panose="02020603050405020304" pitchFamily="18" charset="0"/>
@@ -10420,7 +10575,7 @@
                         <a:buNone/>
                       </a:pPr>
                       <a:r>
-                        <a:rPr lang="es-ES_tradnl" sz="1100" dirty="0">
+                        <a:rPr lang="es-ES_tradnl" sz="900" dirty="0">
                           <a:effectLst/>
                           <a:latin typeface="Times New Roman" panose="02020603050405020304" pitchFamily="18" charset="0"/>
                           <a:ea typeface="Times New Roman" panose="02020603050405020304" pitchFamily="18" charset="0"/>
@@ -10443,99 +10598,123 @@
                         <a:buNone/>
                       </a:pPr>
                       <a:r>
-                        <a:rPr lang="es-ES_tradnl" sz="1100" dirty="0">
+                        <a:rPr lang="es-ES" sz="900">
                           <a:effectLst/>
                           <a:latin typeface="Times New Roman" panose="02020603050405020304" pitchFamily="18" charset="0"/>
                           <a:ea typeface="Times New Roman" panose="02020603050405020304" pitchFamily="18" charset="0"/>
                           <a:cs typeface="Times New Roman" panose="02020603050405020304" pitchFamily="18" charset="0"/>
                         </a:rPr>
-                        <a:t>2.79</a:t>
-                      </a:r>
-                    </a:p>
-                  </a:txBody>
-                  <a:tcPr marL="68580" marR="68580" marT="0" marB="0" anchor="ctr">
-                    <a:noFill/>
-                  </a:tcPr>
-                </a:tc>
-                <a:tc>
-                  <a:txBody>
-                    <a:bodyPr/>
-                    <a:lstStyle/>
-                    <a:p>
-                      <a:pPr algn="ctr">
-                        <a:buNone/>
-                      </a:pPr>
-                      <a:r>
-                        <a:rPr lang="es-ES_tradnl" sz="1100" dirty="0">
+                        <a:t>1.77</a:t>
+                      </a:r>
+                      <a:endParaRPr lang="de-DE" sz="900">
+                        <a:effectLst/>
+                        <a:latin typeface="Times New Roman" panose="02020603050405020304" pitchFamily="18" charset="0"/>
+                        <a:ea typeface="Times New Roman" panose="02020603050405020304" pitchFamily="18" charset="0"/>
+                        <a:cs typeface="Times New Roman" panose="02020603050405020304" pitchFamily="18" charset="0"/>
+                      </a:endParaRPr>
+                    </a:p>
+                  </a:txBody>
+                  <a:tcPr marL="68580" marR="68580" marT="0" marB="0">
+                    <a:noFill/>
+                  </a:tcPr>
+                </a:tc>
+                <a:tc>
+                  <a:txBody>
+                    <a:bodyPr/>
+                    <a:lstStyle/>
+                    <a:p>
+                      <a:pPr algn="ctr">
+                        <a:buNone/>
+                      </a:pPr>
+                      <a:r>
+                        <a:rPr lang="es-ES" sz="900">
                           <a:effectLst/>
                           <a:latin typeface="Times New Roman" panose="02020603050405020304" pitchFamily="18" charset="0"/>
                           <a:ea typeface="Times New Roman" panose="02020603050405020304" pitchFamily="18" charset="0"/>
                           <a:cs typeface="Times New Roman" panose="02020603050405020304" pitchFamily="18" charset="0"/>
                         </a:rPr>
-                        <a:t>38.56</a:t>
-                      </a:r>
-                    </a:p>
-                  </a:txBody>
-                  <a:tcPr marL="68580" marR="68580" marT="0" marB="0" anchor="ctr">
-                    <a:noFill/>
-                  </a:tcPr>
-                </a:tc>
-                <a:tc>
-                  <a:txBody>
-                    <a:bodyPr/>
-                    <a:lstStyle/>
-                    <a:p>
-                      <a:pPr algn="ctr">
-                        <a:buNone/>
-                      </a:pPr>
-                      <a:r>
-                        <a:rPr lang="es-ES_tradnl" sz="1100" dirty="0">
+                        <a:t>16.05</a:t>
+                      </a:r>
+                      <a:endParaRPr lang="de-DE" sz="900">
+                        <a:effectLst/>
+                        <a:latin typeface="Times New Roman" panose="02020603050405020304" pitchFamily="18" charset="0"/>
+                        <a:ea typeface="Times New Roman" panose="02020603050405020304" pitchFamily="18" charset="0"/>
+                        <a:cs typeface="Times New Roman" panose="02020603050405020304" pitchFamily="18" charset="0"/>
+                      </a:endParaRPr>
+                    </a:p>
+                  </a:txBody>
+                  <a:tcPr marL="68580" marR="68580" marT="0" marB="0">
+                    <a:noFill/>
+                  </a:tcPr>
+                </a:tc>
+                <a:tc>
+                  <a:txBody>
+                    <a:bodyPr/>
+                    <a:lstStyle/>
+                    <a:p>
+                      <a:pPr algn="ctr">
+                        <a:buNone/>
+                      </a:pPr>
+                      <a:r>
+                        <a:rPr lang="es-ES" sz="900">
                           <a:effectLst/>
                           <a:latin typeface="Times New Roman" panose="02020603050405020304" pitchFamily="18" charset="0"/>
                           <a:ea typeface="Times New Roman" panose="02020603050405020304" pitchFamily="18" charset="0"/>
                           <a:cs typeface="Times New Roman" panose="02020603050405020304" pitchFamily="18" charset="0"/>
                         </a:rPr>
-                        <a:t>4.90</a:t>
-                      </a:r>
-                    </a:p>
-                  </a:txBody>
-                  <a:tcPr marL="68580" marR="68580" marT="0" marB="0" anchor="ctr">
-                    <a:noFill/>
-                  </a:tcPr>
-                </a:tc>
-                <a:tc>
-                  <a:txBody>
-                    <a:bodyPr/>
-                    <a:lstStyle/>
-                    <a:p>
-                      <a:pPr algn="ctr">
-                        <a:buNone/>
-                      </a:pPr>
-                      <a:r>
-                        <a:rPr lang="es-ES_tradnl" sz="1100" dirty="0">
+                        <a:t>3.27</a:t>
+                      </a:r>
+                      <a:endParaRPr lang="de-DE" sz="900">
+                        <a:effectLst/>
+                        <a:latin typeface="Times New Roman" panose="02020603050405020304" pitchFamily="18" charset="0"/>
+                        <a:ea typeface="Times New Roman" panose="02020603050405020304" pitchFamily="18" charset="0"/>
+                        <a:cs typeface="Times New Roman" panose="02020603050405020304" pitchFamily="18" charset="0"/>
+                      </a:endParaRPr>
+                    </a:p>
+                  </a:txBody>
+                  <a:tcPr marL="68580" marR="68580" marT="0" marB="0">
+                    <a:noFill/>
+                  </a:tcPr>
+                </a:tc>
+                <a:tc>
+                  <a:txBody>
+                    <a:bodyPr/>
+                    <a:lstStyle/>
+                    <a:p>
+                      <a:pPr algn="ctr">
+                        <a:buNone/>
+                      </a:pPr>
+                      <a:r>
+                        <a:rPr lang="es-ES" sz="900">
                           <a:effectLst/>
                           <a:latin typeface="Times New Roman" panose="02020603050405020304" pitchFamily="18" charset="0"/>
                           <a:ea typeface="Times New Roman" panose="02020603050405020304" pitchFamily="18" charset="0"/>
                           <a:cs typeface="Times New Roman" panose="02020603050405020304" pitchFamily="18" charset="0"/>
                         </a:rPr>
-                        <a:t>66.63</a:t>
-                      </a:r>
-                    </a:p>
-                  </a:txBody>
-                  <a:tcPr marL="68580" marR="68580" marT="0" marB="0" anchor="ctr">
-                    <a:noFill/>
-                  </a:tcPr>
-                </a:tc>
-                <a:tc>
-                  <a:txBody>
-                    <a:bodyPr/>
-                    <a:lstStyle/>
-                    <a:p>
-                      <a:pPr algn="ctr">
-                        <a:buNone/>
-                      </a:pPr>
-                      <a:r>
-                        <a:rPr lang="es-ES_tradnl" sz="1100" dirty="0">
+                        <a:t>38.18</a:t>
+                      </a:r>
+                      <a:endParaRPr lang="de-DE" sz="900">
+                        <a:effectLst/>
+                        <a:latin typeface="Times New Roman" panose="02020603050405020304" pitchFamily="18" charset="0"/>
+                        <a:ea typeface="Times New Roman" panose="02020603050405020304" pitchFamily="18" charset="0"/>
+                        <a:cs typeface="Times New Roman" panose="02020603050405020304" pitchFamily="18" charset="0"/>
+                      </a:endParaRPr>
+                    </a:p>
+                  </a:txBody>
+                  <a:tcPr marL="68580" marR="68580" marT="0" marB="0">
+                    <a:noFill/>
+                  </a:tcPr>
+                </a:tc>
+                <a:tc>
+                  <a:txBody>
+                    <a:bodyPr/>
+                    <a:lstStyle/>
+                    <a:p>
+                      <a:pPr algn="ctr">
+                        <a:buNone/>
+                      </a:pPr>
+                      <a:r>
+                        <a:rPr lang="es-ES" sz="900" dirty="0">
                           <a:effectLst/>
                           <a:latin typeface="Times New Roman" panose="02020603050405020304" pitchFamily="18" charset="0"/>
                           <a:ea typeface="Times New Roman" panose="02020603050405020304" pitchFamily="18" charset="0"/>
@@ -10543,9 +10722,15 @@
                         </a:rPr>
                         <a:t>NaN</a:t>
                       </a:r>
-                    </a:p>
-                  </a:txBody>
-                  <a:tcPr marL="68580" marR="68580" marT="0" marB="0" anchor="ctr">
+                      <a:endParaRPr lang="de-DE" sz="900" dirty="0">
+                        <a:effectLst/>
+                        <a:latin typeface="Times New Roman" panose="02020603050405020304" pitchFamily="18" charset="0"/>
+                        <a:ea typeface="Times New Roman" panose="02020603050405020304" pitchFamily="18" charset="0"/>
+                        <a:cs typeface="Times New Roman" panose="02020603050405020304" pitchFamily="18" charset="0"/>
+                      </a:endParaRPr>
+                    </a:p>
+                  </a:txBody>
+                  <a:tcPr marL="68580" marR="68580" marT="0" marB="0">
                     <a:noFill/>
                   </a:tcPr>
                 </a:tc>
@@ -10564,7 +10749,7 @@
                       <a:pPr algn="ctr">
                         <a:buNone/>
                       </a:pPr>
-                      <a:endParaRPr lang="es-ES_tradnl" sz="1000" b="0" noProof="1">
+                      <a:endParaRPr lang="es-ES_tradnl" sz="900" b="0" noProof="1">
                         <a:solidFill>
                           <a:schemeClr val="tx1"/>
                         </a:solidFill>
@@ -10587,7 +10772,7 @@
                       <a:pPr algn="ctr">
                         <a:buNone/>
                       </a:pPr>
-                      <a:endParaRPr lang="es-ES_tradnl" sz="1000" dirty="0">
+                      <a:endParaRPr lang="es-ES_tradnl" sz="900" dirty="0">
                         <a:effectLst/>
                         <a:latin typeface="Times New Roman" panose="02020603050405020304" pitchFamily="18" charset="0"/>
                         <a:ea typeface="Times New Roman" panose="02020603050405020304" pitchFamily="18" charset="0"/>
@@ -10607,7 +10792,7 @@
                       <a:pPr algn="ctr">
                         <a:buNone/>
                       </a:pPr>
-                      <a:endParaRPr lang="es-ES_tradnl" sz="1000" dirty="0">
+                      <a:endParaRPr lang="es-ES_tradnl" sz="900" dirty="0">
                         <a:effectLst/>
                         <a:latin typeface="Times New Roman" panose="02020603050405020304" pitchFamily="18" charset="0"/>
                         <a:ea typeface="Times New Roman" panose="02020603050405020304" pitchFamily="18" charset="0"/>
@@ -10627,7 +10812,7 @@
                       <a:pPr algn="ctr">
                         <a:buNone/>
                       </a:pPr>
-                      <a:endParaRPr lang="es-ES_tradnl" sz="1000" dirty="0">
+                      <a:endParaRPr lang="es-ES_tradnl" sz="900" dirty="0">
                         <a:effectLst/>
                         <a:latin typeface="Times New Roman" panose="02020603050405020304" pitchFamily="18" charset="0"/>
                         <a:ea typeface="Times New Roman" panose="02020603050405020304" pitchFamily="18" charset="0"/>
@@ -10647,7 +10832,7 @@
                       <a:pPr algn="ctr">
                         <a:buNone/>
                       </a:pPr>
-                      <a:endParaRPr lang="es-ES_tradnl" sz="1000" dirty="0">
+                      <a:endParaRPr lang="es-ES_tradnl" sz="900" dirty="0">
                         <a:effectLst/>
                         <a:latin typeface="Times New Roman" panose="02020603050405020304" pitchFamily="18" charset="0"/>
                         <a:ea typeface="Times New Roman" panose="02020603050405020304" pitchFamily="18" charset="0"/>
@@ -10667,7 +10852,7 @@
                       <a:pPr algn="ctr">
                         <a:buNone/>
                       </a:pPr>
-                      <a:endParaRPr lang="es-ES_tradnl" sz="1000" dirty="0">
+                      <a:endParaRPr lang="es-ES_tradnl" sz="900" dirty="0">
                         <a:effectLst/>
                         <a:latin typeface="Times New Roman" panose="02020603050405020304" pitchFamily="18" charset="0"/>
                         <a:ea typeface="Times New Roman" panose="02020603050405020304" pitchFamily="18" charset="0"/>
@@ -10687,7 +10872,7 @@
                       <a:pPr algn="ctr">
                         <a:buNone/>
                       </a:pPr>
-                      <a:endParaRPr lang="es-ES_tradnl" sz="1000" dirty="0">
+                      <a:endParaRPr lang="es-ES_tradnl" sz="900" dirty="0">
                         <a:effectLst/>
                         <a:latin typeface="Times New Roman" panose="02020603050405020304" pitchFamily="18" charset="0"/>
                         <a:ea typeface="Times New Roman" panose="02020603050405020304" pitchFamily="18" charset="0"/>
@@ -10707,7 +10892,7 @@
                       <a:pPr algn="ctr">
                         <a:buNone/>
                       </a:pPr>
-                      <a:endParaRPr lang="es-ES_tradnl" sz="1000" dirty="0">
+                      <a:endParaRPr lang="es-ES_tradnl" sz="900" dirty="0">
                         <a:effectLst/>
                         <a:latin typeface="Times New Roman" panose="02020603050405020304" pitchFamily="18" charset="0"/>
                         <a:ea typeface="Times New Roman" panose="02020603050405020304" pitchFamily="18" charset="0"/>
@@ -10727,7 +10912,7 @@
                       <a:pPr algn="ctr">
                         <a:buNone/>
                       </a:pPr>
-                      <a:endParaRPr lang="es-ES_tradnl" sz="1000" dirty="0">
+                      <a:endParaRPr lang="es-ES_tradnl" sz="900" dirty="0">
                         <a:effectLst/>
                         <a:latin typeface="Times New Roman" panose="02020603050405020304" pitchFamily="18" charset="0"/>
                         <a:ea typeface="Times New Roman" panose="02020603050405020304" pitchFamily="18" charset="0"/>
@@ -10747,7 +10932,7 @@
                       <a:pPr algn="ctr">
                         <a:buNone/>
                       </a:pPr>
-                      <a:endParaRPr lang="es-ES_tradnl" sz="1000" dirty="0">
+                      <a:endParaRPr lang="es-ES_tradnl" sz="900" dirty="0">
                         <a:effectLst/>
                         <a:latin typeface="Times New Roman" panose="02020603050405020304" pitchFamily="18" charset="0"/>
                         <a:ea typeface="Times New Roman" panose="02020603050405020304" pitchFamily="18" charset="0"/>
@@ -10767,7 +10952,7 @@
                       <a:pPr algn="ctr">
                         <a:buNone/>
                       </a:pPr>
-                      <a:endParaRPr lang="es-ES_tradnl" sz="1000" dirty="0">
+                      <a:endParaRPr lang="es-ES_tradnl" sz="900" dirty="0">
                         <a:effectLst/>
                         <a:latin typeface="Times New Roman" panose="02020603050405020304" pitchFamily="18" charset="0"/>
                         <a:ea typeface="Times New Roman" panose="02020603050405020304" pitchFamily="18" charset="0"/>
@@ -10787,7 +10972,7 @@
                       <a:pPr algn="ctr">
                         <a:buNone/>
                       </a:pPr>
-                      <a:endParaRPr lang="es-ES_tradnl" sz="1000" dirty="0">
+                      <a:endParaRPr lang="es-ES_tradnl" sz="900" dirty="0">
                         <a:effectLst/>
                         <a:latin typeface="Times New Roman" panose="02020603050405020304" pitchFamily="18" charset="0"/>
                         <a:ea typeface="Times New Roman" panose="02020603050405020304" pitchFamily="18" charset="0"/>
@@ -10807,7 +10992,7 @@
                       <a:pPr algn="ctr">
                         <a:buNone/>
                       </a:pPr>
-                      <a:endParaRPr lang="es-ES_tradnl" sz="1000" dirty="0">
+                      <a:endParaRPr lang="es-ES_tradnl" sz="900" dirty="0">
                         <a:effectLst/>
                         <a:latin typeface="Times New Roman" panose="02020603050405020304" pitchFamily="18" charset="0"/>
                         <a:ea typeface="Times New Roman" panose="02020603050405020304" pitchFamily="18" charset="0"/>
@@ -10827,7 +11012,7 @@
                       <a:pPr algn="ctr">
                         <a:buNone/>
                       </a:pPr>
-                      <a:endParaRPr lang="es-ES_tradnl" sz="1000" dirty="0">
+                      <a:endParaRPr lang="es-ES_tradnl" sz="900" dirty="0">
                         <a:effectLst/>
                         <a:latin typeface="Times New Roman" panose="02020603050405020304" pitchFamily="18" charset="0"/>
                         <a:ea typeface="Times New Roman" panose="02020603050405020304" pitchFamily="18" charset="0"/>
@@ -10847,7 +11032,7 @@
                       <a:pPr algn="ctr">
                         <a:buNone/>
                       </a:pPr>
-                      <a:endParaRPr lang="es-ES_tradnl" sz="1000" dirty="0">
+                      <a:endParaRPr lang="es-ES_tradnl" sz="900" dirty="0">
                         <a:effectLst/>
                         <a:latin typeface="Times New Roman" panose="02020603050405020304" pitchFamily="18" charset="0"/>
                         <a:ea typeface="Times New Roman" panose="02020603050405020304" pitchFamily="18" charset="0"/>
@@ -10867,7 +11052,7 @@
                       <a:pPr algn="ctr">
                         <a:buNone/>
                       </a:pPr>
-                      <a:endParaRPr lang="es-ES_tradnl" sz="1000" dirty="0">
+                      <a:endParaRPr lang="es-ES_tradnl" sz="900" dirty="0">
                         <a:effectLst/>
                         <a:latin typeface="Times New Roman" panose="02020603050405020304" pitchFamily="18" charset="0"/>
                         <a:ea typeface="Times New Roman" panose="02020603050405020304" pitchFamily="18" charset="0"/>
@@ -10894,7 +11079,7 @@
                       <a:pPr algn="ctr">
                         <a:buNone/>
                       </a:pPr>
-                      <a:endParaRPr lang="es-ES_tradnl" sz="1000" b="0" noProof="1">
+                      <a:endParaRPr lang="es-ES_tradnl" sz="900" b="0" noProof="1">
                         <a:solidFill>
                           <a:schemeClr val="tx1"/>
                         </a:solidFill>
@@ -10926,7 +11111,7 @@
                       <a:pPr algn="ctr">
                         <a:buNone/>
                       </a:pPr>
-                      <a:endParaRPr lang="es-ES_tradnl" sz="1000" dirty="0">
+                      <a:endParaRPr lang="es-ES_tradnl" sz="900" dirty="0">
                         <a:effectLst/>
                         <a:latin typeface="Times New Roman" panose="02020603050405020304" pitchFamily="18" charset="0"/>
                         <a:ea typeface="Times New Roman" panose="02020603050405020304" pitchFamily="18" charset="0"/>
@@ -10955,7 +11140,7 @@
                       <a:pPr algn="ctr">
                         <a:buNone/>
                       </a:pPr>
-                      <a:endParaRPr lang="es-ES_tradnl" sz="1000" dirty="0">
+                      <a:endParaRPr lang="es-ES_tradnl" sz="900" dirty="0">
                         <a:effectLst/>
                         <a:latin typeface="Times New Roman" panose="02020603050405020304" pitchFamily="18" charset="0"/>
                         <a:ea typeface="Times New Roman" panose="02020603050405020304" pitchFamily="18" charset="0"/>
@@ -10984,7 +11169,7 @@
                       <a:pPr algn="ctr">
                         <a:buNone/>
                       </a:pPr>
-                      <a:endParaRPr lang="es-ES_tradnl" sz="1000" dirty="0">
+                      <a:endParaRPr lang="es-ES_tradnl" sz="900" dirty="0">
                         <a:effectLst/>
                         <a:latin typeface="Times New Roman" panose="02020603050405020304" pitchFamily="18" charset="0"/>
                         <a:ea typeface="Times New Roman" panose="02020603050405020304" pitchFamily="18" charset="0"/>
@@ -11013,7 +11198,7 @@
                       <a:pPr algn="ctr">
                         <a:buNone/>
                       </a:pPr>
-                      <a:endParaRPr lang="es-ES_tradnl" sz="1000" dirty="0">
+                      <a:endParaRPr lang="es-ES_tradnl" sz="900" dirty="0">
                         <a:effectLst/>
                         <a:latin typeface="Times New Roman" panose="02020603050405020304" pitchFamily="18" charset="0"/>
                         <a:ea typeface="Times New Roman" panose="02020603050405020304" pitchFamily="18" charset="0"/>
@@ -11042,7 +11227,7 @@
                       <a:pPr algn="ctr">
                         <a:buNone/>
                       </a:pPr>
-                      <a:endParaRPr lang="es-ES_tradnl" sz="1000" dirty="0">
+                      <a:endParaRPr lang="es-ES_tradnl" sz="900" dirty="0">
                         <a:effectLst/>
                         <a:latin typeface="Times New Roman" panose="02020603050405020304" pitchFamily="18" charset="0"/>
                         <a:ea typeface="Times New Roman" panose="02020603050405020304" pitchFamily="18" charset="0"/>
@@ -11071,7 +11256,7 @@
                       <a:pPr algn="ctr">
                         <a:buNone/>
                       </a:pPr>
-                      <a:endParaRPr lang="es-ES_tradnl" sz="1000" dirty="0">
+                      <a:endParaRPr lang="es-ES_tradnl" sz="900" dirty="0">
                         <a:effectLst/>
                         <a:latin typeface="Times New Roman" panose="02020603050405020304" pitchFamily="18" charset="0"/>
                         <a:ea typeface="Times New Roman" panose="02020603050405020304" pitchFamily="18" charset="0"/>
@@ -11100,7 +11285,7 @@
                       <a:pPr algn="ctr">
                         <a:buNone/>
                       </a:pPr>
-                      <a:endParaRPr lang="es-ES_tradnl" sz="1000" dirty="0">
+                      <a:endParaRPr lang="es-ES_tradnl" sz="900" dirty="0">
                         <a:effectLst/>
                         <a:latin typeface="Times New Roman" panose="02020603050405020304" pitchFamily="18" charset="0"/>
                         <a:ea typeface="Times New Roman" panose="02020603050405020304" pitchFamily="18" charset="0"/>
@@ -11129,7 +11314,7 @@
                       <a:pPr algn="ctr">
                         <a:buNone/>
                       </a:pPr>
-                      <a:endParaRPr lang="es-ES_tradnl" sz="1000" dirty="0">
+                      <a:endParaRPr lang="es-ES_tradnl" sz="900" dirty="0">
                         <a:effectLst/>
                         <a:latin typeface="Times New Roman" panose="02020603050405020304" pitchFamily="18" charset="0"/>
                         <a:ea typeface="Times New Roman" panose="02020603050405020304" pitchFamily="18" charset="0"/>
@@ -11158,7 +11343,7 @@
                       <a:pPr algn="ctr">
                         <a:buNone/>
                       </a:pPr>
-                      <a:endParaRPr lang="es-ES_tradnl" sz="1000" dirty="0">
+                      <a:endParaRPr lang="es-ES_tradnl" sz="900" dirty="0">
                         <a:effectLst/>
                         <a:latin typeface="Times New Roman" panose="02020603050405020304" pitchFamily="18" charset="0"/>
                         <a:ea typeface="Times New Roman" panose="02020603050405020304" pitchFamily="18" charset="0"/>
@@ -11187,7 +11372,7 @@
                       <a:pPr algn="ctr">
                         <a:buNone/>
                       </a:pPr>
-                      <a:endParaRPr lang="es-ES_tradnl" sz="1000" dirty="0">
+                      <a:endParaRPr lang="es-ES_tradnl" sz="900" dirty="0">
                         <a:effectLst/>
                         <a:latin typeface="Times New Roman" panose="02020603050405020304" pitchFamily="18" charset="0"/>
                         <a:ea typeface="Times New Roman" panose="02020603050405020304" pitchFamily="18" charset="0"/>
@@ -11216,7 +11401,7 @@
                       <a:pPr algn="ctr">
                         <a:buNone/>
                       </a:pPr>
-                      <a:endParaRPr lang="es-ES_tradnl" sz="1000" dirty="0">
+                      <a:endParaRPr lang="es-ES_tradnl" sz="900" dirty="0">
                         <a:effectLst/>
                         <a:latin typeface="Times New Roman" panose="02020603050405020304" pitchFamily="18" charset="0"/>
                         <a:ea typeface="Times New Roman" panose="02020603050405020304" pitchFamily="18" charset="0"/>
@@ -11245,7 +11430,7 @@
                       <a:pPr algn="ctr">
                         <a:buNone/>
                       </a:pPr>
-                      <a:endParaRPr lang="es-ES_tradnl" sz="1000" dirty="0">
+                      <a:endParaRPr lang="es-ES_tradnl" sz="900" dirty="0">
                         <a:effectLst/>
                         <a:latin typeface="Times New Roman" panose="02020603050405020304" pitchFamily="18" charset="0"/>
                         <a:ea typeface="Times New Roman" panose="02020603050405020304" pitchFamily="18" charset="0"/>
@@ -11274,7 +11459,7 @@
                       <a:pPr algn="ctr">
                         <a:buNone/>
                       </a:pPr>
-                      <a:endParaRPr lang="es-ES_tradnl" sz="1000" dirty="0">
+                      <a:endParaRPr lang="es-ES_tradnl" sz="900" dirty="0">
                         <a:effectLst/>
                         <a:latin typeface="Times New Roman" panose="02020603050405020304" pitchFamily="18" charset="0"/>
                         <a:ea typeface="Times New Roman" panose="02020603050405020304" pitchFamily="18" charset="0"/>
@@ -11303,7 +11488,7 @@
                       <a:pPr algn="ctr">
                         <a:buNone/>
                       </a:pPr>
-                      <a:endParaRPr lang="es-ES_tradnl" sz="1000" dirty="0">
+                      <a:endParaRPr lang="es-ES_tradnl" sz="900" dirty="0">
                         <a:effectLst/>
                         <a:latin typeface="Times New Roman" panose="02020603050405020304" pitchFamily="18" charset="0"/>
                         <a:ea typeface="Times New Roman" panose="02020603050405020304" pitchFamily="18" charset="0"/>
@@ -11332,7 +11517,7 @@
                       <a:pPr algn="ctr">
                         <a:buNone/>
                       </a:pPr>
-                      <a:endParaRPr lang="es-ES_tradnl" sz="1000" dirty="0">
+                      <a:endParaRPr lang="es-ES_tradnl" sz="900" dirty="0">
                         <a:effectLst/>
                         <a:latin typeface="Times New Roman" panose="02020603050405020304" pitchFamily="18" charset="0"/>
                         <a:ea typeface="Times New Roman" panose="02020603050405020304" pitchFamily="18" charset="0"/>
@@ -11741,38 +11926,6 @@
           </a:p>
         </p:txBody>
       </p:sp>
-      <p:pic>
-        <p:nvPicPr>
-          <p:cNvPr id="6" name="Onlinebild-Platzhalter 5">
-            <a:extLst>
-              <a:ext uri="{FF2B5EF4-FFF2-40B4-BE49-F238E27FC236}">
-                <a16:creationId xmlns:a16="http://schemas.microsoft.com/office/drawing/2014/main" id="{EB327E8A-EAAC-6087-151B-E0C31D8530CE}"/>
-              </a:ext>
-            </a:extLst>
-          </p:cNvPr>
-          <p:cNvPicPr>
-            <a:picLocks noGrp="1" noChangeAspect="1"/>
-          </p:cNvPicPr>
-          <p:nvPr>
-            <p:ph type="clipArt" sz="quarter" idx="15"/>
-          </p:nvPr>
-        </p:nvPicPr>
-        <p:blipFill>
-          <a:blip r:embed="rId2"/>
-          <a:stretch>
-            <a:fillRect/>
-          </a:stretch>
-        </p:blipFill>
-        <p:spPr>
-          <a:xfrm>
-            <a:off x="583920" y="2151063"/>
-            <a:ext cx="5239310" cy="4008437"/>
-          </a:xfrm>
-          <a:prstGeom prst="rect">
-            <a:avLst/>
-          </a:prstGeom>
-        </p:spPr>
-      </p:pic>
       <p:sp>
         <p:nvSpPr>
           <p:cNvPr id="2" name="Fußzeilenplatzhalter 2">
@@ -11902,6 +12055,38 @@
           </a:p>
         </p:txBody>
       </p:sp>
+      <p:pic>
+        <p:nvPicPr>
+          <p:cNvPr id="8" name="Onlinebild-Platzhalter 7">
+            <a:extLst>
+              <a:ext uri="{FF2B5EF4-FFF2-40B4-BE49-F238E27FC236}">
+                <a16:creationId xmlns:a16="http://schemas.microsoft.com/office/drawing/2014/main" id="{852BDFE3-3368-4D37-37F6-F350BEA7FD95}"/>
+              </a:ext>
+            </a:extLst>
+          </p:cNvPr>
+          <p:cNvPicPr>
+            <a:picLocks noGrp="1" noChangeAspect="1"/>
+          </p:cNvPicPr>
+          <p:nvPr>
+            <p:ph type="clipArt" sz="quarter" idx="15"/>
+          </p:nvPr>
+        </p:nvPicPr>
+        <p:blipFill>
+          <a:blip r:embed="rId2"/>
+          <a:stretch>
+            <a:fillRect/>
+          </a:stretch>
+        </p:blipFill>
+        <p:spPr>
+          <a:xfrm>
+            <a:off x="520700" y="2231013"/>
+            <a:ext cx="5365750" cy="3848537"/>
+          </a:xfrm>
+          <a:prstGeom prst="rect">
+            <a:avLst/>
+          </a:prstGeom>
+        </p:spPr>
+      </p:pic>
     </p:spTree>
     <p:extLst>
       <p:ext uri="{BB962C8B-B14F-4D97-AF65-F5344CB8AC3E}">
@@ -11992,14 +12177,14 @@
             <p:ph sz="quarter" idx="14"/>
             <p:extLst>
               <p:ext uri="{D42A27DB-BD31-4B8C-83A1-F6EECF244321}">
-                <p14:modId xmlns:p14="http://schemas.microsoft.com/office/powerpoint/2010/main" val="844227278"/>
+                <p14:modId xmlns:p14="http://schemas.microsoft.com/office/powerpoint/2010/main" val="2690622234"/>
               </p:ext>
             </p:extLst>
           </p:nvPr>
         </p:nvGraphicFramePr>
         <p:xfrm>
           <a:off x="610072" y="4585708"/>
-          <a:ext cx="10971856" cy="1651000"/>
+          <a:ext cx="10971856" cy="1210945"/>
         </p:xfrm>
         <a:graphic>
           <a:graphicData uri="http://schemas.openxmlformats.org/drawingml/2006/table">
@@ -13022,7 +13207,7 @@
                         <a:buNone/>
                       </a:pPr>
                       <a:r>
-                        <a:rPr lang="es-ES_tradnl" sz="1100" dirty="0">
+                        <a:rPr lang="es-ES_tradnl" sz="900" dirty="0">
                           <a:effectLst/>
                           <a:latin typeface="Times New Roman" panose="02020603050405020304" pitchFamily="18" charset="0"/>
                           <a:ea typeface="Times New Roman" panose="02020603050405020304" pitchFamily="18" charset="0"/>
@@ -13054,7 +13239,7 @@
                         <a:buNone/>
                       </a:pPr>
                       <a:r>
-                        <a:rPr lang="es-ES_tradnl" sz="1100" dirty="0">
+                        <a:rPr lang="es-ES_tradnl" sz="900" dirty="0">
                           <a:effectLst/>
                           <a:latin typeface="Times New Roman" panose="02020603050405020304" pitchFamily="18" charset="0"/>
                           <a:ea typeface="Times New Roman" panose="02020603050405020304" pitchFamily="18" charset="0"/>
@@ -13086,7 +13271,7 @@
                         <a:buNone/>
                       </a:pPr>
                       <a:r>
-                        <a:rPr lang="es-ES_tradnl" sz="1100" dirty="0">
+                        <a:rPr lang="es-ES_tradnl" sz="900" dirty="0">
                           <a:effectLst/>
                           <a:latin typeface="Times New Roman" panose="02020603050405020304" pitchFamily="18" charset="0"/>
                           <a:ea typeface="Times New Roman" panose="02020603050405020304" pitchFamily="18" charset="0"/>
@@ -13118,7 +13303,7 @@
                         <a:buNone/>
                       </a:pPr>
                       <a:r>
-                        <a:rPr lang="es-ES_tradnl" sz="1100" dirty="0">
+                        <a:rPr lang="es-ES_tradnl" sz="900" dirty="0">
                           <a:effectLst/>
                           <a:latin typeface="Times New Roman" panose="02020603050405020304" pitchFamily="18" charset="0"/>
                           <a:ea typeface="Times New Roman" panose="02020603050405020304" pitchFamily="18" charset="0"/>
@@ -13150,7 +13335,7 @@
                         <a:buNone/>
                       </a:pPr>
                       <a:r>
-                        <a:rPr lang="es-ES_tradnl" sz="1100" dirty="0">
+                        <a:rPr lang="es-ES_tradnl" sz="900" dirty="0">
                           <a:effectLst/>
                           <a:latin typeface="Times New Roman" panose="02020603050405020304" pitchFamily="18" charset="0"/>
                           <a:ea typeface="Times New Roman" panose="02020603050405020304" pitchFamily="18" charset="0"/>
@@ -13182,7 +13367,7 @@
                         <a:buNone/>
                       </a:pPr>
                       <a:r>
-                        <a:rPr lang="es-ES_tradnl" sz="1100" dirty="0">
+                        <a:rPr lang="es-ES_tradnl" sz="900" dirty="0">
                           <a:effectLst/>
                           <a:latin typeface="Times New Roman" panose="02020603050405020304" pitchFamily="18" charset="0"/>
                           <a:ea typeface="Times New Roman" panose="02020603050405020304" pitchFamily="18" charset="0"/>
@@ -13214,7 +13399,7 @@
                         <a:buNone/>
                       </a:pPr>
                       <a:r>
-                        <a:rPr lang="es-ES_tradnl" sz="1100" dirty="0">
+                        <a:rPr lang="es-ES_tradnl" sz="900" dirty="0">
                           <a:effectLst/>
                           <a:latin typeface="Times New Roman" panose="02020603050405020304" pitchFamily="18" charset="0"/>
                           <a:ea typeface="Times New Roman" panose="02020603050405020304" pitchFamily="18" charset="0"/>
@@ -13246,7 +13431,7 @@
                         <a:buNone/>
                       </a:pPr>
                       <a:r>
-                        <a:rPr lang="es-ES_tradnl" sz="1100" dirty="0">
+                        <a:rPr lang="es-ES_tradnl" sz="900" dirty="0">
                           <a:effectLst/>
                           <a:latin typeface="Times New Roman" panose="02020603050405020304" pitchFamily="18" charset="0"/>
                           <a:ea typeface="Times New Roman" panose="02020603050405020304" pitchFamily="18" charset="0"/>
@@ -13278,7 +13463,7 @@
                         <a:buNone/>
                       </a:pPr>
                       <a:r>
-                        <a:rPr lang="es-ES_tradnl" sz="1100" dirty="0">
+                        <a:rPr lang="es-ES_tradnl" sz="900" dirty="0">
                           <a:effectLst/>
                           <a:latin typeface="Times New Roman" panose="02020603050405020304" pitchFamily="18" charset="0"/>
                           <a:ea typeface="Times New Roman" panose="02020603050405020304" pitchFamily="18" charset="0"/>
@@ -13310,7 +13495,7 @@
                         <a:buNone/>
                       </a:pPr>
                       <a:r>
-                        <a:rPr lang="es-ES_tradnl" sz="1100" dirty="0">
+                        <a:rPr lang="es-ES_tradnl" sz="900" dirty="0">
                           <a:effectLst/>
                           <a:latin typeface="Times New Roman" panose="02020603050405020304" pitchFamily="18" charset="0"/>
                           <a:ea typeface="Times New Roman" panose="02020603050405020304" pitchFamily="18" charset="0"/>
@@ -13342,17 +13527,23 @@
                         <a:buNone/>
                       </a:pPr>
                       <a:r>
-                        <a:rPr lang="es-ES_tradnl" sz="1100" dirty="0">
+                        <a:rPr lang="es-ES" sz="900">
                           <a:effectLst/>
                           <a:latin typeface="Times New Roman" panose="02020603050405020304" pitchFamily="18" charset="0"/>
                           <a:ea typeface="Times New Roman" panose="02020603050405020304" pitchFamily="18" charset="0"/>
                           <a:cs typeface="Times New Roman" panose="02020603050405020304" pitchFamily="18" charset="0"/>
                         </a:rPr>
-                        <a:t>1.78</a:t>
-                      </a:r>
-                    </a:p>
-                  </a:txBody>
-                  <a:tcPr marL="68580" marR="68580" marT="0" marB="0" anchor="ctr">
+                        <a:t>1.27</a:t>
+                      </a:r>
+                      <a:endParaRPr lang="de-DE" sz="900">
+                        <a:effectLst/>
+                        <a:latin typeface="Times New Roman" panose="02020603050405020304" pitchFamily="18" charset="0"/>
+                        <a:ea typeface="Times New Roman" panose="02020603050405020304" pitchFamily="18" charset="0"/>
+                        <a:cs typeface="Times New Roman" panose="02020603050405020304" pitchFamily="18" charset="0"/>
+                      </a:endParaRPr>
+                    </a:p>
+                  </a:txBody>
+                  <a:tcPr marL="68580" marR="68580" marT="0" marB="0">
                     <a:lnT w="12700" cap="flat" cmpd="sng" algn="ctr">
                       <a:solidFill>
                         <a:schemeClr val="tx1"/>
@@ -13374,17 +13565,23 @@
                         <a:buNone/>
                       </a:pPr>
                       <a:r>
-                        <a:rPr lang="es-ES_tradnl" sz="1100" dirty="0">
+                        <a:rPr lang="es-ES" sz="900">
                           <a:effectLst/>
                           <a:latin typeface="Times New Roman" panose="02020603050405020304" pitchFamily="18" charset="0"/>
                           <a:ea typeface="Times New Roman" panose="02020603050405020304" pitchFamily="18" charset="0"/>
                           <a:cs typeface="Times New Roman" panose="02020603050405020304" pitchFamily="18" charset="0"/>
                         </a:rPr>
-                        <a:t>12.84</a:t>
-                      </a:r>
-                    </a:p>
-                  </a:txBody>
-                  <a:tcPr marL="68580" marR="68580" marT="0" marB="0" anchor="ctr">
+                        <a:t>7.17</a:t>
+                      </a:r>
+                      <a:endParaRPr lang="de-DE" sz="900">
+                        <a:effectLst/>
+                        <a:latin typeface="Times New Roman" panose="02020603050405020304" pitchFamily="18" charset="0"/>
+                        <a:ea typeface="Times New Roman" panose="02020603050405020304" pitchFamily="18" charset="0"/>
+                        <a:cs typeface="Times New Roman" panose="02020603050405020304" pitchFamily="18" charset="0"/>
+                      </a:endParaRPr>
+                    </a:p>
+                  </a:txBody>
+                  <a:tcPr marL="68580" marR="68580" marT="0" marB="0">
                     <a:lnT w="12700" cap="flat" cmpd="sng" algn="ctr">
                       <a:solidFill>
                         <a:schemeClr val="tx1"/>
@@ -13406,17 +13603,23 @@
                         <a:buNone/>
                       </a:pPr>
                       <a:r>
-                        <a:rPr lang="es-ES_tradnl" sz="1100" dirty="0">
+                        <a:rPr lang="es-ES" sz="900">
                           <a:effectLst/>
                           <a:latin typeface="Times New Roman" panose="02020603050405020304" pitchFamily="18" charset="0"/>
                           <a:ea typeface="Times New Roman" panose="02020603050405020304" pitchFamily="18" charset="0"/>
                           <a:cs typeface="Times New Roman" panose="02020603050405020304" pitchFamily="18" charset="0"/>
                         </a:rPr>
-                        <a:t>2.01</a:t>
-                      </a:r>
-                    </a:p>
-                  </a:txBody>
-                  <a:tcPr marL="68580" marR="68580" marT="0" marB="0" anchor="ctr">
+                        <a:t>1.98</a:t>
+                      </a:r>
+                      <a:endParaRPr lang="de-DE" sz="900">
+                        <a:effectLst/>
+                        <a:latin typeface="Times New Roman" panose="02020603050405020304" pitchFamily="18" charset="0"/>
+                        <a:ea typeface="Times New Roman" panose="02020603050405020304" pitchFamily="18" charset="0"/>
+                        <a:cs typeface="Times New Roman" panose="02020603050405020304" pitchFamily="18" charset="0"/>
+                      </a:endParaRPr>
+                    </a:p>
+                  </a:txBody>
+                  <a:tcPr marL="68580" marR="68580" marT="0" marB="0">
                     <a:lnT w="12700" cap="flat" cmpd="sng" algn="ctr">
                       <a:solidFill>
                         <a:schemeClr val="tx1"/>
@@ -13438,17 +13641,23 @@
                         <a:buNone/>
                       </a:pPr>
                       <a:r>
-                        <a:rPr lang="es-ES_tradnl" sz="1100" dirty="0">
+                        <a:rPr lang="es-ES" sz="900">
                           <a:effectLst/>
                           <a:latin typeface="Times New Roman" panose="02020603050405020304" pitchFamily="18" charset="0"/>
                           <a:ea typeface="Times New Roman" panose="02020603050405020304" pitchFamily="18" charset="0"/>
                           <a:cs typeface="Times New Roman" panose="02020603050405020304" pitchFamily="18" charset="0"/>
                         </a:rPr>
-                        <a:t>65.50</a:t>
-                      </a:r>
-                    </a:p>
-                  </a:txBody>
-                  <a:tcPr marL="68580" marR="68580" marT="0" marB="0" anchor="ctr">
+                        <a:t>25.98</a:t>
+                      </a:r>
+                      <a:endParaRPr lang="de-DE" sz="900">
+                        <a:effectLst/>
+                        <a:latin typeface="Times New Roman" panose="02020603050405020304" pitchFamily="18" charset="0"/>
+                        <a:ea typeface="Times New Roman" panose="02020603050405020304" pitchFamily="18" charset="0"/>
+                        <a:cs typeface="Times New Roman" panose="02020603050405020304" pitchFamily="18" charset="0"/>
+                      </a:endParaRPr>
+                    </a:p>
+                  </a:txBody>
+                  <a:tcPr marL="68580" marR="68580" marT="0" marB="0">
                     <a:lnT w="12700" cap="flat" cmpd="sng" algn="ctr">
                       <a:solidFill>
                         <a:schemeClr val="tx1"/>
@@ -13470,7 +13679,7 @@
                         <a:buNone/>
                       </a:pPr>
                       <a:r>
-                        <a:rPr lang="es-ES_tradnl" sz="1100" dirty="0">
+                        <a:rPr lang="es-ES" sz="900">
                           <a:effectLst/>
                           <a:latin typeface="Times New Roman" panose="02020603050405020304" pitchFamily="18" charset="0"/>
                           <a:ea typeface="Times New Roman" panose="02020603050405020304" pitchFamily="18" charset="0"/>
@@ -13478,9 +13687,15 @@
                         </a:rPr>
                         <a:t>NaN</a:t>
                       </a:r>
-                    </a:p>
-                  </a:txBody>
-                  <a:tcPr marL="68580" marR="68580" marT="0" marB="0" anchor="ctr">
+                      <a:endParaRPr lang="de-DE" sz="900">
+                        <a:effectLst/>
+                        <a:latin typeface="Times New Roman" panose="02020603050405020304" pitchFamily="18" charset="0"/>
+                        <a:ea typeface="Times New Roman" panose="02020603050405020304" pitchFamily="18" charset="0"/>
+                        <a:cs typeface="Times New Roman" panose="02020603050405020304" pitchFamily="18" charset="0"/>
+                      </a:endParaRPr>
+                    </a:p>
+                  </a:txBody>
+                  <a:tcPr marL="68580" marR="68580" marT="0" marB="0">
                     <a:lnT w="12700" cap="flat" cmpd="sng" algn="ctr">
                       <a:solidFill>
                         <a:schemeClr val="tx1"/>
@@ -13535,7 +13750,7 @@
                         <a:buNone/>
                       </a:pPr>
                       <a:r>
-                        <a:rPr lang="es-ES_tradnl" sz="1100" dirty="0">
+                        <a:rPr lang="es-ES_tradnl" sz="900" dirty="0">
                           <a:effectLst/>
                           <a:latin typeface="Times New Roman" panose="02020603050405020304" pitchFamily="18" charset="0"/>
                           <a:ea typeface="Times New Roman" panose="02020603050405020304" pitchFamily="18" charset="0"/>
@@ -13558,7 +13773,7 @@
                         <a:buNone/>
                       </a:pPr>
                       <a:r>
-                        <a:rPr lang="es-ES_tradnl" sz="1100" dirty="0">
+                        <a:rPr lang="es-ES_tradnl" sz="900" dirty="0">
                           <a:effectLst/>
                           <a:latin typeface="Times New Roman" panose="02020603050405020304" pitchFamily="18" charset="0"/>
                           <a:ea typeface="Times New Roman" panose="02020603050405020304" pitchFamily="18" charset="0"/>
@@ -13581,7 +13796,7 @@
                         <a:buNone/>
                       </a:pPr>
                       <a:r>
-                        <a:rPr lang="es-ES_tradnl" sz="1100" dirty="0">
+                        <a:rPr lang="es-ES_tradnl" sz="900" dirty="0">
                           <a:effectLst/>
                           <a:latin typeface="Times New Roman" panose="02020603050405020304" pitchFamily="18" charset="0"/>
                           <a:ea typeface="Times New Roman" panose="02020603050405020304" pitchFamily="18" charset="0"/>
@@ -13604,7 +13819,7 @@
                         <a:buNone/>
                       </a:pPr>
                       <a:r>
-                        <a:rPr lang="es-ES_tradnl" sz="1100" dirty="0">
+                        <a:rPr lang="es-ES_tradnl" sz="900" dirty="0">
                           <a:effectLst/>
                           <a:latin typeface="Times New Roman" panose="02020603050405020304" pitchFamily="18" charset="0"/>
                           <a:ea typeface="Times New Roman" panose="02020603050405020304" pitchFamily="18" charset="0"/>
@@ -13627,7 +13842,7 @@
                         <a:buNone/>
                       </a:pPr>
                       <a:r>
-                        <a:rPr lang="es-ES_tradnl" sz="1100" dirty="0">
+                        <a:rPr lang="es-ES_tradnl" sz="900" dirty="0">
                           <a:effectLst/>
                           <a:latin typeface="Times New Roman" panose="02020603050405020304" pitchFamily="18" charset="0"/>
                           <a:ea typeface="Times New Roman" panose="02020603050405020304" pitchFamily="18" charset="0"/>
@@ -13650,7 +13865,7 @@
                         <a:buNone/>
                       </a:pPr>
                       <a:r>
-                        <a:rPr lang="es-ES_tradnl" sz="1100" dirty="0">
+                        <a:rPr lang="es-ES_tradnl" sz="900" dirty="0">
                           <a:effectLst/>
                           <a:latin typeface="Times New Roman" panose="02020603050405020304" pitchFamily="18" charset="0"/>
                           <a:ea typeface="Times New Roman" panose="02020603050405020304" pitchFamily="18" charset="0"/>
@@ -13673,7 +13888,7 @@
                         <a:buNone/>
                       </a:pPr>
                       <a:r>
-                        <a:rPr lang="es-ES_tradnl" sz="1100" dirty="0">
+                        <a:rPr lang="es-ES_tradnl" sz="900" dirty="0">
                           <a:effectLst/>
                           <a:latin typeface="Times New Roman" panose="02020603050405020304" pitchFamily="18" charset="0"/>
                           <a:ea typeface="Times New Roman" panose="02020603050405020304" pitchFamily="18" charset="0"/>
@@ -13696,7 +13911,7 @@
                         <a:buNone/>
                       </a:pPr>
                       <a:r>
-                        <a:rPr lang="es-ES_tradnl" sz="1100" dirty="0">
+                        <a:rPr lang="es-ES_tradnl" sz="900" dirty="0">
                           <a:effectLst/>
                           <a:latin typeface="Times New Roman" panose="02020603050405020304" pitchFamily="18" charset="0"/>
                           <a:ea typeface="Times New Roman" panose="02020603050405020304" pitchFamily="18" charset="0"/>
@@ -13719,7 +13934,7 @@
                         <a:buNone/>
                       </a:pPr>
                       <a:r>
-                        <a:rPr lang="es-ES_tradnl" sz="1100" dirty="0">
+                        <a:rPr lang="es-ES_tradnl" sz="900" dirty="0">
                           <a:effectLst/>
                           <a:latin typeface="Times New Roman" panose="02020603050405020304" pitchFamily="18" charset="0"/>
                           <a:ea typeface="Times New Roman" panose="02020603050405020304" pitchFamily="18" charset="0"/>
@@ -13742,7 +13957,7 @@
                         <a:buNone/>
                       </a:pPr>
                       <a:r>
-                        <a:rPr lang="es-ES_tradnl" sz="1100" dirty="0">
+                        <a:rPr lang="es-ES_tradnl" sz="900" dirty="0">
                           <a:effectLst/>
                           <a:latin typeface="Times New Roman" panose="02020603050405020304" pitchFamily="18" charset="0"/>
                           <a:ea typeface="Times New Roman" panose="02020603050405020304" pitchFamily="18" charset="0"/>
@@ -13765,99 +13980,123 @@
                         <a:buNone/>
                       </a:pPr>
                       <a:r>
-                        <a:rPr lang="es-ES_tradnl" sz="1100" dirty="0">
+                        <a:rPr lang="es-ES" sz="900">
                           <a:effectLst/>
                           <a:latin typeface="Times New Roman" panose="02020603050405020304" pitchFamily="18" charset="0"/>
                           <a:ea typeface="Times New Roman" panose="02020603050405020304" pitchFamily="18" charset="0"/>
                           <a:cs typeface="Times New Roman" panose="02020603050405020304" pitchFamily="18" charset="0"/>
                         </a:rPr>
-                        <a:t>2.50</a:t>
-                      </a:r>
-                    </a:p>
-                  </a:txBody>
-                  <a:tcPr marL="68580" marR="68580" marT="0" marB="0" anchor="ctr">
-                    <a:noFill/>
-                  </a:tcPr>
-                </a:tc>
-                <a:tc>
-                  <a:txBody>
-                    <a:bodyPr/>
-                    <a:lstStyle/>
-                    <a:p>
-                      <a:pPr algn="ctr">
-                        <a:buNone/>
-                      </a:pPr>
-                      <a:r>
-                        <a:rPr lang="es-ES_tradnl" sz="1100" dirty="0">
+                        <a:t>1.68</a:t>
+                      </a:r>
+                      <a:endParaRPr lang="de-DE" sz="900">
+                        <a:effectLst/>
+                        <a:latin typeface="Times New Roman" panose="02020603050405020304" pitchFamily="18" charset="0"/>
+                        <a:ea typeface="Times New Roman" panose="02020603050405020304" pitchFamily="18" charset="0"/>
+                        <a:cs typeface="Times New Roman" panose="02020603050405020304" pitchFamily="18" charset="0"/>
+                      </a:endParaRPr>
+                    </a:p>
+                  </a:txBody>
+                  <a:tcPr marL="68580" marR="68580" marT="0" marB="0">
+                    <a:noFill/>
+                  </a:tcPr>
+                </a:tc>
+                <a:tc>
+                  <a:txBody>
+                    <a:bodyPr/>
+                    <a:lstStyle/>
+                    <a:p>
+                      <a:pPr algn="ctr">
+                        <a:buNone/>
+                      </a:pPr>
+                      <a:r>
+                        <a:rPr lang="es-ES" sz="900">
                           <a:effectLst/>
                           <a:latin typeface="Times New Roman" panose="02020603050405020304" pitchFamily="18" charset="0"/>
                           <a:ea typeface="Times New Roman" panose="02020603050405020304" pitchFamily="18" charset="0"/>
                           <a:cs typeface="Times New Roman" panose="02020603050405020304" pitchFamily="18" charset="0"/>
                         </a:rPr>
-                        <a:t>29.28</a:t>
-                      </a:r>
-                    </a:p>
-                  </a:txBody>
-                  <a:tcPr marL="68580" marR="68580" marT="0" marB="0" anchor="ctr">
-                    <a:noFill/>
-                  </a:tcPr>
-                </a:tc>
-                <a:tc>
-                  <a:txBody>
-                    <a:bodyPr/>
-                    <a:lstStyle/>
-                    <a:p>
-                      <a:pPr algn="ctr">
-                        <a:buNone/>
-                      </a:pPr>
-                      <a:r>
-                        <a:rPr lang="es-ES_tradnl" sz="1100" dirty="0">
+                        <a:t>14.16</a:t>
+                      </a:r>
+                      <a:endParaRPr lang="de-DE" sz="900">
+                        <a:effectLst/>
+                        <a:latin typeface="Times New Roman" panose="02020603050405020304" pitchFamily="18" charset="0"/>
+                        <a:ea typeface="Times New Roman" panose="02020603050405020304" pitchFamily="18" charset="0"/>
+                        <a:cs typeface="Times New Roman" panose="02020603050405020304" pitchFamily="18" charset="0"/>
+                      </a:endParaRPr>
+                    </a:p>
+                  </a:txBody>
+                  <a:tcPr marL="68580" marR="68580" marT="0" marB="0">
+                    <a:noFill/>
+                  </a:tcPr>
+                </a:tc>
+                <a:tc>
+                  <a:txBody>
+                    <a:bodyPr/>
+                    <a:lstStyle/>
+                    <a:p>
+                      <a:pPr algn="ctr">
+                        <a:buNone/>
+                      </a:pPr>
+                      <a:r>
+                        <a:rPr lang="es-ES" sz="900">
                           <a:effectLst/>
                           <a:latin typeface="Times New Roman" panose="02020603050405020304" pitchFamily="18" charset="0"/>
                           <a:ea typeface="Times New Roman" panose="02020603050405020304" pitchFamily="18" charset="0"/>
                           <a:cs typeface="Times New Roman" panose="02020603050405020304" pitchFamily="18" charset="0"/>
                         </a:rPr>
-                        <a:t>3.69</a:t>
-                      </a:r>
-                    </a:p>
-                  </a:txBody>
-                  <a:tcPr marL="68580" marR="68580" marT="0" marB="0" anchor="ctr">
-                    <a:noFill/>
-                  </a:tcPr>
-                </a:tc>
-                <a:tc>
-                  <a:txBody>
-                    <a:bodyPr/>
-                    <a:lstStyle/>
-                    <a:p>
-                      <a:pPr algn="ctr">
-                        <a:buNone/>
-                      </a:pPr>
-                      <a:r>
-                        <a:rPr lang="es-ES_tradnl" sz="1100" dirty="0">
+                        <a:t>3.05</a:t>
+                      </a:r>
+                      <a:endParaRPr lang="de-DE" sz="900">
+                        <a:effectLst/>
+                        <a:latin typeface="Times New Roman" panose="02020603050405020304" pitchFamily="18" charset="0"/>
+                        <a:ea typeface="Times New Roman" panose="02020603050405020304" pitchFamily="18" charset="0"/>
+                        <a:cs typeface="Times New Roman" panose="02020603050405020304" pitchFamily="18" charset="0"/>
+                      </a:endParaRPr>
+                    </a:p>
+                  </a:txBody>
+                  <a:tcPr marL="68580" marR="68580" marT="0" marB="0">
+                    <a:noFill/>
+                  </a:tcPr>
+                </a:tc>
+                <a:tc>
+                  <a:txBody>
+                    <a:bodyPr/>
+                    <a:lstStyle/>
+                    <a:p>
+                      <a:pPr algn="ctr">
+                        <a:buNone/>
+                      </a:pPr>
+                      <a:r>
+                        <a:rPr lang="es-ES" sz="900">
                           <a:effectLst/>
                           <a:latin typeface="Times New Roman" panose="02020603050405020304" pitchFamily="18" charset="0"/>
                           <a:ea typeface="Times New Roman" panose="02020603050405020304" pitchFamily="18" charset="0"/>
                           <a:cs typeface="Times New Roman" panose="02020603050405020304" pitchFamily="18" charset="0"/>
                         </a:rPr>
-                        <a:t>49.66</a:t>
-                      </a:r>
-                    </a:p>
-                  </a:txBody>
-                  <a:tcPr marL="68580" marR="68580" marT="0" marB="0" anchor="ctr">
-                    <a:noFill/>
-                  </a:tcPr>
-                </a:tc>
-                <a:tc>
-                  <a:txBody>
-                    <a:bodyPr/>
-                    <a:lstStyle/>
-                    <a:p>
-                      <a:pPr algn="ctr">
-                        <a:buNone/>
-                      </a:pPr>
-                      <a:r>
-                        <a:rPr lang="es-ES_tradnl" sz="1100" dirty="0">
+                        <a:t>25.71</a:t>
+                      </a:r>
+                      <a:endParaRPr lang="de-DE" sz="900">
+                        <a:effectLst/>
+                        <a:latin typeface="Times New Roman" panose="02020603050405020304" pitchFamily="18" charset="0"/>
+                        <a:ea typeface="Times New Roman" panose="02020603050405020304" pitchFamily="18" charset="0"/>
+                        <a:cs typeface="Times New Roman" panose="02020603050405020304" pitchFamily="18" charset="0"/>
+                      </a:endParaRPr>
+                    </a:p>
+                  </a:txBody>
+                  <a:tcPr marL="68580" marR="68580" marT="0" marB="0">
+                    <a:noFill/>
+                  </a:tcPr>
+                </a:tc>
+                <a:tc>
+                  <a:txBody>
+                    <a:bodyPr/>
+                    <a:lstStyle/>
+                    <a:p>
+                      <a:pPr algn="ctr">
+                        <a:buNone/>
+                      </a:pPr>
+                      <a:r>
+                        <a:rPr lang="es-ES" sz="900">
                           <a:effectLst/>
                           <a:latin typeface="Times New Roman" panose="02020603050405020304" pitchFamily="18" charset="0"/>
                           <a:ea typeface="Times New Roman" panose="02020603050405020304" pitchFamily="18" charset="0"/>
@@ -13865,9 +14104,15 @@
                         </a:rPr>
                         <a:t>NaN</a:t>
                       </a:r>
-                    </a:p>
-                  </a:txBody>
-                  <a:tcPr marL="68580" marR="68580" marT="0" marB="0" anchor="ctr">
+                      <a:endParaRPr lang="de-DE" sz="900">
+                        <a:effectLst/>
+                        <a:latin typeface="Times New Roman" panose="02020603050405020304" pitchFamily="18" charset="0"/>
+                        <a:ea typeface="Times New Roman" panose="02020603050405020304" pitchFamily="18" charset="0"/>
+                        <a:cs typeface="Times New Roman" panose="02020603050405020304" pitchFamily="18" charset="0"/>
+                      </a:endParaRPr>
+                    </a:p>
+                  </a:txBody>
+                  <a:tcPr marL="68580" marR="68580" marT="0" marB="0">
                     <a:noFill/>
                   </a:tcPr>
                 </a:tc>
@@ -13913,7 +14158,7 @@
                         <a:buNone/>
                       </a:pPr>
                       <a:r>
-                        <a:rPr lang="es-ES_tradnl" sz="1100" dirty="0">
+                        <a:rPr lang="es-ES_tradnl" sz="900" dirty="0">
                           <a:effectLst/>
                           <a:latin typeface="Times New Roman" panose="02020603050405020304" pitchFamily="18" charset="0"/>
                           <a:ea typeface="Times New Roman" panose="02020603050405020304" pitchFamily="18" charset="0"/>
@@ -13936,7 +14181,7 @@
                         <a:buNone/>
                       </a:pPr>
                       <a:r>
-                        <a:rPr lang="es-ES_tradnl" sz="1100" dirty="0">
+                        <a:rPr lang="es-ES_tradnl" sz="900" dirty="0">
                           <a:effectLst/>
                           <a:latin typeface="Times New Roman" panose="02020603050405020304" pitchFamily="18" charset="0"/>
                           <a:ea typeface="Times New Roman" panose="02020603050405020304" pitchFamily="18" charset="0"/>
@@ -13959,7 +14204,7 @@
                         <a:buNone/>
                       </a:pPr>
                       <a:r>
-                        <a:rPr lang="es-ES_tradnl" sz="1100" dirty="0">
+                        <a:rPr lang="es-ES_tradnl" sz="900" dirty="0">
                           <a:effectLst/>
                           <a:latin typeface="Times New Roman" panose="02020603050405020304" pitchFamily="18" charset="0"/>
                           <a:ea typeface="Times New Roman" panose="02020603050405020304" pitchFamily="18" charset="0"/>
@@ -13982,7 +14227,7 @@
                         <a:buNone/>
                       </a:pPr>
                       <a:r>
-                        <a:rPr lang="es-ES_tradnl" sz="1100" dirty="0">
+                        <a:rPr lang="es-ES_tradnl" sz="900" dirty="0">
                           <a:effectLst/>
                           <a:latin typeface="Times New Roman" panose="02020603050405020304" pitchFamily="18" charset="0"/>
                           <a:ea typeface="Times New Roman" panose="02020603050405020304" pitchFamily="18" charset="0"/>
@@ -14005,7 +14250,7 @@
                         <a:buNone/>
                       </a:pPr>
                       <a:r>
-                        <a:rPr lang="es-ES_tradnl" sz="1100" dirty="0">
+                        <a:rPr lang="es-ES_tradnl" sz="900" dirty="0">
                           <a:effectLst/>
                           <a:latin typeface="Times New Roman" panose="02020603050405020304" pitchFamily="18" charset="0"/>
                           <a:ea typeface="Times New Roman" panose="02020603050405020304" pitchFamily="18" charset="0"/>
@@ -14028,7 +14273,7 @@
                         <a:buNone/>
                       </a:pPr>
                       <a:r>
-                        <a:rPr lang="es-ES_tradnl" sz="1100" dirty="0">
+                        <a:rPr lang="es-ES_tradnl" sz="900" dirty="0">
                           <a:effectLst/>
                           <a:latin typeface="Times New Roman" panose="02020603050405020304" pitchFamily="18" charset="0"/>
                           <a:ea typeface="Times New Roman" panose="02020603050405020304" pitchFamily="18" charset="0"/>
@@ -14051,7 +14296,7 @@
                         <a:buNone/>
                       </a:pPr>
                       <a:r>
-                        <a:rPr lang="es-ES_tradnl" sz="1100" dirty="0">
+                        <a:rPr lang="es-ES_tradnl" sz="900" dirty="0">
                           <a:effectLst/>
                           <a:latin typeface="Times New Roman" panose="02020603050405020304" pitchFamily="18" charset="0"/>
                           <a:ea typeface="Times New Roman" panose="02020603050405020304" pitchFamily="18" charset="0"/>
@@ -14074,7 +14319,7 @@
                         <a:buNone/>
                       </a:pPr>
                       <a:r>
-                        <a:rPr lang="es-ES_tradnl" sz="1100" dirty="0">
+                        <a:rPr lang="es-ES_tradnl" sz="900" dirty="0">
                           <a:effectLst/>
                           <a:latin typeface="Times New Roman" panose="02020603050405020304" pitchFamily="18" charset="0"/>
                           <a:ea typeface="Times New Roman" panose="02020603050405020304" pitchFamily="18" charset="0"/>
@@ -14097,7 +14342,7 @@
                         <a:buNone/>
                       </a:pPr>
                       <a:r>
-                        <a:rPr lang="es-ES_tradnl" sz="1100" dirty="0">
+                        <a:rPr lang="es-ES_tradnl" sz="900" dirty="0">
                           <a:effectLst/>
                           <a:latin typeface="Times New Roman" panose="02020603050405020304" pitchFamily="18" charset="0"/>
                           <a:ea typeface="Times New Roman" panose="02020603050405020304" pitchFamily="18" charset="0"/>
@@ -14120,7 +14365,7 @@
                         <a:buNone/>
                       </a:pPr>
                       <a:r>
-                        <a:rPr lang="es-ES_tradnl" sz="1100" dirty="0">
+                        <a:rPr lang="es-ES_tradnl" sz="900" dirty="0">
                           <a:effectLst/>
                           <a:latin typeface="Times New Roman" panose="02020603050405020304" pitchFamily="18" charset="0"/>
                           <a:ea typeface="Times New Roman" panose="02020603050405020304" pitchFamily="18" charset="0"/>
@@ -14143,99 +14388,123 @@
                         <a:buNone/>
                       </a:pPr>
                       <a:r>
-                        <a:rPr lang="es-ES_tradnl" sz="1100" dirty="0">
+                        <a:rPr lang="es-ES" sz="900">
                           <a:effectLst/>
                           <a:latin typeface="Times New Roman" panose="02020603050405020304" pitchFamily="18" charset="0"/>
                           <a:ea typeface="Times New Roman" panose="02020603050405020304" pitchFamily="18" charset="0"/>
                           <a:cs typeface="Times New Roman" panose="02020603050405020304" pitchFamily="18" charset="0"/>
                         </a:rPr>
-                        <a:t>3.23</a:t>
-                      </a:r>
-                    </a:p>
-                  </a:txBody>
-                  <a:tcPr marL="68580" marR="68580" marT="0" marB="0" anchor="ctr">
-                    <a:noFill/>
-                  </a:tcPr>
-                </a:tc>
-                <a:tc>
-                  <a:txBody>
-                    <a:bodyPr/>
-                    <a:lstStyle/>
-                    <a:p>
-                      <a:pPr algn="ctr">
-                        <a:buNone/>
-                      </a:pPr>
-                      <a:r>
-                        <a:rPr lang="es-ES_tradnl" sz="1100" dirty="0">
+                        <a:t>1.94</a:t>
+                      </a:r>
+                      <a:endParaRPr lang="de-DE" sz="900">
+                        <a:effectLst/>
+                        <a:latin typeface="Times New Roman" panose="02020603050405020304" pitchFamily="18" charset="0"/>
+                        <a:ea typeface="Times New Roman" panose="02020603050405020304" pitchFamily="18" charset="0"/>
+                        <a:cs typeface="Times New Roman" panose="02020603050405020304" pitchFamily="18" charset="0"/>
+                      </a:endParaRPr>
+                    </a:p>
+                  </a:txBody>
+                  <a:tcPr marL="68580" marR="68580" marT="0" marB="0">
+                    <a:noFill/>
+                  </a:tcPr>
+                </a:tc>
+                <a:tc>
+                  <a:txBody>
+                    <a:bodyPr/>
+                    <a:lstStyle/>
+                    <a:p>
+                      <a:pPr algn="ctr">
+                        <a:buNone/>
+                      </a:pPr>
+                      <a:r>
+                        <a:rPr lang="es-ES" sz="900">
                           <a:effectLst/>
                           <a:latin typeface="Times New Roman" panose="02020603050405020304" pitchFamily="18" charset="0"/>
                           <a:ea typeface="Times New Roman" panose="02020603050405020304" pitchFamily="18" charset="0"/>
                           <a:cs typeface="Times New Roman" panose="02020603050405020304" pitchFamily="18" charset="0"/>
                         </a:rPr>
-                        <a:t>54.46</a:t>
-                      </a:r>
-                    </a:p>
-                  </a:txBody>
-                  <a:tcPr marL="68580" marR="68580" marT="0" marB="0" anchor="ctr">
-                    <a:noFill/>
-                  </a:tcPr>
-                </a:tc>
-                <a:tc>
-                  <a:txBody>
-                    <a:bodyPr/>
-                    <a:lstStyle/>
-                    <a:p>
-                      <a:pPr algn="ctr">
-                        <a:buNone/>
-                      </a:pPr>
-                      <a:r>
-                        <a:rPr lang="es-ES_tradnl" sz="1100" dirty="0">
+                        <a:t>20.25</a:t>
+                      </a:r>
+                      <a:endParaRPr lang="de-DE" sz="900">
+                        <a:effectLst/>
+                        <a:latin typeface="Times New Roman" panose="02020603050405020304" pitchFamily="18" charset="0"/>
+                        <a:ea typeface="Times New Roman" panose="02020603050405020304" pitchFamily="18" charset="0"/>
+                        <a:cs typeface="Times New Roman" panose="02020603050405020304" pitchFamily="18" charset="0"/>
+                      </a:endParaRPr>
+                    </a:p>
+                  </a:txBody>
+                  <a:tcPr marL="68580" marR="68580" marT="0" marB="0">
+                    <a:noFill/>
+                  </a:tcPr>
+                </a:tc>
+                <a:tc>
+                  <a:txBody>
+                    <a:bodyPr/>
+                    <a:lstStyle/>
+                    <a:p>
+                      <a:pPr algn="ctr">
+                        <a:buNone/>
+                      </a:pPr>
+                      <a:r>
+                        <a:rPr lang="es-ES" sz="900">
                           <a:effectLst/>
                           <a:latin typeface="Times New Roman" panose="02020603050405020304" pitchFamily="18" charset="0"/>
                           <a:ea typeface="Times New Roman" panose="02020603050405020304" pitchFamily="18" charset="0"/>
                           <a:cs typeface="Times New Roman" panose="02020603050405020304" pitchFamily="18" charset="0"/>
                         </a:rPr>
-                        <a:t>6.19</a:t>
-                      </a:r>
-                    </a:p>
-                  </a:txBody>
-                  <a:tcPr marL="68580" marR="68580" marT="0" marB="0" anchor="ctr">
-                    <a:noFill/>
-                  </a:tcPr>
-                </a:tc>
-                <a:tc>
-                  <a:txBody>
-                    <a:bodyPr/>
-                    <a:lstStyle/>
-                    <a:p>
-                      <a:pPr algn="ctr">
-                        <a:buNone/>
-                      </a:pPr>
-                      <a:r>
-                        <a:rPr lang="es-ES_tradnl" sz="1100" dirty="0">
+                        <a:t>4.14</a:t>
+                      </a:r>
+                      <a:endParaRPr lang="de-DE" sz="900">
+                        <a:effectLst/>
+                        <a:latin typeface="Times New Roman" panose="02020603050405020304" pitchFamily="18" charset="0"/>
+                        <a:ea typeface="Times New Roman" panose="02020603050405020304" pitchFamily="18" charset="0"/>
+                        <a:cs typeface="Times New Roman" panose="02020603050405020304" pitchFamily="18" charset="0"/>
+                      </a:endParaRPr>
+                    </a:p>
+                  </a:txBody>
+                  <a:tcPr marL="68580" marR="68580" marT="0" marB="0">
+                    <a:noFill/>
+                  </a:tcPr>
+                </a:tc>
+                <a:tc>
+                  <a:txBody>
+                    <a:bodyPr/>
+                    <a:lstStyle/>
+                    <a:p>
+                      <a:pPr algn="ctr">
+                        <a:buNone/>
+                      </a:pPr>
+                      <a:r>
+                        <a:rPr lang="es-ES" sz="900">
                           <a:effectLst/>
                           <a:latin typeface="Times New Roman" panose="02020603050405020304" pitchFamily="18" charset="0"/>
                           <a:ea typeface="Times New Roman" panose="02020603050405020304" pitchFamily="18" charset="0"/>
                           <a:cs typeface="Times New Roman" panose="02020603050405020304" pitchFamily="18" charset="0"/>
                         </a:rPr>
-                        <a:t>50.02</a:t>
-                      </a:r>
-                    </a:p>
-                  </a:txBody>
-                  <a:tcPr marL="68580" marR="68580" marT="0" marB="0" anchor="ctr">
-                    <a:noFill/>
-                  </a:tcPr>
-                </a:tc>
-                <a:tc>
-                  <a:txBody>
-                    <a:bodyPr/>
-                    <a:lstStyle/>
-                    <a:p>
-                      <a:pPr algn="ctr">
-                        <a:buNone/>
-                      </a:pPr>
-                      <a:r>
-                        <a:rPr lang="es-ES_tradnl" sz="1100" dirty="0">
+                        <a:t>54.20</a:t>
+                      </a:r>
+                      <a:endParaRPr lang="de-DE" sz="900">
+                        <a:effectLst/>
+                        <a:latin typeface="Times New Roman" panose="02020603050405020304" pitchFamily="18" charset="0"/>
+                        <a:ea typeface="Times New Roman" panose="02020603050405020304" pitchFamily="18" charset="0"/>
+                        <a:cs typeface="Times New Roman" panose="02020603050405020304" pitchFamily="18" charset="0"/>
+                      </a:endParaRPr>
+                    </a:p>
+                  </a:txBody>
+                  <a:tcPr marL="68580" marR="68580" marT="0" marB="0">
+                    <a:noFill/>
+                  </a:tcPr>
+                </a:tc>
+                <a:tc>
+                  <a:txBody>
+                    <a:bodyPr/>
+                    <a:lstStyle/>
+                    <a:p>
+                      <a:pPr algn="ctr">
+                        <a:buNone/>
+                      </a:pPr>
+                      <a:r>
+                        <a:rPr lang="es-ES" sz="900" dirty="0">
                           <a:effectLst/>
                           <a:latin typeface="Times New Roman" panose="02020603050405020304" pitchFamily="18" charset="0"/>
                           <a:ea typeface="Times New Roman" panose="02020603050405020304" pitchFamily="18" charset="0"/>
@@ -14243,9 +14512,15 @@
                         </a:rPr>
                         <a:t>NaN</a:t>
                       </a:r>
-                    </a:p>
-                  </a:txBody>
-                  <a:tcPr marL="68580" marR="68580" marT="0" marB="0" anchor="ctr">
+                      <a:endParaRPr lang="de-DE" sz="900" dirty="0">
+                        <a:effectLst/>
+                        <a:latin typeface="Times New Roman" panose="02020603050405020304" pitchFamily="18" charset="0"/>
+                        <a:ea typeface="Times New Roman" panose="02020603050405020304" pitchFamily="18" charset="0"/>
+                        <a:cs typeface="Times New Roman" panose="02020603050405020304" pitchFamily="18" charset="0"/>
+                      </a:endParaRPr>
+                    </a:p>
+                  </a:txBody>
+                  <a:tcPr marL="68580" marR="68580" marT="0" marB="0">
                     <a:noFill/>
                   </a:tcPr>
                 </a:tc>
